--- a/中长期交易基本说明与业务逻辑.pptx
+++ b/中长期交易基本说明与业务逻辑.pptx
@@ -16,7 +16,7 @@
     <p:sldId id="264" r:id="rId15"/>
     <p:sldId id="265" r:id="rId16"/>
   </p:sldIdLst>
-  <p:sldSz cx="12191695" cy="6858000" type="screen4x3"/>
+  <p:sldSz cx="9144000" cy="6858000" type="screen4x3"/>
   <p:notesSz cx="6858000" cy="9144000"/>
   <p:defaultTextStyle>
     <a:defPPr>
@@ -3093,7 +3093,7 @@
     <p:bg>
       <p:bgPr>
         <a:solidFill>
-          <a:srgbClr val="0B2B4D"/>
+          <a:srgbClr val="FFFFFF"/>
         </a:solidFill>
         <a:effectLst/>
       </p:bgPr>
@@ -3105,22 +3105,116 @@
         <p:nvPr/>
       </p:nvGrpSpPr>
       <p:grpSpPr/>
-      <p:sp>
-        <p:nvSpPr>
-          <p:cNvPr id="2" name="Rectangle 1"/>
+      <p:pic>
+        <p:nvPicPr>
+          <p:cNvPr id="2" name="Picture 1" descr="banner.png"/>
+          <p:cNvPicPr>
+            <a:picLocks noChangeAspect="1"/>
+          </p:cNvPicPr>
+          <p:nvPr/>
+        </p:nvPicPr>
+        <p:blipFill>
+          <a:blip r:embed="rId2"/>
+          <a:stretch>
+            <a:fillRect/>
+          </a:stretch>
+        </p:blipFill>
+        <p:spPr>
+          <a:xfrm>
+            <a:off x="0" y="0"/>
+            <a:ext cx="9144000" cy="832104"/>
+          </a:xfrm>
+          <a:prstGeom prst="rect">
+            <a:avLst/>
+          </a:prstGeom>
+        </p:spPr>
+      </p:pic>
+      <p:sp>
+        <p:nvSpPr>
+          <p:cNvPr id="3" name="TextBox 2"/>
+          <p:cNvSpPr txBox="1"/>
+          <p:nvPr/>
+        </p:nvSpPr>
+        <p:spPr>
+          <a:xfrm>
+            <a:off x="640080" y="2377440"/>
+            <a:ext cx="7863840" cy="1188720"/>
+          </a:xfrm>
+          <a:prstGeom prst="rect">
+            <a:avLst/>
+          </a:prstGeom>
+          <a:noFill/>
+        </p:spPr>
+        <p:txBody>
+          <a:bodyPr wrap="square">
+            <a:spAutoFit/>
+          </a:bodyPr>
+          <a:lstStyle/>
+          <a:p>
+            <a:pPr algn="ctr"/>
+            <a:r>
+              <a:rPr sz="3400" b="1">
+                <a:solidFill>
+                  <a:srgbClr val="006B6B"/>
+                </a:solidFill>
+                <a:latin typeface="微软雅黑"/>
+              </a:rPr>
+              <a:t>中长期交易基本说明与业务逻辑</a:t>
+            </a:r>
+          </a:p>
+        </p:txBody>
+      </p:sp>
+      <p:sp>
+        <p:nvSpPr>
+          <p:cNvPr id="4" name="TextBox 3"/>
+          <p:cNvSpPr txBox="1"/>
+          <p:nvPr/>
+        </p:nvSpPr>
+        <p:spPr>
+          <a:xfrm>
+            <a:off x="640080" y="3246120"/>
+            <a:ext cx="7863840" cy="457200"/>
+          </a:xfrm>
+          <a:prstGeom prst="rect">
+            <a:avLst/>
+          </a:prstGeom>
+          <a:noFill/>
+        </p:spPr>
+        <p:txBody>
+          <a:bodyPr wrap="square">
+            <a:spAutoFit/>
+          </a:bodyPr>
+          <a:lstStyle/>
+          <a:p>
+            <a:pPr algn="ctr"/>
+            <a:r>
+              <a:rPr sz="1500" b="0">
+                <a:solidFill>
+                  <a:srgbClr val="595F66"/>
+                </a:solidFill>
+                <a:latin typeface="微软雅黑"/>
+              </a:rPr>
+              <a:t>广西电力市场 · 中长期交易规则与策略汇报</a:t>
+            </a:r>
+          </a:p>
+        </p:txBody>
+      </p:sp>
+      <p:sp>
+        <p:nvSpPr>
+          <p:cNvPr id="5" name="Rectangle 4"/>
           <p:cNvSpPr/>
           <p:nvPr/>
         </p:nvSpPr>
         <p:spPr>
           <a:xfrm>
-            <a:off x="0" y="6126480"/>
-            <a:ext cx="12191695" cy="45720"/>
+            <a:off x="3931920" y="3794760"/>
+            <a:ext cx="1280160" cy="25400"/>
           </a:xfrm>
           <a:prstGeom prst="rect">
             <a:avLst/>
           </a:prstGeom>
           <a:solidFill>
-            <a:srgbClr val="E87A1E"/>
+            <a:srgbClr val="008080"/>
           </a:solidFill>
           <a:ln>
             <a:noFill/>
@@ -3151,14 +3245,14 @@
       </p:sp>
       <p:sp>
         <p:nvSpPr>
-          <p:cNvPr id="3" name="TextBox 2"/>
+          <p:cNvPr id="6" name="TextBox 5"/>
           <p:cNvSpPr txBox="1"/>
           <p:nvPr/>
         </p:nvSpPr>
         <p:spPr>
           <a:xfrm>
-            <a:off x="914400" y="2286000"/>
-            <a:ext cx="10332720" cy="1097280"/>
+            <a:off x="640080" y="6126480"/>
+            <a:ext cx="7863840" cy="365760"/>
           </a:xfrm>
           <a:prstGeom prst="rect">
             <a:avLst/>
@@ -3173,27 +3267,27 @@
           <a:p>
             <a:pPr algn="ctr"/>
             <a:r>
-              <a:rPr sz="4000" b="1" i="0">
-                <a:solidFill>
-                  <a:srgbClr val="FFFFFF"/>
-                </a:solidFill>
-                <a:latin typeface="Microsoft YaHei"/>
-              </a:rPr>
-              <a:t>中长期交易基本说明与业务逻辑</a:t>
-            </a:r>
-          </a:p>
-        </p:txBody>
-      </p:sp>
-      <p:sp>
-        <p:nvSpPr>
-          <p:cNvPr id="4" name="TextBox 3"/>
+              <a:rPr sz="1100" b="0">
+                <a:solidFill>
+                  <a:srgbClr val="595F66"/>
+                </a:solidFill>
+                <a:latin typeface="微软雅黑"/>
+              </a:rPr>
+              <a:t>V1.0.1</a:t>
+            </a:r>
+          </a:p>
+        </p:txBody>
+      </p:sp>
+      <p:sp>
+        <p:nvSpPr>
+          <p:cNvPr id="7" name="TextBox 6"/>
           <p:cNvSpPr txBox="1"/>
           <p:nvPr/>
         </p:nvSpPr>
         <p:spPr>
           <a:xfrm>
-            <a:off x="914400" y="3291840"/>
-            <a:ext cx="10332720" cy="548640"/>
+            <a:off x="8641080" y="6537960"/>
+            <a:ext cx="365760" cy="274320"/>
           </a:xfrm>
           <a:prstGeom prst="rect">
             <a:avLst/>
@@ -3206,50 +3300,15 @@
           </a:bodyPr>
           <a:lstStyle/>
           <a:p>
-            <a:pPr algn="ctr"/>
-            <a:r>
-              <a:rPr sz="1800" b="0" i="0">
-                <a:solidFill>
-                  <a:srgbClr val="CFDDEC"/>
-                </a:solidFill>
-                <a:latin typeface="Microsoft YaHei"/>
-              </a:rPr>
-              <a:t>广西电力市场 · 中长期交易规则与策略汇报</a:t>
-            </a:r>
-          </a:p>
-        </p:txBody>
-      </p:sp>
-      <p:sp>
-        <p:nvSpPr>
-          <p:cNvPr id="5" name="TextBox 4"/>
-          <p:cNvSpPr txBox="1"/>
-          <p:nvPr/>
-        </p:nvSpPr>
-        <p:spPr>
-          <a:xfrm>
-            <a:off x="914400" y="6263640"/>
-            <a:ext cx="10332720" cy="365760"/>
-          </a:xfrm>
-          <a:prstGeom prst="rect">
-            <a:avLst/>
-          </a:prstGeom>
-          <a:noFill/>
-        </p:spPr>
-        <p:txBody>
-          <a:bodyPr wrap="square">
-            <a:spAutoFit/>
-          </a:bodyPr>
-          <a:lstStyle/>
-          <a:p>
-            <a:pPr algn="ctr"/>
-            <a:r>
-              <a:rPr sz="1200" b="0" i="0">
-                <a:solidFill>
-                  <a:srgbClr val="9AB3CE"/>
-                </a:solidFill>
-                <a:latin typeface="Microsoft YaHei"/>
-              </a:rPr>
-              <a:t>V1.0.1</a:t>
+            <a:pPr algn="r"/>
+            <a:r>
+              <a:rPr sz="1100" b="0">
+                <a:solidFill>
+                  <a:srgbClr val="595F66"/>
+                </a:solidFill>
+                <a:latin typeface="微软雅黑"/>
+              </a:rPr>
+              <a:t>1</a:t>
             </a:r>
           </a:p>
         </p:txBody>
@@ -3280,22 +3339,368 @@
         <p:nvPr/>
       </p:nvGrpSpPr>
       <p:grpSpPr/>
-      <p:sp>
-        <p:nvSpPr>
-          <p:cNvPr id="2" name="Rectangle 1"/>
+      <p:pic>
+        <p:nvPicPr>
+          <p:cNvPr id="2" name="Picture 1" descr="banner.png"/>
+          <p:cNvPicPr>
+            <a:picLocks noChangeAspect="1"/>
+          </p:cNvPicPr>
+          <p:nvPr/>
+        </p:nvPicPr>
+        <p:blipFill>
+          <a:blip r:embed="rId2"/>
+          <a:stretch>
+            <a:fillRect/>
+          </a:stretch>
+        </p:blipFill>
+        <p:spPr>
+          <a:xfrm>
+            <a:off x="0" y="0"/>
+            <a:ext cx="9144000" cy="832104"/>
+          </a:xfrm>
+          <a:prstGeom prst="rect">
+            <a:avLst/>
+          </a:prstGeom>
+        </p:spPr>
+      </p:pic>
+      <p:sp>
+        <p:nvSpPr>
+          <p:cNvPr id="3" name="TextBox 2"/>
+          <p:cNvSpPr txBox="1"/>
+          <p:nvPr/>
+        </p:nvSpPr>
+        <p:spPr>
+          <a:xfrm>
+            <a:off x="320040" y="109728"/>
+            <a:ext cx="7315200" cy="640080"/>
+          </a:xfrm>
+          <a:prstGeom prst="rect">
+            <a:avLst/>
+          </a:prstGeom>
+          <a:noFill/>
+        </p:spPr>
+        <p:txBody>
+          <a:bodyPr wrap="square">
+            <a:spAutoFit/>
+          </a:bodyPr>
+          <a:lstStyle/>
+          <a:p>
+            <a:pPr algn="l"/>
+            <a:r>
+              <a:rPr sz="1800" b="1">
+                <a:solidFill>
+                  <a:srgbClr val="008080"/>
+                </a:solidFill>
+                <a:latin typeface="微软雅黑"/>
+              </a:rPr>
+              <a:t>月度策略 / 全局套利构想 / 补充内容</a:t>
+            </a:r>
+          </a:p>
+        </p:txBody>
+      </p:sp>
+      <p:sp>
+        <p:nvSpPr>
+          <p:cNvPr id="4" name="TextBox 3"/>
+          <p:cNvSpPr txBox="1"/>
+          <p:nvPr/>
+        </p:nvSpPr>
+        <p:spPr>
+          <a:xfrm>
+            <a:off x="365760" y="914400"/>
+            <a:ext cx="3657600" cy="320040"/>
+          </a:xfrm>
+          <a:prstGeom prst="rect">
+            <a:avLst/>
+          </a:prstGeom>
+          <a:noFill/>
+        </p:spPr>
+        <p:txBody>
+          <a:bodyPr wrap="square">
+            <a:spAutoFit/>
+          </a:bodyPr>
+          <a:lstStyle/>
+          <a:p>
+            <a:pPr algn="l"/>
+            <a:r>
+              <a:rPr sz="1400" b="1">
+                <a:solidFill>
+                  <a:srgbClr val="006B6B"/>
+                </a:solidFill>
+                <a:latin typeface="微软雅黑"/>
+              </a:rPr>
+              <a:t>月度策略（现状）</a:t>
+            </a:r>
+          </a:p>
+        </p:txBody>
+      </p:sp>
+      <p:sp>
+        <p:nvSpPr>
+          <p:cNvPr id="5" name="TextBox 4"/>
+          <p:cNvSpPr txBox="1"/>
+          <p:nvPr/>
+        </p:nvSpPr>
+        <p:spPr>
+          <a:xfrm>
+            <a:off x="365760" y="1234440"/>
+            <a:ext cx="4114800" cy="1371600"/>
+          </a:xfrm>
+          <a:prstGeom prst="rect">
+            <a:avLst/>
+          </a:prstGeom>
+          <a:noFill/>
+        </p:spPr>
+        <p:txBody>
+          <a:bodyPr wrap="square">
+            <a:spAutoFit/>
+          </a:bodyPr>
+          <a:lstStyle/>
+          <a:p>
+            <a:pPr>
+              <a:lnSpc>
+                <a:spcPct val="115000"/>
+              </a:lnSpc>
+              <a:spcAft>
+                <a:spcPts val="500"/>
+              </a:spcAft>
+            </a:pPr>
+            <a:r>
+              <a:rPr sz="1100" b="1">
+                <a:solidFill>
+                  <a:srgbClr val="006B6B"/>
+                </a:solidFill>
+                <a:latin typeface="微软雅黑"/>
+              </a:rPr>
+              <a:t>• 无法准确预测本月发电侧实时市场加权均价</a:t>
+            </a:r>
+          </a:p>
+          <a:p>
+            <a:pPr>
+              <a:lnSpc>
+                <a:spcPct val="115000"/>
+              </a:lnSpc>
+              <a:spcAft>
+                <a:spcPts val="500"/>
+              </a:spcAft>
+            </a:pPr>
+            <a:r>
+              <a:rPr sz="1100" b="1">
+                <a:solidFill>
+                  <a:srgbClr val="006B6B"/>
+                </a:solidFill>
+                <a:latin typeface="微软雅黑"/>
+              </a:rPr>
+              <a:t>• 月初观望、月中启动并逐渐放量；放量比例人工决策</a:t>
+            </a:r>
+          </a:p>
+          <a:p>
+            <a:pPr>
+              <a:lnSpc>
+                <a:spcPct val="115000"/>
+              </a:lnSpc>
+              <a:spcAft>
+                <a:spcPts val="500"/>
+              </a:spcAft>
+            </a:pPr>
+            <a:r>
+              <a:rPr sz="1100" b="1">
+                <a:solidFill>
+                  <a:srgbClr val="006B6B"/>
+                </a:solidFill>
+                <a:latin typeface="微软雅黑"/>
+              </a:rPr>
+              <a:t>• 原则：保证月末考核电量基本为0，但不绝对</a:t>
+            </a:r>
+          </a:p>
+        </p:txBody>
+      </p:sp>
+      <p:sp>
+        <p:nvSpPr>
+          <p:cNvPr id="6" name="TextBox 5"/>
+          <p:cNvSpPr txBox="1"/>
+          <p:nvPr/>
+        </p:nvSpPr>
+        <p:spPr>
+          <a:xfrm>
+            <a:off x="365760" y="2697480"/>
+            <a:ext cx="4114800" cy="320040"/>
+          </a:xfrm>
+          <a:prstGeom prst="rect">
+            <a:avLst/>
+          </a:prstGeom>
+          <a:noFill/>
+        </p:spPr>
+        <p:txBody>
+          <a:bodyPr wrap="square">
+            <a:spAutoFit/>
+          </a:bodyPr>
+          <a:lstStyle/>
+          <a:p>
+            <a:pPr algn="l"/>
+            <a:r>
+              <a:rPr sz="1400" b="1">
+                <a:solidFill>
+                  <a:srgbClr val="006B6B"/>
+                </a:solidFill>
+                <a:latin typeface="微软雅黑"/>
+              </a:rPr>
+              <a:t>全局套利构想【待讨论】</a:t>
+            </a:r>
+          </a:p>
+        </p:txBody>
+      </p:sp>
+      <p:sp>
+        <p:nvSpPr>
+          <p:cNvPr id="7" name="TextBox 6"/>
+          <p:cNvSpPr txBox="1"/>
+          <p:nvPr/>
+        </p:nvSpPr>
+        <p:spPr>
+          <a:xfrm>
+            <a:off x="365760" y="3017520"/>
+            <a:ext cx="4114800" cy="3200400"/>
+          </a:xfrm>
+          <a:prstGeom prst="rect">
+            <a:avLst/>
+          </a:prstGeom>
+          <a:noFill/>
+        </p:spPr>
+        <p:txBody>
+          <a:bodyPr wrap="square">
+            <a:spAutoFit/>
+          </a:bodyPr>
+          <a:lstStyle/>
+          <a:p>
+            <a:pPr>
+              <a:lnSpc>
+                <a:spcPct val="115000"/>
+              </a:lnSpc>
+              <a:spcAft>
+                <a:spcPts val="500"/>
+              </a:spcAft>
+            </a:pPr>
+            <a:r>
+              <a:rPr sz="1080" b="1">
+                <a:solidFill>
+                  <a:srgbClr val="006B6B"/>
+                </a:solidFill>
+                <a:latin typeface="微软雅黑"/>
+              </a:rPr>
+              <a:t>• 三层架构：月度分布→多日分布→单点策略</a:t>
+            </a:r>
+          </a:p>
+          <a:p>
+            <a:pPr lvl="1">
+              <a:lnSpc>
+                <a:spcPct val="115000"/>
+              </a:lnSpc>
+              <a:spcAft>
+                <a:spcPts val="500"/>
+              </a:spcAft>
+            </a:pPr>
+            <a:r>
+              <a:rPr sz="930" b="0">
+                <a:solidFill>
+                  <a:srgbClr val="595F66"/>
+                </a:solidFill>
+                <a:latin typeface="微软雅黑"/>
+              </a:rPr>
+              <a:t>- 月初/月内滚动判断全月电价趋势，确定多日电能量分布</a:t>
+            </a:r>
+          </a:p>
+          <a:p>
+            <a:pPr lvl="1">
+              <a:lnSpc>
+                <a:spcPct val="115000"/>
+              </a:lnSpc>
+              <a:spcAft>
+                <a:spcPts val="500"/>
+              </a:spcAft>
+            </a:pPr>
+            <a:r>
+              <a:rPr sz="930" b="0">
+                <a:solidFill>
+                  <a:srgbClr val="595F66"/>
+                </a:solidFill>
+                <a:latin typeface="微软雅黑"/>
+              </a:rPr>
+              <a:t>- 单次交易判断2~5天趋势，确定各时段交易电量分布</a:t>
+            </a:r>
+          </a:p>
+          <a:p>
+            <a:pPr lvl="1">
+              <a:lnSpc>
+                <a:spcPct val="115000"/>
+              </a:lnSpc>
+              <a:spcAft>
+                <a:spcPts val="500"/>
+              </a:spcAft>
+            </a:pPr>
+            <a:r>
+              <a:rPr sz="930" b="0">
+                <a:solidFill>
+                  <a:srgbClr val="595F66"/>
+                </a:solidFill>
+                <a:latin typeface="微软雅黑"/>
+              </a:rPr>
+              <a:t>- 单时刻点按盈亏概率报量报价</a:t>
+            </a:r>
+          </a:p>
+          <a:p>
+            <a:pPr>
+              <a:lnSpc>
+                <a:spcPct val="115000"/>
+              </a:lnSpc>
+              <a:spcAft>
+                <a:spcPts val="500"/>
+              </a:spcAft>
+            </a:pPr>
+            <a:r>
+              <a:rPr sz="1080" b="1">
+                <a:solidFill>
+                  <a:srgbClr val="006B6B"/>
+                </a:solidFill>
+                <a:latin typeface="微软雅黑"/>
+              </a:rPr>
+              <a:t>• 需实时动态调整：月初与月末现货价差可达200–300元/MWh</a:t>
+            </a:r>
+          </a:p>
+          <a:p>
+            <a:pPr>
+              <a:lnSpc>
+                <a:spcPct val="115000"/>
+              </a:lnSpc>
+              <a:spcAft>
+                <a:spcPts val="500"/>
+              </a:spcAft>
+            </a:pPr>
+            <a:r>
+              <a:rPr sz="1080" b="1">
+                <a:solidFill>
+                  <a:srgbClr val="006B6B"/>
+                </a:solidFill>
+                <a:latin typeface="微软雅黑"/>
+              </a:rPr>
+              <a:t>• 策略触发须明确告知交易员，由其决策是否执行</a:t>
+            </a:r>
+          </a:p>
+        </p:txBody>
+      </p:sp>
+      <p:sp>
+        <p:nvSpPr>
+          <p:cNvPr id="8" name="Rectangle 7"/>
           <p:cNvSpPr/>
           <p:nvPr/>
         </p:nvSpPr>
         <p:spPr>
           <a:xfrm>
-            <a:off x="0" y="0"/>
-            <a:ext cx="12191695" cy="1051560"/>
+            <a:off x="4846320" y="914400"/>
+            <a:ext cx="3931920" cy="5349240"/>
           </a:xfrm>
           <a:prstGeom prst="rect">
             <a:avLst/>
           </a:prstGeom>
           <a:solidFill>
-            <a:srgbClr val="0B2B4D"/>
+            <a:srgbClr val="F8F8F8"/>
           </a:solidFill>
           <a:ln>
             <a:noFill/>
@@ -3326,58 +3731,14 @@
       </p:sp>
       <p:sp>
         <p:nvSpPr>
-          <p:cNvPr id="3" name="Rectangle 2"/>
-          <p:cNvSpPr/>
-          <p:nvPr/>
-        </p:nvSpPr>
-        <p:spPr>
-          <a:xfrm>
-            <a:off x="0" y="1051560"/>
-            <a:ext cx="12191695" cy="54864"/>
-          </a:xfrm>
-          <a:prstGeom prst="rect">
-            <a:avLst/>
-          </a:prstGeom>
-          <a:solidFill>
-            <a:srgbClr val="E87A1E"/>
-          </a:solidFill>
-          <a:ln>
-            <a:noFill/>
-          </a:ln>
-          <a:effectLst/>
-        </p:spPr>
-        <p:style>
-          <a:lnRef idx="1">
-            <a:schemeClr val="accent1"/>
-          </a:lnRef>
-          <a:fillRef idx="3">
-            <a:schemeClr val="accent1"/>
-          </a:fillRef>
-          <a:effectRef idx="2">
-            <a:schemeClr val="accent1"/>
-          </a:effectRef>
-          <a:fontRef idx="minor">
-            <a:schemeClr val="lt1"/>
-          </a:fontRef>
-        </p:style>
-        <p:txBody>
-          <a:bodyPr rtlCol="0" anchor="ctr"/>
-          <a:lstStyle/>
-          <a:p>
-            <a:pPr algn="ctr"/>
-          </a:p>
-        </p:txBody>
-      </p:sp>
-      <p:sp>
-        <p:nvSpPr>
-          <p:cNvPr id="4" name="TextBox 3"/>
+          <p:cNvPr id="9" name="TextBox 8"/>
           <p:cNvSpPr txBox="1"/>
           <p:nvPr/>
         </p:nvSpPr>
         <p:spPr>
           <a:xfrm>
-            <a:off x="548640" y="164592"/>
-            <a:ext cx="10058400" cy="548640"/>
+            <a:off x="5074920" y="1051560"/>
+            <a:ext cx="3474720" cy="320040"/>
           </a:xfrm>
           <a:prstGeom prst="rect">
             <a:avLst/>
@@ -3392,97 +3753,27 @@
           <a:p>
             <a:pPr algn="l"/>
             <a:r>
-              <a:rPr sz="2800" b="1" i="0">
-                <a:solidFill>
-                  <a:srgbClr val="FFFFFF"/>
-                </a:solidFill>
-                <a:latin typeface="Microsoft YaHei"/>
-              </a:rPr>
-              <a:t>月度策略 / 全局套利构想 / 补充内容</a:t>
-            </a:r>
-          </a:p>
-        </p:txBody>
-      </p:sp>
-      <p:sp>
-        <p:nvSpPr>
-          <p:cNvPr id="5" name="TextBox 4"/>
+              <a:rPr sz="1300" b="1">
+                <a:solidFill>
+                  <a:srgbClr val="006B6B"/>
+                </a:solidFill>
+                <a:latin typeface="微软雅黑"/>
+              </a:rPr>
+              <a:t>补充内容 / 待完善方向</a:t>
+            </a:r>
+          </a:p>
+        </p:txBody>
+      </p:sp>
+      <p:sp>
+        <p:nvSpPr>
+          <p:cNvPr id="10" name="TextBox 9"/>
           <p:cNvSpPr txBox="1"/>
           <p:nvPr/>
         </p:nvSpPr>
         <p:spPr>
           <a:xfrm>
-            <a:off x="548640" y="658368"/>
-            <a:ext cx="10058400" cy="365760"/>
-          </a:xfrm>
-          <a:prstGeom prst="rect">
-            <a:avLst/>
-          </a:prstGeom>
-          <a:noFill/>
-        </p:spPr>
-        <p:txBody>
-          <a:bodyPr wrap="square">
-            <a:spAutoFit/>
-          </a:bodyPr>
-          <a:lstStyle/>
-          <a:p>
-            <a:pPr algn="l"/>
-            <a:r>
-              <a:rPr sz="1300" b="0" i="0">
-                <a:solidFill>
-                  <a:srgbClr val="CFDDEC"/>
-                </a:solidFill>
-                <a:latin typeface="Microsoft YaHei"/>
-              </a:rPr>
-              <a:t>08-09 Outlook</a:t>
-            </a:r>
-          </a:p>
-        </p:txBody>
-      </p:sp>
-      <p:sp>
-        <p:nvSpPr>
-          <p:cNvPr id="6" name="TextBox 5"/>
-          <p:cNvSpPr txBox="1"/>
-          <p:nvPr/>
-        </p:nvSpPr>
-        <p:spPr>
-          <a:xfrm>
-            <a:off x="548640" y="1234440"/>
-            <a:ext cx="5486400" cy="320040"/>
-          </a:xfrm>
-          <a:prstGeom prst="rect">
-            <a:avLst/>
-          </a:prstGeom>
-          <a:noFill/>
-        </p:spPr>
-        <p:txBody>
-          <a:bodyPr wrap="square">
-            <a:spAutoFit/>
-          </a:bodyPr>
-          <a:lstStyle/>
-          <a:p>
-            <a:pPr algn="l"/>
-            <a:r>
-              <a:rPr sz="1500" b="1" i="0">
-                <a:solidFill>
-                  <a:srgbClr val="0B2B4D"/>
-                </a:solidFill>
-                <a:latin typeface="Microsoft YaHei"/>
-              </a:rPr>
-              <a:t>月度策略（现状）</a:t>
-            </a:r>
-          </a:p>
-        </p:txBody>
-      </p:sp>
-      <p:sp>
-        <p:nvSpPr>
-          <p:cNvPr id="7" name="TextBox 6"/>
-          <p:cNvSpPr txBox="1"/>
-          <p:nvPr/>
-        </p:nvSpPr>
-        <p:spPr>
-          <a:xfrm>
-            <a:off x="548640" y="1600200"/>
-            <a:ext cx="5394960" cy="1188720"/>
+            <a:off x="5074920" y="1463040"/>
+            <a:ext cx="3520440" cy="4663440"/>
           </a:xfrm>
           <a:prstGeom prst="rect">
             <a:avLst/>
@@ -3500,17 +3791,36 @@
                 <a:spcPct val="115000"/>
               </a:lnSpc>
               <a:spcAft>
-                <a:spcPts val="600"/>
+                <a:spcPts val="500"/>
               </a:spcAft>
             </a:pPr>
             <a:r>
-              <a:rPr sz="1300" b="1">
-                <a:solidFill>
-                  <a:srgbClr val="0B2B4D"/>
-                </a:solidFill>
-                <a:latin typeface="Microsoft YaHei"/>
-              </a:rPr>
-              <a:t>• 无法准确预测本月发电侧实时市场加权均价</a:t>
+              <a:rPr sz="1150" b="1">
+                <a:solidFill>
+                  <a:srgbClr val="006B6B"/>
+                </a:solidFill>
+                <a:latin typeface="微软雅黑"/>
+              </a:rPr>
+              <a:t>• 盯盘工具需求</a:t>
+            </a:r>
+          </a:p>
+          <a:p>
+            <a:pPr lvl="1">
+              <a:lnSpc>
+                <a:spcPct val="115000"/>
+              </a:lnSpc>
+              <a:spcAft>
+                <a:spcPts val="500"/>
+              </a:spcAft>
+            </a:pPr>
+            <a:r>
+              <a:rPr sz="1000" b="0">
+                <a:solidFill>
+                  <a:srgbClr val="595F66"/>
+                </a:solidFill>
+                <a:latin typeface="微软雅黑"/>
+              </a:rPr>
+              <a:t>- 滚动撮合阶段对手方可能误报极低/高价，需工具辅助"抢单"</a:t>
             </a:r>
           </a:p>
           <a:p>
@@ -3519,113 +3829,17 @@
                 <a:spcPct val="115000"/>
               </a:lnSpc>
               <a:spcAft>
-                <a:spcPts val="600"/>
+                <a:spcPts val="500"/>
               </a:spcAft>
             </a:pPr>
             <a:r>
-              <a:rPr sz="1300" b="1">
-                <a:solidFill>
-                  <a:srgbClr val="0B2B4D"/>
-                </a:solidFill>
-                <a:latin typeface="Microsoft YaHei"/>
-              </a:rPr>
-              <a:t>• 月初观望、月中启动并逐渐放量；放量比例人工决策</a:t>
-            </a:r>
-          </a:p>
-          <a:p>
-            <a:pPr>
-              <a:lnSpc>
-                <a:spcPct val="115000"/>
-              </a:lnSpc>
-              <a:spcAft>
-                <a:spcPts val="600"/>
-              </a:spcAft>
-            </a:pPr>
-            <a:r>
-              <a:rPr sz="1300" b="1">
-                <a:solidFill>
-                  <a:srgbClr val="0B2B4D"/>
-                </a:solidFill>
-                <a:latin typeface="Microsoft YaHei"/>
-              </a:rPr>
-              <a:t>• 原则：保证月末考核电量基本为0，但不绝对</a:t>
-            </a:r>
-          </a:p>
-        </p:txBody>
-      </p:sp>
-      <p:sp>
-        <p:nvSpPr>
-          <p:cNvPr id="8" name="TextBox 7"/>
-          <p:cNvSpPr txBox="1"/>
-          <p:nvPr/>
-        </p:nvSpPr>
-        <p:spPr>
-          <a:xfrm>
-            <a:off x="548640" y="2880360"/>
-            <a:ext cx="7315200" cy="320040"/>
-          </a:xfrm>
-          <a:prstGeom prst="rect">
-            <a:avLst/>
-          </a:prstGeom>
-          <a:noFill/>
-        </p:spPr>
-        <p:txBody>
-          <a:bodyPr wrap="square">
-            <a:spAutoFit/>
-          </a:bodyPr>
-          <a:lstStyle/>
-          <a:p>
-            <a:pPr algn="l"/>
-            <a:r>
-              <a:rPr sz="1500" b="1" i="0">
-                <a:solidFill>
-                  <a:srgbClr val="E87A1E"/>
-                </a:solidFill>
-                <a:latin typeface="Microsoft YaHei"/>
-              </a:rPr>
-              <a:t>全局套利构想【待讨论】</a:t>
-            </a:r>
-          </a:p>
-        </p:txBody>
-      </p:sp>
-      <p:sp>
-        <p:nvSpPr>
-          <p:cNvPr id="9" name="TextBox 8"/>
-          <p:cNvSpPr txBox="1"/>
-          <p:nvPr/>
-        </p:nvSpPr>
-        <p:spPr>
-          <a:xfrm>
-            <a:off x="548640" y="3246120"/>
-            <a:ext cx="5394960" cy="2377440"/>
-          </a:xfrm>
-          <a:prstGeom prst="rect">
-            <a:avLst/>
-          </a:prstGeom>
-          <a:noFill/>
-        </p:spPr>
-        <p:txBody>
-          <a:bodyPr wrap="square">
-            <a:spAutoFit/>
-          </a:bodyPr>
-          <a:lstStyle/>
-          <a:p>
-            <a:pPr>
-              <a:lnSpc>
-                <a:spcPct val="115000"/>
-              </a:lnSpc>
-              <a:spcAft>
-                <a:spcPts val="600"/>
-              </a:spcAft>
-            </a:pPr>
-            <a:r>
-              <a:rPr sz="1250" b="1">
-                <a:solidFill>
-                  <a:srgbClr val="0B2B4D"/>
-                </a:solidFill>
-                <a:latin typeface="Microsoft YaHei"/>
-              </a:rPr>
-              <a:t>• 三层架构：月度分布 → 多日分布 → 单点策略</a:t>
+              <a:rPr sz="1150" b="1">
+                <a:solidFill>
+                  <a:srgbClr val="006B6B"/>
+                </a:solidFill>
+                <a:latin typeface="微软雅黑"/>
+              </a:rPr>
+              <a:t>• 交易水平评价体系</a:t>
             </a:r>
           </a:p>
           <a:p>
@@ -3634,138 +3848,18 @@
                 <a:spcPct val="115000"/>
               </a:lnSpc>
               <a:spcAft>
-                <a:spcPts val="600"/>
+                <a:spcPts val="500"/>
               </a:spcAft>
             </a:pPr>
             <a:r>
-              <a:rPr sz="1100" b="0">
+              <a:rPr sz="1000" b="0">
                 <a:solidFill>
                   <a:srgbClr val="595F66"/>
                 </a:solidFill>
-                <a:latin typeface="Microsoft YaHei"/>
-              </a:rPr>
-              <a:t>- 月初/月内滚动判断全月电价趋势，确定多日电能量分布</a:t>
-            </a:r>
-          </a:p>
-          <a:p>
-            <a:pPr lvl="1">
-              <a:lnSpc>
-                <a:spcPct val="115000"/>
-              </a:lnSpc>
-              <a:spcAft>
-                <a:spcPts val="600"/>
-              </a:spcAft>
-            </a:pPr>
-            <a:r>
-              <a:rPr sz="1100" b="0">
-                <a:solidFill>
-                  <a:srgbClr val="595F66"/>
-                </a:solidFill>
-                <a:latin typeface="Microsoft YaHei"/>
-              </a:rPr>
-              <a:t>- 单次交易判断2~5天趋势，确定各时段交易电量分布</a:t>
-            </a:r>
-          </a:p>
-          <a:p>
-            <a:pPr lvl="1">
-              <a:lnSpc>
-                <a:spcPct val="115000"/>
-              </a:lnSpc>
-              <a:spcAft>
-                <a:spcPts val="600"/>
-              </a:spcAft>
-            </a:pPr>
-            <a:r>
-              <a:rPr sz="1100" b="0">
-                <a:solidFill>
-                  <a:srgbClr val="595F66"/>
-                </a:solidFill>
-                <a:latin typeface="Microsoft YaHei"/>
-              </a:rPr>
-              <a:t>- 单时刻点按盈亏概率报量报价</a:t>
-            </a:r>
-          </a:p>
-          <a:p>
-            <a:pPr>
-              <a:lnSpc>
-                <a:spcPct val="115000"/>
-              </a:lnSpc>
-              <a:spcAft>
-                <a:spcPts val="600"/>
-              </a:spcAft>
-            </a:pPr>
-            <a:r>
-              <a:rPr sz="1250" b="1">
-                <a:solidFill>
-                  <a:srgbClr val="0B2B4D"/>
-                </a:solidFill>
-                <a:latin typeface="Microsoft YaHei"/>
-              </a:rPr>
-              <a:t>• 需实时动态调整：月初与月末现货价差可达200–300元/MWh</a:t>
-            </a:r>
-          </a:p>
-          <a:p>
-            <a:pPr>
-              <a:lnSpc>
-                <a:spcPct val="115000"/>
-              </a:lnSpc>
-              <a:spcAft>
-                <a:spcPts val="600"/>
-              </a:spcAft>
-            </a:pPr>
-            <a:r>
-              <a:rPr sz="1250" b="1">
-                <a:solidFill>
-                  <a:srgbClr val="0B2B4D"/>
-                </a:solidFill>
-                <a:latin typeface="Microsoft YaHei"/>
-              </a:rPr>
-              <a:t>• 策略触发须明确告知交易员，由其决策是否执行</a:t>
-            </a:r>
-          </a:p>
-        </p:txBody>
-      </p:sp>
-      <p:sp>
-        <p:nvSpPr>
-          <p:cNvPr id="10" name="Rectangle 9"/>
-          <p:cNvSpPr/>
-          <p:nvPr/>
-        </p:nvSpPr>
-        <p:spPr>
-          <a:xfrm>
-            <a:off x="6309360" y="1234440"/>
-            <a:ext cx="5349240" cy="4434840"/>
-          </a:xfrm>
-          <a:prstGeom prst="rect">
-            <a:avLst/>
-          </a:prstGeom>
-          <a:solidFill>
-            <a:srgbClr val="F2F6FA"/>
-          </a:solidFill>
-          <a:ln>
-            <a:noFill/>
-          </a:ln>
-          <a:effectLst/>
-        </p:spPr>
-        <p:style>
-          <a:lnRef idx="1">
-            <a:schemeClr val="accent1"/>
-          </a:lnRef>
-          <a:fillRef idx="3">
-            <a:schemeClr val="accent1"/>
-          </a:fillRef>
-          <a:effectRef idx="2">
-            <a:schemeClr val="accent1"/>
-          </a:effectRef>
-          <a:fontRef idx="minor">
-            <a:schemeClr val="lt1"/>
-          </a:fontRef>
-        </p:style>
-        <p:txBody>
-          <a:bodyPr rtlCol="0" anchor="ctr"/>
-          <a:lstStyle/>
-          <a:p>
-            <a:pPr algn="ctr"/>
+                <a:latin typeface="微软雅黑"/>
+              </a:rPr>
+              <a:t>- 交易品种多、频率高，目前缺乏明确的交易水平评价指标，后续需补充</a:t>
+            </a:r>
           </a:p>
         </p:txBody>
       </p:sp>
@@ -3777,8 +3871,8 @@
         </p:nvSpPr>
         <p:spPr>
           <a:xfrm>
-            <a:off x="6537960" y="1417320"/>
-            <a:ext cx="4846320" cy="320040"/>
+            <a:off x="8641080" y="6537960"/>
+            <a:ext cx="365760" cy="274320"/>
           </a:xfrm>
           <a:prstGeom prst="rect">
             <a:avLst/>
@@ -3791,228 +3885,15 @@
           </a:bodyPr>
           <a:lstStyle/>
           <a:p>
-            <a:pPr algn="l"/>
-            <a:r>
-              <a:rPr sz="1500" b="1" i="0">
-                <a:solidFill>
-                  <a:srgbClr val="0B2B4D"/>
-                </a:solidFill>
-                <a:latin typeface="Microsoft YaHei"/>
-              </a:rPr>
-              <a:t>补充内容 / 待完善方向</a:t>
-            </a:r>
-          </a:p>
-        </p:txBody>
-      </p:sp>
-      <p:sp>
-        <p:nvSpPr>
-          <p:cNvPr id="12" name="TextBox 11"/>
-          <p:cNvSpPr txBox="1"/>
-          <p:nvPr/>
-        </p:nvSpPr>
-        <p:spPr>
-          <a:xfrm>
-            <a:off x="6537960" y="1828800"/>
-            <a:ext cx="4846320" cy="3657600"/>
-          </a:xfrm>
-          <a:prstGeom prst="rect">
-            <a:avLst/>
-          </a:prstGeom>
-          <a:noFill/>
-        </p:spPr>
-        <p:txBody>
-          <a:bodyPr wrap="square">
-            <a:spAutoFit/>
-          </a:bodyPr>
-          <a:lstStyle/>
-          <a:p>
-            <a:pPr>
-              <a:lnSpc>
-                <a:spcPct val="115000"/>
-              </a:lnSpc>
-              <a:spcAft>
-                <a:spcPts val="600"/>
-              </a:spcAft>
-            </a:pPr>
-            <a:r>
-              <a:rPr sz="1300" b="1">
-                <a:solidFill>
-                  <a:srgbClr val="0B2B4D"/>
-                </a:solidFill>
-                <a:latin typeface="Microsoft YaHei"/>
-              </a:rPr>
-              <a:t>• 盯盘工具需求</a:t>
-            </a:r>
-          </a:p>
-          <a:p>
-            <a:pPr lvl="1">
-              <a:lnSpc>
-                <a:spcPct val="115000"/>
-              </a:lnSpc>
-              <a:spcAft>
-                <a:spcPts val="600"/>
-              </a:spcAft>
-            </a:pPr>
-            <a:r>
-              <a:rPr sz="1150" b="0">
+            <a:pPr algn="r"/>
+            <a:r>
+              <a:rPr sz="1100" b="0">
                 <a:solidFill>
                   <a:srgbClr val="595F66"/>
                 </a:solidFill>
-                <a:latin typeface="Microsoft YaHei"/>
-              </a:rPr>
-              <a:t>- 滚动撮合阶段对手方可能误报极低/高价，需工具辅助“抢单”</a:t>
-            </a:r>
-          </a:p>
-          <a:p>
-            <a:pPr>
-              <a:lnSpc>
-                <a:spcPct val="115000"/>
-              </a:lnSpc>
-              <a:spcAft>
-                <a:spcPts val="600"/>
-              </a:spcAft>
-            </a:pPr>
-            <a:r>
-              <a:rPr sz="1300" b="1">
-                <a:solidFill>
-                  <a:srgbClr val="0B2B4D"/>
-                </a:solidFill>
-                <a:latin typeface="Microsoft YaHei"/>
-              </a:rPr>
-              <a:t>• 交易水平评价体系</a:t>
-            </a:r>
-          </a:p>
-          <a:p>
-            <a:pPr lvl="1">
-              <a:lnSpc>
-                <a:spcPct val="115000"/>
-              </a:lnSpc>
-              <a:spcAft>
-                <a:spcPts val="600"/>
-              </a:spcAft>
-            </a:pPr>
-            <a:r>
-              <a:rPr sz="1150" b="0">
-                <a:solidFill>
-                  <a:srgbClr val="595F66"/>
-                </a:solidFill>
-                <a:latin typeface="Microsoft YaHei"/>
-              </a:rPr>
-              <a:t>- 交易品种多、频率高，目前缺乏明确的交易水平评价指标，后续需补充</a:t>
-            </a:r>
-          </a:p>
-        </p:txBody>
-      </p:sp>
-      <p:sp>
-        <p:nvSpPr>
-          <p:cNvPr id="13" name="Rectangle 12"/>
-          <p:cNvSpPr/>
-          <p:nvPr/>
-        </p:nvSpPr>
-        <p:spPr>
-          <a:xfrm>
-            <a:off x="0" y="6565392"/>
-            <a:ext cx="12191695" cy="292608"/>
-          </a:xfrm>
-          <a:prstGeom prst="rect">
-            <a:avLst/>
-          </a:prstGeom>
-          <a:solidFill>
-            <a:srgbClr val="0B2B4D"/>
-          </a:solidFill>
-          <a:ln>
-            <a:noFill/>
-          </a:ln>
-          <a:effectLst/>
-        </p:spPr>
-        <p:style>
-          <a:lnRef idx="1">
-            <a:schemeClr val="accent1"/>
-          </a:lnRef>
-          <a:fillRef idx="3">
-            <a:schemeClr val="accent1"/>
-          </a:fillRef>
-          <a:effectRef idx="2">
-            <a:schemeClr val="accent1"/>
-          </a:effectRef>
-          <a:fontRef idx="minor">
-            <a:schemeClr val="lt1"/>
-          </a:fontRef>
-        </p:style>
-        <p:txBody>
-          <a:bodyPr rtlCol="0" anchor="ctr"/>
-          <a:lstStyle/>
-          <a:p>
-            <a:pPr algn="ctr"/>
-          </a:p>
-        </p:txBody>
-      </p:sp>
-      <p:sp>
-        <p:nvSpPr>
-          <p:cNvPr id="14" name="TextBox 13"/>
-          <p:cNvSpPr txBox="1"/>
-          <p:nvPr/>
-        </p:nvSpPr>
-        <p:spPr>
-          <a:xfrm>
-            <a:off x="365760" y="6547104"/>
-            <a:ext cx="5486400" cy="274320"/>
-          </a:xfrm>
-          <a:prstGeom prst="rect">
-            <a:avLst/>
-          </a:prstGeom>
-          <a:noFill/>
-        </p:spPr>
-        <p:txBody>
-          <a:bodyPr wrap="square">
-            <a:spAutoFit/>
-          </a:bodyPr>
-          <a:lstStyle/>
-          <a:p>
-            <a:pPr algn="l"/>
-            <a:r>
-              <a:rPr sz="1000" b="0" i="0">
-                <a:solidFill>
-                  <a:srgbClr val="FFFFFF"/>
-                </a:solidFill>
-                <a:latin typeface="Microsoft YaHei"/>
-              </a:rPr>
-              <a:t>中长期交易基本说明与业务逻辑</a:t>
-            </a:r>
-          </a:p>
-        </p:txBody>
-      </p:sp>
-      <p:sp>
-        <p:nvSpPr>
-          <p:cNvPr id="15" name="TextBox 14"/>
-          <p:cNvSpPr txBox="1"/>
-          <p:nvPr/>
-        </p:nvSpPr>
-        <p:spPr>
-          <a:xfrm>
-            <a:off x="11094415" y="6547104"/>
-            <a:ext cx="731520" cy="274320"/>
-          </a:xfrm>
-          <a:prstGeom prst="rect">
-            <a:avLst/>
-          </a:prstGeom>
-          <a:noFill/>
-        </p:spPr>
-        <p:txBody>
-          <a:bodyPr wrap="square">
-            <a:spAutoFit/>
-          </a:bodyPr>
-          <a:lstStyle/>
-          <a:p>
-            <a:pPr algn="r"/>
-            <a:r>
-              <a:rPr sz="1000" b="0" i="0">
-                <a:solidFill>
-                  <a:srgbClr val="FFFFFF"/>
-                </a:solidFill>
-                <a:latin typeface="Microsoft YaHei"/>
-              </a:rPr>
-              <a:t>10 / 10</a:t>
+                <a:latin typeface="微软雅黑"/>
+              </a:rPr>
+              <a:t>10</a:t>
             </a:r>
           </a:p>
         </p:txBody>
@@ -4043,22 +3924,81 @@
         <p:nvPr/>
       </p:nvGrpSpPr>
       <p:grpSpPr/>
-      <p:sp>
-        <p:nvSpPr>
-          <p:cNvPr id="2" name="Rectangle 1"/>
+      <p:pic>
+        <p:nvPicPr>
+          <p:cNvPr id="2" name="Picture 1" descr="banner.png"/>
+          <p:cNvPicPr>
+            <a:picLocks noChangeAspect="1"/>
+          </p:cNvPicPr>
+          <p:nvPr/>
+        </p:nvPicPr>
+        <p:blipFill>
+          <a:blip r:embed="rId2"/>
+          <a:stretch>
+            <a:fillRect/>
+          </a:stretch>
+        </p:blipFill>
+        <p:spPr>
+          <a:xfrm>
+            <a:off x="0" y="0"/>
+            <a:ext cx="9144000" cy="832104"/>
+          </a:xfrm>
+          <a:prstGeom prst="rect">
+            <a:avLst/>
+          </a:prstGeom>
+        </p:spPr>
+      </p:pic>
+      <p:sp>
+        <p:nvSpPr>
+          <p:cNvPr id="3" name="TextBox 2"/>
+          <p:cNvSpPr txBox="1"/>
+          <p:nvPr/>
+        </p:nvSpPr>
+        <p:spPr>
+          <a:xfrm>
+            <a:off x="320040" y="109728"/>
+            <a:ext cx="7315200" cy="640080"/>
+          </a:xfrm>
+          <a:prstGeom prst="rect">
+            <a:avLst/>
+          </a:prstGeom>
+          <a:noFill/>
+        </p:spPr>
+        <p:txBody>
+          <a:bodyPr wrap="square">
+            <a:spAutoFit/>
+          </a:bodyPr>
+          <a:lstStyle/>
+          <a:p>
+            <a:pPr algn="l"/>
+            <a:r>
+              <a:rPr sz="3000" b="1">
+                <a:solidFill>
+                  <a:srgbClr val="008080"/>
+                </a:solidFill>
+                <a:latin typeface="微软雅黑"/>
+              </a:rPr>
+              <a:t>汇报内容</a:t>
+            </a:r>
+          </a:p>
+        </p:txBody>
+      </p:sp>
+      <p:sp>
+        <p:nvSpPr>
+          <p:cNvPr id="4" name="Rectangle 3"/>
           <p:cNvSpPr/>
           <p:nvPr/>
         </p:nvSpPr>
         <p:spPr>
           <a:xfrm>
-            <a:off x="0" y="0"/>
-            <a:ext cx="12191695" cy="1051560"/>
+            <a:off x="640080" y="1371600"/>
+            <a:ext cx="54864" cy="411480"/>
           </a:xfrm>
           <a:prstGeom prst="rect">
             <a:avLst/>
           </a:prstGeom>
           <a:solidFill>
-            <a:srgbClr val="0B2B4D"/>
+            <a:srgbClr val="008080"/>
           </a:solidFill>
           <a:ln>
             <a:noFill/>
@@ -4089,20 +4029,55 @@
       </p:sp>
       <p:sp>
         <p:nvSpPr>
-          <p:cNvPr id="3" name="Rectangle 2"/>
+          <p:cNvPr id="5" name="TextBox 4"/>
+          <p:cNvSpPr txBox="1"/>
+          <p:nvPr/>
+        </p:nvSpPr>
+        <p:spPr>
+          <a:xfrm>
+            <a:off x="868680" y="1353312"/>
+            <a:ext cx="7315200" cy="411480"/>
+          </a:xfrm>
+          <a:prstGeom prst="rect">
+            <a:avLst/>
+          </a:prstGeom>
+          <a:noFill/>
+        </p:spPr>
+        <p:txBody>
+          <a:bodyPr wrap="square">
+            <a:spAutoFit/>
+          </a:bodyPr>
+          <a:lstStyle/>
+          <a:p>
+            <a:pPr algn="l"/>
+            <a:r>
+              <a:rPr sz="1600" b="0">
+                <a:solidFill>
+                  <a:srgbClr val="333333"/>
+                </a:solidFill>
+                <a:latin typeface="微软雅黑"/>
+              </a:rPr>
+              <a:t>一、关键名词与基本概念</a:t>
+            </a:r>
+          </a:p>
+        </p:txBody>
+      </p:sp>
+      <p:sp>
+        <p:nvSpPr>
+          <p:cNvPr id="6" name="Rectangle 5"/>
           <p:cNvSpPr/>
           <p:nvPr/>
         </p:nvSpPr>
         <p:spPr>
           <a:xfrm>
-            <a:off x="0" y="1051560"/>
-            <a:ext cx="12191695" cy="54864"/>
+            <a:off x="640080" y="2048256"/>
+            <a:ext cx="54864" cy="411480"/>
           </a:xfrm>
           <a:prstGeom prst="rect">
             <a:avLst/>
           </a:prstGeom>
           <a:solidFill>
-            <a:srgbClr val="E87A1E"/>
+            <a:srgbClr val="008080"/>
           </a:solidFill>
           <a:ln>
             <a:noFill/>
@@ -4133,14 +4108,14 @@
       </p:sp>
       <p:sp>
         <p:nvSpPr>
-          <p:cNvPr id="4" name="TextBox 3"/>
+          <p:cNvPr id="7" name="TextBox 6"/>
           <p:cNvSpPr txBox="1"/>
           <p:nvPr/>
         </p:nvSpPr>
         <p:spPr>
           <a:xfrm>
-            <a:off x="548640" y="164592"/>
-            <a:ext cx="10058400" cy="548640"/>
+            <a:off x="868680" y="2029968"/>
+            <a:ext cx="7315200" cy="411480"/>
           </a:xfrm>
           <a:prstGeom prst="rect">
             <a:avLst/>
@@ -4155,68 +4130,33 @@
           <a:p>
             <a:pPr algn="l"/>
             <a:r>
-              <a:rPr sz="2800" b="1" i="0">
-                <a:solidFill>
-                  <a:srgbClr val="FFFFFF"/>
-                </a:solidFill>
-                <a:latin typeface="Microsoft YaHei"/>
-              </a:rPr>
-              <a:t>目  录</a:t>
-            </a:r>
-          </a:p>
-        </p:txBody>
-      </p:sp>
-      <p:sp>
-        <p:nvSpPr>
-          <p:cNvPr id="5" name="TextBox 4"/>
-          <p:cNvSpPr txBox="1"/>
-          <p:nvPr/>
-        </p:nvSpPr>
-        <p:spPr>
-          <a:xfrm>
-            <a:off x="548640" y="658368"/>
-            <a:ext cx="10058400" cy="365760"/>
-          </a:xfrm>
-          <a:prstGeom prst="rect">
-            <a:avLst/>
-          </a:prstGeom>
-          <a:noFill/>
-        </p:spPr>
-        <p:txBody>
-          <a:bodyPr wrap="square">
-            <a:spAutoFit/>
-          </a:bodyPr>
-          <a:lstStyle/>
-          <a:p>
-            <a:pPr algn="l"/>
-            <a:r>
-              <a:rPr sz="1300" b="0" i="0">
-                <a:solidFill>
-                  <a:srgbClr val="CFDDEC"/>
-                </a:solidFill>
-                <a:latin typeface="Microsoft YaHei"/>
-              </a:rPr>
-              <a:t>CONTENTS</a:t>
-            </a:r>
-          </a:p>
-        </p:txBody>
-      </p:sp>
-      <p:sp>
-        <p:nvSpPr>
-          <p:cNvPr id="6" name="Rectangle 5"/>
+              <a:rPr sz="1600" b="0">
+                <a:solidFill>
+                  <a:srgbClr val="333333"/>
+                </a:solidFill>
+                <a:latin typeface="微软雅黑"/>
+              </a:rPr>
+              <a:t>二、交易目标：补仓与套利</a:t>
+            </a:r>
+          </a:p>
+        </p:txBody>
+      </p:sp>
+      <p:sp>
+        <p:nvSpPr>
+          <p:cNvPr id="8" name="Rectangle 7"/>
           <p:cNvSpPr/>
           <p:nvPr/>
         </p:nvSpPr>
         <p:spPr>
           <a:xfrm>
-            <a:off x="548640" y="1463040"/>
-            <a:ext cx="54864" cy="457200"/>
+            <a:off x="640080" y="2724912"/>
+            <a:ext cx="54864" cy="411480"/>
           </a:xfrm>
           <a:prstGeom prst="rect">
             <a:avLst/>
           </a:prstGeom>
           <a:solidFill>
-            <a:srgbClr val="E87A1E"/>
+            <a:srgbClr val="008080"/>
           </a:solidFill>
           <a:ln>
             <a:noFill/>
@@ -4247,14 +4187,14 @@
       </p:sp>
       <p:sp>
         <p:nvSpPr>
-          <p:cNvPr id="7" name="TextBox 6"/>
+          <p:cNvPr id="9" name="TextBox 8"/>
           <p:cNvSpPr txBox="1"/>
           <p:nvPr/>
         </p:nvSpPr>
         <p:spPr>
           <a:xfrm>
-            <a:off x="777240" y="1444752"/>
-            <a:ext cx="10058400" cy="457200"/>
+            <a:off x="868680" y="2706624"/>
+            <a:ext cx="7315200" cy="411480"/>
           </a:xfrm>
           <a:prstGeom prst="rect">
             <a:avLst/>
@@ -4269,33 +4209,33 @@
           <a:p>
             <a:pPr algn="l"/>
             <a:r>
-              <a:rPr sz="1700" b="0" i="0">
-                <a:solidFill>
-                  <a:srgbClr val="0B2B4D"/>
-                </a:solidFill>
-                <a:latin typeface="Microsoft YaHei"/>
-              </a:rPr>
-              <a:t>01  关键名词与基本概念</a:t>
-            </a:r>
-          </a:p>
-        </p:txBody>
-      </p:sp>
-      <p:sp>
-        <p:nvSpPr>
-          <p:cNvPr id="8" name="Rectangle 7"/>
+              <a:rPr sz="1600" b="0">
+                <a:solidFill>
+                  <a:srgbClr val="333333"/>
+                </a:solidFill>
+                <a:latin typeface="微软雅黑"/>
+              </a:rPr>
+              <a:t>三、交易品种总览与核心公式</a:t>
+            </a:r>
+          </a:p>
+        </p:txBody>
+      </p:sp>
+      <p:sp>
+        <p:nvSpPr>
+          <p:cNvPr id="10" name="Rectangle 9"/>
           <p:cNvSpPr/>
           <p:nvPr/>
         </p:nvSpPr>
         <p:spPr>
           <a:xfrm>
-            <a:off x="548640" y="1993392"/>
-            <a:ext cx="54864" cy="457200"/>
+            <a:off x="640080" y="3401568"/>
+            <a:ext cx="54864" cy="411480"/>
           </a:xfrm>
           <a:prstGeom prst="rect">
             <a:avLst/>
           </a:prstGeom>
           <a:solidFill>
-            <a:srgbClr val="1F6FC0"/>
+            <a:srgbClr val="008080"/>
           </a:solidFill>
           <a:ln>
             <a:noFill/>
@@ -4326,14 +4266,14 @@
       </p:sp>
       <p:sp>
         <p:nvSpPr>
-          <p:cNvPr id="9" name="TextBox 8"/>
+          <p:cNvPr id="11" name="TextBox 10"/>
           <p:cNvSpPr txBox="1"/>
           <p:nvPr/>
         </p:nvSpPr>
         <p:spPr>
           <a:xfrm>
-            <a:off x="777240" y="1975104"/>
-            <a:ext cx="10058400" cy="457200"/>
+            <a:off x="868680" y="3383280"/>
+            <a:ext cx="7315200" cy="411480"/>
           </a:xfrm>
           <a:prstGeom prst="rect">
             <a:avLst/>
@@ -4348,33 +4288,33 @@
           <a:p>
             <a:pPr algn="l"/>
             <a:r>
-              <a:rPr sz="1700" b="0" i="0">
-                <a:solidFill>
-                  <a:srgbClr val="0B2B4D"/>
-                </a:solidFill>
-                <a:latin typeface="Microsoft YaHei"/>
-              </a:rPr>
-              <a:t>02  交易目标：补仓与套利</a:t>
-            </a:r>
-          </a:p>
-        </p:txBody>
-      </p:sp>
-      <p:sp>
-        <p:nvSpPr>
-          <p:cNvPr id="10" name="Rectangle 9"/>
+              <a:rPr sz="1600" b="0">
+                <a:solidFill>
+                  <a:srgbClr val="333333"/>
+                </a:solidFill>
+                <a:latin typeface="微软雅黑"/>
+              </a:rPr>
+              <a:t>四、多日用电合同电量转让交易（上午）</a:t>
+            </a:r>
+          </a:p>
+        </p:txBody>
+      </p:sp>
+      <p:sp>
+        <p:nvSpPr>
+          <p:cNvPr id="12" name="Rectangle 11"/>
           <p:cNvSpPr/>
           <p:nvPr/>
         </p:nvSpPr>
         <p:spPr>
           <a:xfrm>
-            <a:off x="548640" y="2523744"/>
-            <a:ext cx="54864" cy="457200"/>
+            <a:off x="640080" y="4078224"/>
+            <a:ext cx="54864" cy="411480"/>
           </a:xfrm>
           <a:prstGeom prst="rect">
             <a:avLst/>
           </a:prstGeom>
           <a:solidFill>
-            <a:srgbClr val="E87A1E"/>
+            <a:srgbClr val="008080"/>
           </a:solidFill>
           <a:ln>
             <a:noFill/>
@@ -4405,14 +4345,14 @@
       </p:sp>
       <p:sp>
         <p:nvSpPr>
-          <p:cNvPr id="11" name="TextBox 10"/>
+          <p:cNvPr id="13" name="TextBox 12"/>
           <p:cNvSpPr txBox="1"/>
           <p:nvPr/>
         </p:nvSpPr>
         <p:spPr>
           <a:xfrm>
-            <a:off x="777240" y="2505456"/>
-            <a:ext cx="10058400" cy="457200"/>
+            <a:off x="868680" y="4059936"/>
+            <a:ext cx="7315200" cy="411480"/>
           </a:xfrm>
           <a:prstGeom prst="rect">
             <a:avLst/>
@@ -4427,33 +4367,33 @@
           <a:p>
             <a:pPr algn="l"/>
             <a:r>
-              <a:rPr sz="1700" b="0" i="0">
-                <a:solidFill>
-                  <a:srgbClr val="0B2B4D"/>
-                </a:solidFill>
-                <a:latin typeface="Microsoft YaHei"/>
-              </a:rPr>
-              <a:t>03  交易品种总览与核心公式</a:t>
-            </a:r>
-          </a:p>
-        </p:txBody>
-      </p:sp>
-      <p:sp>
-        <p:nvSpPr>
-          <p:cNvPr id="12" name="Rectangle 11"/>
+              <a:rPr sz="1600" b="0">
+                <a:solidFill>
+                  <a:srgbClr val="333333"/>
+                </a:solidFill>
+                <a:latin typeface="微软雅黑"/>
+              </a:rPr>
+              <a:t>五、多日直接交易（下午）</a:t>
+            </a:r>
+          </a:p>
+        </p:txBody>
+      </p:sp>
+      <p:sp>
+        <p:nvSpPr>
+          <p:cNvPr id="14" name="Rectangle 13"/>
           <p:cNvSpPr/>
           <p:nvPr/>
         </p:nvSpPr>
         <p:spPr>
           <a:xfrm>
-            <a:off x="548640" y="3054096"/>
-            <a:ext cx="54864" cy="457200"/>
+            <a:off x="640080" y="4754880"/>
+            <a:ext cx="54864" cy="411480"/>
           </a:xfrm>
           <a:prstGeom prst="rect">
             <a:avLst/>
           </a:prstGeom>
           <a:solidFill>
-            <a:srgbClr val="1F6FC0"/>
+            <a:srgbClr val="008080"/>
           </a:solidFill>
           <a:ln>
             <a:noFill/>
@@ -4484,14 +4424,14 @@
       </p:sp>
       <p:sp>
         <p:nvSpPr>
-          <p:cNvPr id="13" name="TextBox 12"/>
+          <p:cNvPr id="15" name="TextBox 14"/>
           <p:cNvSpPr txBox="1"/>
           <p:nvPr/>
         </p:nvSpPr>
         <p:spPr>
           <a:xfrm>
-            <a:off x="777240" y="3035808"/>
-            <a:ext cx="10058400" cy="457200"/>
+            <a:off x="868680" y="4736592"/>
+            <a:ext cx="7315200" cy="411480"/>
           </a:xfrm>
           <a:prstGeom prst="rect">
             <a:avLst/>
@@ -4506,33 +4446,33 @@
           <a:p>
             <a:pPr algn="l"/>
             <a:r>
-              <a:rPr sz="1700" b="0" i="0">
-                <a:solidFill>
-                  <a:srgbClr val="0B2B4D"/>
-                </a:solidFill>
-                <a:latin typeface="Microsoft YaHei"/>
-              </a:rPr>
-              <a:t>04  多日用电合同电量转让交易（上午）— 规则</a:t>
-            </a:r>
-          </a:p>
-        </p:txBody>
-      </p:sp>
-      <p:sp>
-        <p:nvSpPr>
-          <p:cNvPr id="14" name="Rectangle 13"/>
+              <a:rPr sz="1600" b="0">
+                <a:solidFill>
+                  <a:srgbClr val="333333"/>
+                </a:solidFill>
+                <a:latin typeface="微软雅黑"/>
+              </a:rPr>
+              <a:t>六、月度策略与全局套利构想（待讨论）</a:t>
+            </a:r>
+          </a:p>
+        </p:txBody>
+      </p:sp>
+      <p:sp>
+        <p:nvSpPr>
+          <p:cNvPr id="16" name="Rectangle 15"/>
           <p:cNvSpPr/>
           <p:nvPr/>
         </p:nvSpPr>
         <p:spPr>
           <a:xfrm>
-            <a:off x="548640" y="3584448"/>
-            <a:ext cx="54864" cy="457200"/>
+            <a:off x="640080" y="5431536"/>
+            <a:ext cx="54864" cy="411480"/>
           </a:xfrm>
           <a:prstGeom prst="rect">
             <a:avLst/>
           </a:prstGeom>
           <a:solidFill>
-            <a:srgbClr val="E87A1E"/>
+            <a:srgbClr val="008080"/>
           </a:solidFill>
           <a:ln>
             <a:noFill/>
@@ -4563,14 +4503,14 @@
       </p:sp>
       <p:sp>
         <p:nvSpPr>
-          <p:cNvPr id="15" name="TextBox 14"/>
+          <p:cNvPr id="17" name="TextBox 16"/>
           <p:cNvSpPr txBox="1"/>
           <p:nvPr/>
         </p:nvSpPr>
         <p:spPr>
           <a:xfrm>
-            <a:off x="777240" y="3566160"/>
-            <a:ext cx="10058400" cy="457200"/>
+            <a:off x="868680" y="5413248"/>
+            <a:ext cx="7315200" cy="411480"/>
           </a:xfrm>
           <a:prstGeom prst="rect">
             <a:avLst/>
@@ -4585,71 +4525,27 @@
           <a:p>
             <a:pPr algn="l"/>
             <a:r>
-              <a:rPr sz="1700" b="0" i="0">
-                <a:solidFill>
-                  <a:srgbClr val="0B2B4D"/>
-                </a:solidFill>
-                <a:latin typeface="Microsoft YaHei"/>
-              </a:rPr>
-              <a:t>05  多日用电合同电量转让交易 — 交易策略</a:t>
-            </a:r>
-          </a:p>
-        </p:txBody>
-      </p:sp>
-      <p:sp>
-        <p:nvSpPr>
-          <p:cNvPr id="16" name="Rectangle 15"/>
-          <p:cNvSpPr/>
-          <p:nvPr/>
-        </p:nvSpPr>
-        <p:spPr>
-          <a:xfrm>
-            <a:off x="548640" y="4114800"/>
-            <a:ext cx="54864" cy="457200"/>
-          </a:xfrm>
-          <a:prstGeom prst="rect">
-            <a:avLst/>
-          </a:prstGeom>
-          <a:solidFill>
-            <a:srgbClr val="1F6FC0"/>
-          </a:solidFill>
-          <a:ln>
-            <a:noFill/>
-          </a:ln>
-          <a:effectLst/>
-        </p:spPr>
-        <p:style>
-          <a:lnRef idx="1">
-            <a:schemeClr val="accent1"/>
-          </a:lnRef>
-          <a:fillRef idx="3">
-            <a:schemeClr val="accent1"/>
-          </a:fillRef>
-          <a:effectRef idx="2">
-            <a:schemeClr val="accent1"/>
-          </a:effectRef>
-          <a:fontRef idx="minor">
-            <a:schemeClr val="lt1"/>
-          </a:fontRef>
-        </p:style>
-        <p:txBody>
-          <a:bodyPr rtlCol="0" anchor="ctr"/>
-          <a:lstStyle/>
-          <a:p>
-            <a:pPr algn="ctr"/>
-          </a:p>
-        </p:txBody>
-      </p:sp>
-      <p:sp>
-        <p:nvSpPr>
-          <p:cNvPr id="17" name="TextBox 16"/>
+              <a:rPr sz="1600" b="0">
+                <a:solidFill>
+                  <a:srgbClr val="333333"/>
+                </a:solidFill>
+                <a:latin typeface="微软雅黑"/>
+              </a:rPr>
+              <a:t>七、补充内容与待完善方向</a:t>
+            </a:r>
+          </a:p>
+        </p:txBody>
+      </p:sp>
+      <p:sp>
+        <p:nvSpPr>
+          <p:cNvPr id="18" name="TextBox 17"/>
           <p:cNvSpPr txBox="1"/>
           <p:nvPr/>
         </p:nvSpPr>
         <p:spPr>
           <a:xfrm>
-            <a:off x="777240" y="4096512"/>
-            <a:ext cx="10058400" cy="457200"/>
+            <a:off x="8641080" y="6537960"/>
+            <a:ext cx="365760" cy="274320"/>
           </a:xfrm>
           <a:prstGeom prst="rect">
             <a:avLst/>
@@ -4662,366 +4558,15 @@
           </a:bodyPr>
           <a:lstStyle/>
           <a:p>
-            <a:pPr algn="l"/>
-            <a:r>
-              <a:rPr sz="1700" b="0" i="0">
-                <a:solidFill>
-                  <a:srgbClr val="0B2B4D"/>
-                </a:solidFill>
-                <a:latin typeface="Microsoft YaHei"/>
-              </a:rPr>
-              <a:t>06  多日直接交易（下午）— 规则</a:t>
-            </a:r>
-          </a:p>
-        </p:txBody>
-      </p:sp>
-      <p:sp>
-        <p:nvSpPr>
-          <p:cNvPr id="18" name="Rectangle 17"/>
-          <p:cNvSpPr/>
-          <p:nvPr/>
-        </p:nvSpPr>
-        <p:spPr>
-          <a:xfrm>
-            <a:off x="548640" y="4645152"/>
-            <a:ext cx="54864" cy="457200"/>
-          </a:xfrm>
-          <a:prstGeom prst="rect">
-            <a:avLst/>
-          </a:prstGeom>
-          <a:solidFill>
-            <a:srgbClr val="E87A1E"/>
-          </a:solidFill>
-          <a:ln>
-            <a:noFill/>
-          </a:ln>
-          <a:effectLst/>
-        </p:spPr>
-        <p:style>
-          <a:lnRef idx="1">
-            <a:schemeClr val="accent1"/>
-          </a:lnRef>
-          <a:fillRef idx="3">
-            <a:schemeClr val="accent1"/>
-          </a:fillRef>
-          <a:effectRef idx="2">
-            <a:schemeClr val="accent1"/>
-          </a:effectRef>
-          <a:fontRef idx="minor">
-            <a:schemeClr val="lt1"/>
-          </a:fontRef>
-        </p:style>
-        <p:txBody>
-          <a:bodyPr rtlCol="0" anchor="ctr"/>
-          <a:lstStyle/>
-          <a:p>
-            <a:pPr algn="ctr"/>
-          </a:p>
-        </p:txBody>
-      </p:sp>
-      <p:sp>
-        <p:nvSpPr>
-          <p:cNvPr id="19" name="TextBox 18"/>
-          <p:cNvSpPr txBox="1"/>
-          <p:nvPr/>
-        </p:nvSpPr>
-        <p:spPr>
-          <a:xfrm>
-            <a:off x="777240" y="4626864"/>
-            <a:ext cx="10058400" cy="457200"/>
-          </a:xfrm>
-          <a:prstGeom prst="rect">
-            <a:avLst/>
-          </a:prstGeom>
-          <a:noFill/>
-        </p:spPr>
-        <p:txBody>
-          <a:bodyPr wrap="square">
-            <a:spAutoFit/>
-          </a:bodyPr>
-          <a:lstStyle/>
-          <a:p>
-            <a:pPr algn="l"/>
-            <a:r>
-              <a:rPr sz="1700" b="0" i="0">
-                <a:solidFill>
-                  <a:srgbClr val="0B2B4D"/>
-                </a:solidFill>
-                <a:latin typeface="Microsoft YaHei"/>
-              </a:rPr>
-              <a:t>07  多日直接交易 — 交易策略</a:t>
-            </a:r>
-          </a:p>
-        </p:txBody>
-      </p:sp>
-      <p:sp>
-        <p:nvSpPr>
-          <p:cNvPr id="20" name="Rectangle 19"/>
-          <p:cNvSpPr/>
-          <p:nvPr/>
-        </p:nvSpPr>
-        <p:spPr>
-          <a:xfrm>
-            <a:off x="548640" y="5175504"/>
-            <a:ext cx="54864" cy="457200"/>
-          </a:xfrm>
-          <a:prstGeom prst="rect">
-            <a:avLst/>
-          </a:prstGeom>
-          <a:solidFill>
-            <a:srgbClr val="1F6FC0"/>
-          </a:solidFill>
-          <a:ln>
-            <a:noFill/>
-          </a:ln>
-          <a:effectLst/>
-        </p:spPr>
-        <p:style>
-          <a:lnRef idx="1">
-            <a:schemeClr val="accent1"/>
-          </a:lnRef>
-          <a:fillRef idx="3">
-            <a:schemeClr val="accent1"/>
-          </a:fillRef>
-          <a:effectRef idx="2">
-            <a:schemeClr val="accent1"/>
-          </a:effectRef>
-          <a:fontRef idx="minor">
-            <a:schemeClr val="lt1"/>
-          </a:fontRef>
-        </p:style>
-        <p:txBody>
-          <a:bodyPr rtlCol="0" anchor="ctr"/>
-          <a:lstStyle/>
-          <a:p>
-            <a:pPr algn="ctr"/>
-          </a:p>
-        </p:txBody>
-      </p:sp>
-      <p:sp>
-        <p:nvSpPr>
-          <p:cNvPr id="21" name="TextBox 20"/>
-          <p:cNvSpPr txBox="1"/>
-          <p:nvPr/>
-        </p:nvSpPr>
-        <p:spPr>
-          <a:xfrm>
-            <a:off x="777240" y="5157216"/>
-            <a:ext cx="10058400" cy="457200"/>
-          </a:xfrm>
-          <a:prstGeom prst="rect">
-            <a:avLst/>
-          </a:prstGeom>
-          <a:noFill/>
-        </p:spPr>
-        <p:txBody>
-          <a:bodyPr wrap="square">
-            <a:spAutoFit/>
-          </a:bodyPr>
-          <a:lstStyle/>
-          <a:p>
-            <a:pPr algn="l"/>
-            <a:r>
-              <a:rPr sz="1700" b="0" i="0">
-                <a:solidFill>
-                  <a:srgbClr val="0B2B4D"/>
-                </a:solidFill>
-                <a:latin typeface="Microsoft YaHei"/>
-              </a:rPr>
-              <a:t>08  月度策略与全局套利构想（待讨论）</a:t>
-            </a:r>
-          </a:p>
-        </p:txBody>
-      </p:sp>
-      <p:sp>
-        <p:nvSpPr>
-          <p:cNvPr id="22" name="Rectangle 21"/>
-          <p:cNvSpPr/>
-          <p:nvPr/>
-        </p:nvSpPr>
-        <p:spPr>
-          <a:xfrm>
-            <a:off x="548640" y="5705856"/>
-            <a:ext cx="54864" cy="457200"/>
-          </a:xfrm>
-          <a:prstGeom prst="rect">
-            <a:avLst/>
-          </a:prstGeom>
-          <a:solidFill>
-            <a:srgbClr val="E87A1E"/>
-          </a:solidFill>
-          <a:ln>
-            <a:noFill/>
-          </a:ln>
-          <a:effectLst/>
-        </p:spPr>
-        <p:style>
-          <a:lnRef idx="1">
-            <a:schemeClr val="accent1"/>
-          </a:lnRef>
-          <a:fillRef idx="3">
-            <a:schemeClr val="accent1"/>
-          </a:fillRef>
-          <a:effectRef idx="2">
-            <a:schemeClr val="accent1"/>
-          </a:effectRef>
-          <a:fontRef idx="minor">
-            <a:schemeClr val="lt1"/>
-          </a:fontRef>
-        </p:style>
-        <p:txBody>
-          <a:bodyPr rtlCol="0" anchor="ctr"/>
-          <a:lstStyle/>
-          <a:p>
-            <a:pPr algn="ctr"/>
-          </a:p>
-        </p:txBody>
-      </p:sp>
-      <p:sp>
-        <p:nvSpPr>
-          <p:cNvPr id="23" name="TextBox 22"/>
-          <p:cNvSpPr txBox="1"/>
-          <p:nvPr/>
-        </p:nvSpPr>
-        <p:spPr>
-          <a:xfrm>
-            <a:off x="777240" y="5687568"/>
-            <a:ext cx="10058400" cy="457200"/>
-          </a:xfrm>
-          <a:prstGeom prst="rect">
-            <a:avLst/>
-          </a:prstGeom>
-          <a:noFill/>
-        </p:spPr>
-        <p:txBody>
-          <a:bodyPr wrap="square">
-            <a:spAutoFit/>
-          </a:bodyPr>
-          <a:lstStyle/>
-          <a:p>
-            <a:pPr algn="l"/>
-            <a:r>
-              <a:rPr sz="1700" b="0" i="0">
-                <a:solidFill>
-                  <a:srgbClr val="0B2B4D"/>
-                </a:solidFill>
-                <a:latin typeface="Microsoft YaHei"/>
-              </a:rPr>
-              <a:t>09  补充内容与待完善方向</a:t>
-            </a:r>
-          </a:p>
-        </p:txBody>
-      </p:sp>
-      <p:sp>
-        <p:nvSpPr>
-          <p:cNvPr id="24" name="Rectangle 23"/>
-          <p:cNvSpPr/>
-          <p:nvPr/>
-        </p:nvSpPr>
-        <p:spPr>
-          <a:xfrm>
-            <a:off x="0" y="6565392"/>
-            <a:ext cx="12191695" cy="292608"/>
-          </a:xfrm>
-          <a:prstGeom prst="rect">
-            <a:avLst/>
-          </a:prstGeom>
-          <a:solidFill>
-            <a:srgbClr val="0B2B4D"/>
-          </a:solidFill>
-          <a:ln>
-            <a:noFill/>
-          </a:ln>
-          <a:effectLst/>
-        </p:spPr>
-        <p:style>
-          <a:lnRef idx="1">
-            <a:schemeClr val="accent1"/>
-          </a:lnRef>
-          <a:fillRef idx="3">
-            <a:schemeClr val="accent1"/>
-          </a:fillRef>
-          <a:effectRef idx="2">
-            <a:schemeClr val="accent1"/>
-          </a:effectRef>
-          <a:fontRef idx="minor">
-            <a:schemeClr val="lt1"/>
-          </a:fontRef>
-        </p:style>
-        <p:txBody>
-          <a:bodyPr rtlCol="0" anchor="ctr"/>
-          <a:lstStyle/>
-          <a:p>
-            <a:pPr algn="ctr"/>
-          </a:p>
-        </p:txBody>
-      </p:sp>
-      <p:sp>
-        <p:nvSpPr>
-          <p:cNvPr id="25" name="TextBox 24"/>
-          <p:cNvSpPr txBox="1"/>
-          <p:nvPr/>
-        </p:nvSpPr>
-        <p:spPr>
-          <a:xfrm>
-            <a:off x="365760" y="6547104"/>
-            <a:ext cx="5486400" cy="274320"/>
-          </a:xfrm>
-          <a:prstGeom prst="rect">
-            <a:avLst/>
-          </a:prstGeom>
-          <a:noFill/>
-        </p:spPr>
-        <p:txBody>
-          <a:bodyPr wrap="square">
-            <a:spAutoFit/>
-          </a:bodyPr>
-          <a:lstStyle/>
-          <a:p>
-            <a:pPr algn="l"/>
-            <a:r>
-              <a:rPr sz="1000" b="0" i="0">
-                <a:solidFill>
-                  <a:srgbClr val="FFFFFF"/>
-                </a:solidFill>
-                <a:latin typeface="Microsoft YaHei"/>
-              </a:rPr>
-              <a:t>中长期交易基本说明与业务逻辑</a:t>
-            </a:r>
-          </a:p>
-        </p:txBody>
-      </p:sp>
-      <p:sp>
-        <p:nvSpPr>
-          <p:cNvPr id="26" name="TextBox 25"/>
-          <p:cNvSpPr txBox="1"/>
-          <p:nvPr/>
-        </p:nvSpPr>
-        <p:spPr>
-          <a:xfrm>
-            <a:off x="11094415" y="6547104"/>
-            <a:ext cx="731520" cy="274320"/>
-          </a:xfrm>
-          <a:prstGeom prst="rect">
-            <a:avLst/>
-          </a:prstGeom>
-          <a:noFill/>
-        </p:spPr>
-        <p:txBody>
-          <a:bodyPr wrap="square">
-            <a:spAutoFit/>
-          </a:bodyPr>
-          <a:lstStyle/>
-          <a:p>
             <a:pPr algn="r"/>
             <a:r>
-              <a:rPr sz="1000" b="0" i="0">
-                <a:solidFill>
-                  <a:srgbClr val="FFFFFF"/>
-                </a:solidFill>
-                <a:latin typeface="Microsoft YaHei"/>
-              </a:rPr>
-              <a:t>02 / 10</a:t>
+              <a:rPr sz="1100" b="0">
+                <a:solidFill>
+                  <a:srgbClr val="595F66"/>
+                </a:solidFill>
+                <a:latin typeface="微软雅黑"/>
+              </a:rPr>
+              <a:t>2</a:t>
             </a:r>
           </a:p>
         </p:txBody>
@@ -5052,22 +4597,116 @@
         <p:nvPr/>
       </p:nvGrpSpPr>
       <p:grpSpPr/>
-      <p:sp>
-        <p:nvSpPr>
-          <p:cNvPr id="2" name="Rectangle 1"/>
+      <p:pic>
+        <p:nvPicPr>
+          <p:cNvPr id="2" name="Picture 1" descr="banner.png"/>
+          <p:cNvPicPr>
+            <a:picLocks noChangeAspect="1"/>
+          </p:cNvPicPr>
+          <p:nvPr/>
+        </p:nvPicPr>
+        <p:blipFill>
+          <a:blip r:embed="rId2"/>
+          <a:stretch>
+            <a:fillRect/>
+          </a:stretch>
+        </p:blipFill>
+        <p:spPr>
+          <a:xfrm>
+            <a:off x="0" y="0"/>
+            <a:ext cx="9144000" cy="832104"/>
+          </a:xfrm>
+          <a:prstGeom prst="rect">
+            <a:avLst/>
+          </a:prstGeom>
+        </p:spPr>
+      </p:pic>
+      <p:sp>
+        <p:nvSpPr>
+          <p:cNvPr id="3" name="TextBox 2"/>
+          <p:cNvSpPr txBox="1"/>
+          <p:nvPr/>
+        </p:nvSpPr>
+        <p:spPr>
+          <a:xfrm>
+            <a:off x="320040" y="109728"/>
+            <a:ext cx="7315200" cy="640080"/>
+          </a:xfrm>
+          <a:prstGeom prst="rect">
+            <a:avLst/>
+          </a:prstGeom>
+          <a:noFill/>
+        </p:spPr>
+        <p:txBody>
+          <a:bodyPr wrap="square">
+            <a:spAutoFit/>
+          </a:bodyPr>
+          <a:lstStyle/>
+          <a:p>
+            <a:pPr algn="l"/>
+            <a:r>
+              <a:rPr sz="2600" b="1">
+                <a:solidFill>
+                  <a:srgbClr val="008080"/>
+                </a:solidFill>
+                <a:latin typeface="微软雅黑"/>
+              </a:rPr>
+              <a:t>关键名词解释</a:t>
+            </a:r>
+          </a:p>
+        </p:txBody>
+      </p:sp>
+      <p:sp>
+        <p:nvSpPr>
+          <p:cNvPr id="4" name="TextBox 3"/>
+          <p:cNvSpPr txBox="1"/>
+          <p:nvPr/>
+        </p:nvSpPr>
+        <p:spPr>
+          <a:xfrm>
+            <a:off x="365760" y="896112"/>
+            <a:ext cx="3657600" cy="365760"/>
+          </a:xfrm>
+          <a:prstGeom prst="rect">
+            <a:avLst/>
+          </a:prstGeom>
+          <a:noFill/>
+        </p:spPr>
+        <p:txBody>
+          <a:bodyPr wrap="square">
+            <a:spAutoFit/>
+          </a:bodyPr>
+          <a:lstStyle/>
+          <a:p>
+            <a:pPr algn="l"/>
+            <a:r>
+              <a:rPr sz="1300" b="0">
+                <a:solidFill>
+                  <a:srgbClr val="595F66"/>
+                </a:solidFill>
+                <a:latin typeface="微软雅黑"/>
+              </a:rPr>
+              <a:t>基本概念</a:t>
+            </a:r>
+          </a:p>
+        </p:txBody>
+      </p:sp>
+      <p:sp>
+        <p:nvSpPr>
+          <p:cNvPr id="5" name="Rectangle 4"/>
           <p:cNvSpPr/>
           <p:nvPr/>
         </p:nvSpPr>
         <p:spPr>
           <a:xfrm>
-            <a:off x="0" y="0"/>
-            <a:ext cx="12191695" cy="1051560"/>
+            <a:off x="457200" y="1417320"/>
+            <a:ext cx="8229600" cy="987552"/>
           </a:xfrm>
           <a:prstGeom prst="rect">
             <a:avLst/>
           </a:prstGeom>
           <a:solidFill>
-            <a:srgbClr val="0B2B4D"/>
+            <a:srgbClr val="F8F8F8"/>
           </a:solidFill>
           <a:ln>
             <a:noFill/>
@@ -5098,20 +4737,20 @@
       </p:sp>
       <p:sp>
         <p:nvSpPr>
-          <p:cNvPr id="3" name="Rectangle 2"/>
+          <p:cNvPr id="6" name="Rectangle 5"/>
           <p:cNvSpPr/>
           <p:nvPr/>
         </p:nvSpPr>
         <p:spPr>
           <a:xfrm>
-            <a:off x="0" y="1051560"/>
-            <a:ext cx="12191695" cy="54864"/>
+            <a:off x="457200" y="1417320"/>
+            <a:ext cx="50800" cy="987552"/>
           </a:xfrm>
           <a:prstGeom prst="rect">
             <a:avLst/>
           </a:prstGeom>
           <a:solidFill>
-            <a:srgbClr val="E87A1E"/>
+            <a:srgbClr val="008080"/>
           </a:solidFill>
           <a:ln>
             <a:noFill/>
@@ -5142,14 +4781,14 @@
       </p:sp>
       <p:sp>
         <p:nvSpPr>
-          <p:cNvPr id="4" name="TextBox 3"/>
+          <p:cNvPr id="7" name="TextBox 6"/>
           <p:cNvSpPr txBox="1"/>
           <p:nvPr/>
         </p:nvSpPr>
         <p:spPr>
           <a:xfrm>
-            <a:off x="548640" y="164592"/>
-            <a:ext cx="10058400" cy="548640"/>
+            <a:off x="731520" y="1490472"/>
+            <a:ext cx="2011680" cy="822960"/>
           </a:xfrm>
           <a:prstGeom prst="rect">
             <a:avLst/>
@@ -5164,27 +4803,27 @@
           <a:p>
             <a:pPr algn="l"/>
             <a:r>
-              <a:rPr sz="2800" b="1" i="0">
-                <a:solidFill>
-                  <a:srgbClr val="FFFFFF"/>
-                </a:solidFill>
-                <a:latin typeface="Microsoft YaHei"/>
-              </a:rPr>
-              <a:t>关键名词解释</a:t>
-            </a:r>
-          </a:p>
-        </p:txBody>
-      </p:sp>
-      <p:sp>
-        <p:nvSpPr>
-          <p:cNvPr id="5" name="TextBox 4"/>
+              <a:rPr sz="1400" b="1">
+                <a:solidFill>
+                  <a:srgbClr val="006B6B"/>
+                </a:solidFill>
+                <a:latin typeface="微软雅黑"/>
+              </a:rPr>
+              <a:t>交易日</a:t>
+            </a:r>
+          </a:p>
+        </p:txBody>
+      </p:sp>
+      <p:sp>
+        <p:nvSpPr>
+          <p:cNvPr id="8" name="TextBox 7"/>
           <p:cNvSpPr txBox="1"/>
           <p:nvPr/>
         </p:nvSpPr>
         <p:spPr>
           <a:xfrm>
-            <a:off x="548640" y="658368"/>
-            <a:ext cx="10058400" cy="365760"/>
+            <a:off x="2880360" y="1490472"/>
+            <a:ext cx="5623560" cy="868680"/>
           </a:xfrm>
           <a:prstGeom prst="rect">
             <a:avLst/>
@@ -5199,33 +4838,33 @@
           <a:p>
             <a:pPr algn="l"/>
             <a:r>
-              <a:rPr sz="1300" b="0" i="0">
-                <a:solidFill>
-                  <a:srgbClr val="CFDDEC"/>
-                </a:solidFill>
-                <a:latin typeface="Microsoft YaHei"/>
-              </a:rPr>
-              <a:t>01 基本概念</a:t>
-            </a:r>
-          </a:p>
-        </p:txBody>
-      </p:sp>
-      <p:sp>
-        <p:nvSpPr>
-          <p:cNvPr id="6" name="Rectangle 5"/>
+              <a:rPr sz="1200" b="0">
+                <a:solidFill>
+                  <a:srgbClr val="595F66"/>
+                </a:solidFill>
+                <a:latin typeface="微软雅黑"/>
+              </a:rPr>
+              <a:t>申报电量、电价的日期</a:t>
+            </a:r>
+          </a:p>
+        </p:txBody>
+      </p:sp>
+      <p:sp>
+        <p:nvSpPr>
+          <p:cNvPr id="9" name="Rectangle 8"/>
           <p:cNvSpPr/>
           <p:nvPr/>
         </p:nvSpPr>
         <p:spPr>
           <a:xfrm>
-            <a:off x="548640" y="1417320"/>
-            <a:ext cx="11064240" cy="914400"/>
+            <a:off x="457200" y="2560320"/>
+            <a:ext cx="8229600" cy="987552"/>
           </a:xfrm>
           <a:prstGeom prst="rect">
             <a:avLst/>
           </a:prstGeom>
           <a:solidFill>
-            <a:srgbClr val="F2F6FA"/>
+            <a:srgbClr val="F8F8F8"/>
           </a:solidFill>
           <a:ln>
             <a:noFill/>
@@ -5256,20 +4895,20 @@
       </p:sp>
       <p:sp>
         <p:nvSpPr>
-          <p:cNvPr id="7" name="Rectangle 6"/>
+          <p:cNvPr id="10" name="Rectangle 9"/>
           <p:cNvSpPr/>
           <p:nvPr/>
         </p:nvSpPr>
         <p:spPr>
           <a:xfrm>
-            <a:off x="548640" y="1417320"/>
-            <a:ext cx="73152" cy="914400"/>
+            <a:off x="457200" y="2560320"/>
+            <a:ext cx="50800" cy="987552"/>
           </a:xfrm>
           <a:prstGeom prst="rect">
             <a:avLst/>
           </a:prstGeom>
           <a:solidFill>
-            <a:srgbClr val="1F6FC0"/>
+            <a:srgbClr val="008080"/>
           </a:solidFill>
           <a:ln>
             <a:noFill/>
@@ -5300,14 +4939,14 @@
       </p:sp>
       <p:sp>
         <p:nvSpPr>
-          <p:cNvPr id="8" name="TextBox 7"/>
+          <p:cNvPr id="11" name="TextBox 10"/>
           <p:cNvSpPr txBox="1"/>
           <p:nvPr/>
         </p:nvSpPr>
         <p:spPr>
           <a:xfrm>
-            <a:off x="868680" y="1490472"/>
-            <a:ext cx="2377440" cy="731520"/>
+            <a:off x="731520" y="2633472"/>
+            <a:ext cx="2011680" cy="822960"/>
           </a:xfrm>
           <a:prstGeom prst="rect">
             <a:avLst/>
@@ -5322,27 +4961,27 @@
           <a:p>
             <a:pPr algn="l"/>
             <a:r>
-              <a:rPr sz="1600" b="1" i="0">
-                <a:solidFill>
-                  <a:srgbClr val="0B2B4D"/>
-                </a:solidFill>
-                <a:latin typeface="Microsoft YaHei"/>
-              </a:rPr>
-              <a:t>交易日</a:t>
-            </a:r>
-          </a:p>
-        </p:txBody>
-      </p:sp>
-      <p:sp>
-        <p:nvSpPr>
-          <p:cNvPr id="9" name="TextBox 8"/>
+              <a:rPr sz="1400" b="1">
+                <a:solidFill>
+                  <a:srgbClr val="006B6B"/>
+                </a:solidFill>
+                <a:latin typeface="微软雅黑"/>
+              </a:rPr>
+              <a:t>运行日（D日/交割日）</a:t>
+            </a:r>
+          </a:p>
+        </p:txBody>
+      </p:sp>
+      <p:sp>
+        <p:nvSpPr>
+          <p:cNvPr id="12" name="TextBox 11"/>
           <p:cNvSpPr txBox="1"/>
           <p:nvPr/>
         </p:nvSpPr>
         <p:spPr>
           <a:xfrm>
-            <a:off x="3383280" y="1490472"/>
-            <a:ext cx="7955279" cy="777240"/>
+            <a:off x="2880360" y="2633472"/>
+            <a:ext cx="5623560" cy="868680"/>
           </a:xfrm>
           <a:prstGeom prst="rect">
             <a:avLst/>
@@ -5357,33 +4996,33 @@
           <a:p>
             <a:pPr algn="l"/>
             <a:r>
-              <a:rPr sz="1350" b="0" i="0">
+              <a:rPr sz="1200" b="0">
                 <a:solidFill>
                   <a:srgbClr val="595F66"/>
                 </a:solidFill>
-                <a:latin typeface="Microsoft YaHei"/>
-              </a:rPr>
-              <a:t>申报电量、电价的日期</a:t>
-            </a:r>
-          </a:p>
-        </p:txBody>
-      </p:sp>
-      <p:sp>
-        <p:nvSpPr>
-          <p:cNvPr id="10" name="Rectangle 9"/>
+                <a:latin typeface="微软雅黑"/>
+              </a:rPr>
+              <a:t>实际运行的日期；如 3.1 日申报 3.4 日的中长期交易，3.1为交易日，3.4为运行日</a:t>
+            </a:r>
+          </a:p>
+        </p:txBody>
+      </p:sp>
+      <p:sp>
+        <p:nvSpPr>
+          <p:cNvPr id="13" name="Rectangle 12"/>
           <p:cNvSpPr/>
           <p:nvPr/>
         </p:nvSpPr>
         <p:spPr>
           <a:xfrm>
-            <a:off x="548640" y="2496312"/>
-            <a:ext cx="11064240" cy="914400"/>
+            <a:off x="457200" y="3703320"/>
+            <a:ext cx="8229600" cy="987552"/>
           </a:xfrm>
           <a:prstGeom prst="rect">
             <a:avLst/>
           </a:prstGeom>
           <a:solidFill>
-            <a:srgbClr val="F2F6FA"/>
+            <a:srgbClr val="F8F8F8"/>
           </a:solidFill>
           <a:ln>
             <a:noFill/>
@@ -5414,20 +5053,20 @@
       </p:sp>
       <p:sp>
         <p:nvSpPr>
-          <p:cNvPr id="11" name="Rectangle 10"/>
+          <p:cNvPr id="14" name="Rectangle 13"/>
           <p:cNvSpPr/>
           <p:nvPr/>
         </p:nvSpPr>
         <p:spPr>
           <a:xfrm>
-            <a:off x="548640" y="2496312"/>
-            <a:ext cx="73152" cy="914400"/>
+            <a:off x="457200" y="3703320"/>
+            <a:ext cx="50800" cy="987552"/>
           </a:xfrm>
           <a:prstGeom prst="rect">
             <a:avLst/>
           </a:prstGeom>
           <a:solidFill>
-            <a:srgbClr val="1F6FC0"/>
+            <a:srgbClr val="008080"/>
           </a:solidFill>
           <a:ln>
             <a:noFill/>
@@ -5458,14 +5097,14 @@
       </p:sp>
       <p:sp>
         <p:nvSpPr>
-          <p:cNvPr id="12" name="TextBox 11"/>
+          <p:cNvPr id="15" name="TextBox 14"/>
           <p:cNvSpPr txBox="1"/>
           <p:nvPr/>
         </p:nvSpPr>
         <p:spPr>
           <a:xfrm>
-            <a:off x="868680" y="2569464"/>
-            <a:ext cx="2377440" cy="731520"/>
+            <a:off x="731520" y="3776472"/>
+            <a:ext cx="2011680" cy="822960"/>
           </a:xfrm>
           <a:prstGeom prst="rect">
             <a:avLst/>
@@ -5480,27 +5119,27 @@
           <a:p>
             <a:pPr algn="l"/>
             <a:r>
-              <a:rPr sz="1600" b="1" i="0">
-                <a:solidFill>
-                  <a:srgbClr val="0B2B4D"/>
-                </a:solidFill>
-                <a:latin typeface="Microsoft YaHei"/>
-              </a:rPr>
-              <a:t>运行日（D日 / 交割日）</a:t>
-            </a:r>
-          </a:p>
-        </p:txBody>
-      </p:sp>
-      <p:sp>
-        <p:nvSpPr>
-          <p:cNvPr id="13" name="TextBox 12"/>
+              <a:rPr sz="1400" b="1">
+                <a:solidFill>
+                  <a:srgbClr val="006B6B"/>
+                </a:solidFill>
+                <a:latin typeface="微软雅黑"/>
+              </a:rPr>
+              <a:t>D-1 / D+1</a:t>
+            </a:r>
+          </a:p>
+        </p:txBody>
+      </p:sp>
+      <p:sp>
+        <p:nvSpPr>
+          <p:cNvPr id="16" name="TextBox 15"/>
           <p:cNvSpPr txBox="1"/>
           <p:nvPr/>
         </p:nvSpPr>
         <p:spPr>
           <a:xfrm>
-            <a:off x="3383280" y="2569464"/>
-            <a:ext cx="7955279" cy="777240"/>
+            <a:off x="2880360" y="3776472"/>
+            <a:ext cx="5623560" cy="868680"/>
           </a:xfrm>
           <a:prstGeom prst="rect">
             <a:avLst/>
@@ -5515,33 +5154,33 @@
           <a:p>
             <a:pPr algn="l"/>
             <a:r>
-              <a:rPr sz="1350" b="0" i="0">
+              <a:rPr sz="1200" b="0">
                 <a:solidFill>
                   <a:srgbClr val="595F66"/>
                 </a:solidFill>
-                <a:latin typeface="Microsoft YaHei"/>
-              </a:rPr>
-              <a:t>实际运行的日期；如 3.1 日申报 3.4 日的中长期交易，3.1 为交易日，3.4 为运行日</a:t>
-            </a:r>
-          </a:p>
-        </p:txBody>
-      </p:sp>
-      <p:sp>
-        <p:nvSpPr>
-          <p:cNvPr id="14" name="Rectangle 13"/>
+                <a:latin typeface="微软雅黑"/>
+              </a:rPr>
+              <a:t>对应交割日的前一天/后一天，以此类推</a:t>
+            </a:r>
+          </a:p>
+        </p:txBody>
+      </p:sp>
+      <p:sp>
+        <p:nvSpPr>
+          <p:cNvPr id="17" name="Rectangle 16"/>
           <p:cNvSpPr/>
           <p:nvPr/>
         </p:nvSpPr>
         <p:spPr>
           <a:xfrm>
-            <a:off x="548640" y="3575304"/>
-            <a:ext cx="11064240" cy="914400"/>
+            <a:off x="457200" y="4846320"/>
+            <a:ext cx="8229600" cy="987552"/>
           </a:xfrm>
           <a:prstGeom prst="rect">
             <a:avLst/>
           </a:prstGeom>
           <a:solidFill>
-            <a:srgbClr val="F2F6FA"/>
+            <a:srgbClr val="F8F8F8"/>
           </a:solidFill>
           <a:ln>
             <a:noFill/>
@@ -5572,20 +5211,20 @@
       </p:sp>
       <p:sp>
         <p:nvSpPr>
-          <p:cNvPr id="15" name="Rectangle 14"/>
+          <p:cNvPr id="18" name="Rectangle 17"/>
           <p:cNvSpPr/>
           <p:nvPr/>
         </p:nvSpPr>
         <p:spPr>
           <a:xfrm>
-            <a:off x="548640" y="3575304"/>
-            <a:ext cx="73152" cy="914400"/>
+            <a:off x="457200" y="4846320"/>
+            <a:ext cx="50800" cy="987552"/>
           </a:xfrm>
           <a:prstGeom prst="rect">
             <a:avLst/>
           </a:prstGeom>
           <a:solidFill>
-            <a:srgbClr val="1F6FC0"/>
+            <a:srgbClr val="008080"/>
           </a:solidFill>
           <a:ln>
             <a:noFill/>
@@ -5616,14 +5255,14 @@
       </p:sp>
       <p:sp>
         <p:nvSpPr>
-          <p:cNvPr id="16" name="TextBox 15"/>
+          <p:cNvPr id="19" name="TextBox 18"/>
           <p:cNvSpPr txBox="1"/>
           <p:nvPr/>
         </p:nvSpPr>
         <p:spPr>
           <a:xfrm>
-            <a:off x="868680" y="3648456"/>
-            <a:ext cx="2377440" cy="731520"/>
+            <a:off x="731520" y="4919472"/>
+            <a:ext cx="2011680" cy="822960"/>
           </a:xfrm>
           <a:prstGeom prst="rect">
             <a:avLst/>
@@ -5638,27 +5277,27 @@
           <a:p>
             <a:pPr algn="l"/>
             <a:r>
-              <a:rPr sz="1600" b="1" i="0">
-                <a:solidFill>
-                  <a:srgbClr val="0B2B4D"/>
-                </a:solidFill>
-                <a:latin typeface="Microsoft YaHei"/>
-              </a:rPr>
-              <a:t>D-1 / D+1</a:t>
-            </a:r>
-          </a:p>
-        </p:txBody>
-      </p:sp>
-      <p:sp>
-        <p:nvSpPr>
-          <p:cNvPr id="17" name="TextBox 16"/>
+              <a:rPr sz="1400" b="1">
+                <a:solidFill>
+                  <a:srgbClr val="006B6B"/>
+                </a:solidFill>
+                <a:latin typeface="微软雅黑"/>
+              </a:rPr>
+              <a:t>能量块交易</a:t>
+            </a:r>
+          </a:p>
+        </p:txBody>
+      </p:sp>
+      <p:sp>
+        <p:nvSpPr>
+          <p:cNvPr id="20" name="TextBox 19"/>
           <p:cNvSpPr txBox="1"/>
           <p:nvPr/>
         </p:nvSpPr>
         <p:spPr>
           <a:xfrm>
-            <a:off x="3383280" y="3648456"/>
-            <a:ext cx="7955279" cy="777240"/>
+            <a:off x="2880360" y="4919472"/>
+            <a:ext cx="5623560" cy="868680"/>
           </a:xfrm>
           <a:prstGeom prst="rect">
             <a:avLst/>
@@ -5673,115 +5312,27 @@
           <a:p>
             <a:pPr algn="l"/>
             <a:r>
-              <a:rPr sz="1350" b="0" i="0">
+              <a:rPr sz="1200" b="0">
                 <a:solidFill>
                   <a:srgbClr val="595F66"/>
                 </a:solidFill>
-                <a:latin typeface="Microsoft YaHei"/>
-              </a:rPr>
-              <a:t>对应交割日的前一天 / 后一天，以此类推</a:t>
-            </a:r>
-          </a:p>
-        </p:txBody>
-      </p:sp>
-      <p:sp>
-        <p:nvSpPr>
-          <p:cNvPr id="18" name="Rectangle 17"/>
-          <p:cNvSpPr/>
-          <p:nvPr/>
-        </p:nvSpPr>
-        <p:spPr>
-          <a:xfrm>
-            <a:off x="548640" y="4654296"/>
-            <a:ext cx="11064240" cy="914400"/>
-          </a:xfrm>
-          <a:prstGeom prst="rect">
-            <a:avLst/>
-          </a:prstGeom>
-          <a:solidFill>
-            <a:srgbClr val="F2F6FA"/>
-          </a:solidFill>
-          <a:ln>
-            <a:noFill/>
-          </a:ln>
-          <a:effectLst/>
-        </p:spPr>
-        <p:style>
-          <a:lnRef idx="1">
-            <a:schemeClr val="accent1"/>
-          </a:lnRef>
-          <a:fillRef idx="3">
-            <a:schemeClr val="accent1"/>
-          </a:fillRef>
-          <a:effectRef idx="2">
-            <a:schemeClr val="accent1"/>
-          </a:effectRef>
-          <a:fontRef idx="minor">
-            <a:schemeClr val="lt1"/>
-          </a:fontRef>
-        </p:style>
-        <p:txBody>
-          <a:bodyPr rtlCol="0" anchor="ctr"/>
-          <a:lstStyle/>
-          <a:p>
-            <a:pPr algn="ctr"/>
-          </a:p>
-        </p:txBody>
-      </p:sp>
-      <p:sp>
-        <p:nvSpPr>
-          <p:cNvPr id="19" name="Rectangle 18"/>
-          <p:cNvSpPr/>
-          <p:nvPr/>
-        </p:nvSpPr>
-        <p:spPr>
-          <a:xfrm>
-            <a:off x="548640" y="4654296"/>
-            <a:ext cx="73152" cy="914400"/>
-          </a:xfrm>
-          <a:prstGeom prst="rect">
-            <a:avLst/>
-          </a:prstGeom>
-          <a:solidFill>
-            <a:srgbClr val="1F6FC0"/>
-          </a:solidFill>
-          <a:ln>
-            <a:noFill/>
-          </a:ln>
-          <a:effectLst/>
-        </p:spPr>
-        <p:style>
-          <a:lnRef idx="1">
-            <a:schemeClr val="accent1"/>
-          </a:lnRef>
-          <a:fillRef idx="3">
-            <a:schemeClr val="accent1"/>
-          </a:fillRef>
-          <a:effectRef idx="2">
-            <a:schemeClr val="accent1"/>
-          </a:effectRef>
-          <a:fontRef idx="minor">
-            <a:schemeClr val="lt1"/>
-          </a:fontRef>
-        </p:style>
-        <p:txBody>
-          <a:bodyPr rtlCol="0" anchor="ctr"/>
-          <a:lstStyle/>
-          <a:p>
-            <a:pPr algn="ctr"/>
-          </a:p>
-        </p:txBody>
-      </p:sp>
-      <p:sp>
-        <p:nvSpPr>
-          <p:cNvPr id="20" name="TextBox 19"/>
+                <a:latin typeface="微软雅黑"/>
+              </a:rPr>
+              <a:t>本文交易均为1小时能量块交易；如"3.1日中长期交易"指当日0:00~23:00共24个时刻点的24次独立交易</a:t>
+            </a:r>
+          </a:p>
+        </p:txBody>
+      </p:sp>
+      <p:sp>
+        <p:nvSpPr>
+          <p:cNvPr id="21" name="TextBox 20"/>
           <p:cNvSpPr txBox="1"/>
           <p:nvPr/>
         </p:nvSpPr>
         <p:spPr>
           <a:xfrm>
-            <a:off x="868680" y="4727448"/>
-            <a:ext cx="2377440" cy="731520"/>
+            <a:off x="8641080" y="6537960"/>
+            <a:ext cx="365760" cy="274320"/>
           </a:xfrm>
           <a:prstGeom prst="rect">
             <a:avLst/>
@@ -5794,164 +5345,15 @@
           </a:bodyPr>
           <a:lstStyle/>
           <a:p>
-            <a:pPr algn="l"/>
-            <a:r>
-              <a:rPr sz="1600" b="1" i="0">
-                <a:solidFill>
-                  <a:srgbClr val="0B2B4D"/>
-                </a:solidFill>
-                <a:latin typeface="Microsoft YaHei"/>
-              </a:rPr>
-              <a:t>能量块交易</a:t>
-            </a:r>
-          </a:p>
-        </p:txBody>
-      </p:sp>
-      <p:sp>
-        <p:nvSpPr>
-          <p:cNvPr id="21" name="TextBox 20"/>
-          <p:cNvSpPr txBox="1"/>
-          <p:nvPr/>
-        </p:nvSpPr>
-        <p:spPr>
-          <a:xfrm>
-            <a:off x="3383280" y="4727448"/>
-            <a:ext cx="7955279" cy="777240"/>
-          </a:xfrm>
-          <a:prstGeom prst="rect">
-            <a:avLst/>
-          </a:prstGeom>
-          <a:noFill/>
-        </p:spPr>
-        <p:txBody>
-          <a:bodyPr wrap="square">
-            <a:spAutoFit/>
-          </a:bodyPr>
-          <a:lstStyle/>
-          <a:p>
-            <a:pPr algn="l"/>
-            <a:r>
-              <a:rPr sz="1350" b="0" i="0">
+            <a:pPr algn="r"/>
+            <a:r>
+              <a:rPr sz="1100" b="0">
                 <a:solidFill>
                   <a:srgbClr val="595F66"/>
                 </a:solidFill>
-                <a:latin typeface="Microsoft YaHei"/>
-              </a:rPr>
-              <a:t>本文交易均为 1 小时能量块交易；如“3.1日中长期交易”指当日 0:00~23:00 共 24 个时刻点的 24 次独立交易，各自独立预测、独立报量报价</a:t>
-            </a:r>
-          </a:p>
-        </p:txBody>
-      </p:sp>
-      <p:sp>
-        <p:nvSpPr>
-          <p:cNvPr id="22" name="Rectangle 21"/>
-          <p:cNvSpPr/>
-          <p:nvPr/>
-        </p:nvSpPr>
-        <p:spPr>
-          <a:xfrm>
-            <a:off x="0" y="6565392"/>
-            <a:ext cx="12191695" cy="292608"/>
-          </a:xfrm>
-          <a:prstGeom prst="rect">
-            <a:avLst/>
-          </a:prstGeom>
-          <a:solidFill>
-            <a:srgbClr val="0B2B4D"/>
-          </a:solidFill>
-          <a:ln>
-            <a:noFill/>
-          </a:ln>
-          <a:effectLst/>
-        </p:spPr>
-        <p:style>
-          <a:lnRef idx="1">
-            <a:schemeClr val="accent1"/>
-          </a:lnRef>
-          <a:fillRef idx="3">
-            <a:schemeClr val="accent1"/>
-          </a:fillRef>
-          <a:effectRef idx="2">
-            <a:schemeClr val="accent1"/>
-          </a:effectRef>
-          <a:fontRef idx="minor">
-            <a:schemeClr val="lt1"/>
-          </a:fontRef>
-        </p:style>
-        <p:txBody>
-          <a:bodyPr rtlCol="0" anchor="ctr"/>
-          <a:lstStyle/>
-          <a:p>
-            <a:pPr algn="ctr"/>
-          </a:p>
-        </p:txBody>
-      </p:sp>
-      <p:sp>
-        <p:nvSpPr>
-          <p:cNvPr id="23" name="TextBox 22"/>
-          <p:cNvSpPr txBox="1"/>
-          <p:nvPr/>
-        </p:nvSpPr>
-        <p:spPr>
-          <a:xfrm>
-            <a:off x="365760" y="6547104"/>
-            <a:ext cx="5486400" cy="274320"/>
-          </a:xfrm>
-          <a:prstGeom prst="rect">
-            <a:avLst/>
-          </a:prstGeom>
-          <a:noFill/>
-        </p:spPr>
-        <p:txBody>
-          <a:bodyPr wrap="square">
-            <a:spAutoFit/>
-          </a:bodyPr>
-          <a:lstStyle/>
-          <a:p>
-            <a:pPr algn="l"/>
-            <a:r>
-              <a:rPr sz="1000" b="0" i="0">
-                <a:solidFill>
-                  <a:srgbClr val="FFFFFF"/>
-                </a:solidFill>
-                <a:latin typeface="Microsoft YaHei"/>
-              </a:rPr>
-              <a:t>中长期交易基本说明与业务逻辑</a:t>
-            </a:r>
-          </a:p>
-        </p:txBody>
-      </p:sp>
-      <p:sp>
-        <p:nvSpPr>
-          <p:cNvPr id="24" name="TextBox 23"/>
-          <p:cNvSpPr txBox="1"/>
-          <p:nvPr/>
-        </p:nvSpPr>
-        <p:spPr>
-          <a:xfrm>
-            <a:off x="11094415" y="6547104"/>
-            <a:ext cx="731520" cy="274320"/>
-          </a:xfrm>
-          <a:prstGeom prst="rect">
-            <a:avLst/>
-          </a:prstGeom>
-          <a:noFill/>
-        </p:spPr>
-        <p:txBody>
-          <a:bodyPr wrap="square">
-            <a:spAutoFit/>
-          </a:bodyPr>
-          <a:lstStyle/>
-          <a:p>
-            <a:pPr algn="r"/>
-            <a:r>
-              <a:rPr sz="1000" b="0" i="0">
-                <a:solidFill>
-                  <a:srgbClr val="FFFFFF"/>
-                </a:solidFill>
-                <a:latin typeface="Microsoft YaHei"/>
-              </a:rPr>
-              <a:t>03 / 10</a:t>
+                <a:latin typeface="微软雅黑"/>
+              </a:rPr>
+              <a:t>3</a:t>
             </a:r>
           </a:p>
         </p:txBody>
@@ -5982,22 +5384,81 @@
         <p:nvPr/>
       </p:nvGrpSpPr>
       <p:grpSpPr/>
-      <p:sp>
-        <p:nvSpPr>
-          <p:cNvPr id="2" name="Rectangle 1"/>
+      <p:pic>
+        <p:nvPicPr>
+          <p:cNvPr id="2" name="Picture 1" descr="banner.png"/>
+          <p:cNvPicPr>
+            <a:picLocks noChangeAspect="1"/>
+          </p:cNvPicPr>
+          <p:nvPr/>
+        </p:nvPicPr>
+        <p:blipFill>
+          <a:blip r:embed="rId2"/>
+          <a:stretch>
+            <a:fillRect/>
+          </a:stretch>
+        </p:blipFill>
+        <p:spPr>
+          <a:xfrm>
+            <a:off x="0" y="0"/>
+            <a:ext cx="9144000" cy="832104"/>
+          </a:xfrm>
+          <a:prstGeom prst="rect">
+            <a:avLst/>
+          </a:prstGeom>
+        </p:spPr>
+      </p:pic>
+      <p:sp>
+        <p:nvSpPr>
+          <p:cNvPr id="3" name="TextBox 2"/>
+          <p:cNvSpPr txBox="1"/>
+          <p:nvPr/>
+        </p:nvSpPr>
+        <p:spPr>
+          <a:xfrm>
+            <a:off x="320040" y="109728"/>
+            <a:ext cx="7315200" cy="640080"/>
+          </a:xfrm>
+          <a:prstGeom prst="rect">
+            <a:avLst/>
+          </a:prstGeom>
+          <a:noFill/>
+        </p:spPr>
+        <p:txBody>
+          <a:bodyPr wrap="square">
+            <a:spAutoFit/>
+          </a:bodyPr>
+          <a:lstStyle/>
+          <a:p>
+            <a:pPr algn="l"/>
+            <a:r>
+              <a:rPr sz="2400" b="1">
+                <a:solidFill>
+                  <a:srgbClr val="008080"/>
+                </a:solidFill>
+                <a:latin typeface="微软雅黑"/>
+              </a:rPr>
+              <a:t>交易目标：补仓与套利</a:t>
+            </a:r>
+          </a:p>
+        </p:txBody>
+      </p:sp>
+      <p:sp>
+        <p:nvSpPr>
+          <p:cNvPr id="4" name="Rectangle 3"/>
           <p:cNvSpPr/>
           <p:nvPr/>
         </p:nvSpPr>
         <p:spPr>
           <a:xfrm>
-            <a:off x="0" y="0"/>
-            <a:ext cx="12191695" cy="1051560"/>
+            <a:off x="457200" y="1325880"/>
+            <a:ext cx="4023360" cy="502920"/>
           </a:xfrm>
           <a:prstGeom prst="rect">
             <a:avLst/>
           </a:prstGeom>
           <a:solidFill>
-            <a:srgbClr val="0B2B4D"/>
+            <a:srgbClr val="008080"/>
           </a:solidFill>
           <a:ln>
             <a:noFill/>
@@ -6028,20 +5489,55 @@
       </p:sp>
       <p:sp>
         <p:nvSpPr>
-          <p:cNvPr id="3" name="Rectangle 2"/>
+          <p:cNvPr id="5" name="TextBox 4"/>
+          <p:cNvSpPr txBox="1"/>
+          <p:nvPr/>
+        </p:nvSpPr>
+        <p:spPr>
+          <a:xfrm>
+            <a:off x="457200" y="1371600"/>
+            <a:ext cx="4023360" cy="411480"/>
+          </a:xfrm>
+          <a:prstGeom prst="rect">
+            <a:avLst/>
+          </a:prstGeom>
+          <a:noFill/>
+        </p:spPr>
+        <p:txBody>
+          <a:bodyPr wrap="square">
+            <a:spAutoFit/>
+          </a:bodyPr>
+          <a:lstStyle/>
+          <a:p>
+            <a:pPr algn="ctr"/>
+            <a:r>
+              <a:rPr sz="1800" b="1">
+                <a:solidFill>
+                  <a:srgbClr val="FFFFFF"/>
+                </a:solidFill>
+                <a:latin typeface="微软雅黑"/>
+              </a:rPr>
+              <a:t>补仓</a:t>
+            </a:r>
+          </a:p>
+        </p:txBody>
+      </p:sp>
+      <p:sp>
+        <p:nvSpPr>
+          <p:cNvPr id="6" name="Rectangle 5"/>
           <p:cNvSpPr/>
           <p:nvPr/>
         </p:nvSpPr>
         <p:spPr>
           <a:xfrm>
-            <a:off x="0" y="1051560"/>
-            <a:ext cx="12191695" cy="54864"/>
+            <a:off x="457200" y="1874519"/>
+            <a:ext cx="4023360" cy="4297680"/>
           </a:xfrm>
           <a:prstGeom prst="rect">
             <a:avLst/>
           </a:prstGeom>
           <a:solidFill>
-            <a:srgbClr val="E87A1E"/>
+            <a:srgbClr val="F8F8F8"/>
           </a:solidFill>
           <a:ln>
             <a:noFill/>
@@ -6072,14 +5568,14 @@
       </p:sp>
       <p:sp>
         <p:nvSpPr>
-          <p:cNvPr id="4" name="TextBox 3"/>
+          <p:cNvPr id="7" name="TextBox 6"/>
           <p:cNvSpPr txBox="1"/>
           <p:nvPr/>
         </p:nvSpPr>
         <p:spPr>
           <a:xfrm>
-            <a:off x="548640" y="164592"/>
-            <a:ext cx="10058400" cy="548640"/>
+            <a:off x="685800" y="2057400"/>
+            <a:ext cx="3611880" cy="3931920"/>
           </a:xfrm>
           <a:prstGeom prst="rect">
             <a:avLst/>
@@ -6092,70 +5588,80 @@
           </a:bodyPr>
           <a:lstStyle/>
           <a:p>
-            <a:pPr algn="l"/>
-            <a:r>
-              <a:rPr sz="2800" b="1" i="0">
-                <a:solidFill>
-                  <a:srgbClr val="FFFFFF"/>
-                </a:solidFill>
-                <a:latin typeface="Microsoft YaHei"/>
-              </a:rPr>
-              <a:t>交易目标：补仓与套利</a:t>
-            </a:r>
-          </a:p>
-        </p:txBody>
-      </p:sp>
-      <p:sp>
-        <p:nvSpPr>
-          <p:cNvPr id="5" name="TextBox 4"/>
-          <p:cNvSpPr txBox="1"/>
-          <p:nvPr/>
-        </p:nvSpPr>
-        <p:spPr>
-          <a:xfrm>
-            <a:off x="548640" y="658368"/>
-            <a:ext cx="10058400" cy="365760"/>
-          </a:xfrm>
-          <a:prstGeom prst="rect">
-            <a:avLst/>
-          </a:prstGeom>
-          <a:noFill/>
-        </p:spPr>
-        <p:txBody>
-          <a:bodyPr wrap="square">
-            <a:spAutoFit/>
-          </a:bodyPr>
-          <a:lstStyle/>
-          <a:p>
-            <a:pPr algn="l"/>
-            <a:r>
-              <a:rPr sz="1300" b="0" i="0">
-                <a:solidFill>
-                  <a:srgbClr val="CFDDEC"/>
-                </a:solidFill>
-                <a:latin typeface="Microsoft YaHei"/>
-              </a:rPr>
-              <a:t>02 Trading Objectives</a:t>
-            </a:r>
-          </a:p>
-        </p:txBody>
-      </p:sp>
-      <p:sp>
-        <p:nvSpPr>
-          <p:cNvPr id="6" name="Rectangle 5"/>
+            <a:pPr>
+              <a:lnSpc>
+                <a:spcPct val="115000"/>
+              </a:lnSpc>
+              <a:spcAft>
+                <a:spcPts val="500"/>
+              </a:spcAft>
+            </a:pPr>
+            <a:r>
+              <a:rPr sz="1250" b="1">
+                <a:solidFill>
+                  <a:srgbClr val="006B6B"/>
+                </a:solidFill>
+                <a:latin typeface="微软雅黑"/>
+              </a:rPr>
+              <a:t>• 广西本年度中长期持仓偏低，目标补全50%（未来可能调整）的中长期持仓（以月为单位）</a:t>
+            </a:r>
+          </a:p>
+          <a:p>
+            <a:pPr>
+              <a:lnSpc>
+                <a:spcPct val="115000"/>
+              </a:lnSpc>
+              <a:spcAft>
+                <a:spcPts val="500"/>
+              </a:spcAft>
+            </a:pPr>
+            <a:r>
+              <a:rPr sz="1250" b="1">
+                <a:solidFill>
+                  <a:srgbClr val="006B6B"/>
+                </a:solidFill>
+                <a:latin typeface="微软雅黑"/>
+              </a:rPr>
+              <a:t>• 必须每日购买一定中长期电量</a:t>
+            </a:r>
+          </a:p>
+          <a:p>
+            <a:pPr>
+              <a:lnSpc>
+                <a:spcPct val="115000"/>
+              </a:lnSpc>
+              <a:spcAft>
+                <a:spcPts val="500"/>
+              </a:spcAft>
+            </a:pPr>
+            <a:r>
+              <a:rPr sz="1250" b="1">
+                <a:solidFill>
+                  <a:srgbClr val="006B6B"/>
+                </a:solidFill>
+                <a:latin typeface="微软雅黑"/>
+              </a:rPr>
+              <a:t>• 通常在早晨的多日合同转让市场中完成</a:t>
+            </a:r>
+          </a:p>
+        </p:txBody>
+      </p:sp>
+      <p:sp>
+        <p:nvSpPr>
+          <p:cNvPr id="8" name="Rectangle 7"/>
           <p:cNvSpPr/>
           <p:nvPr/>
         </p:nvSpPr>
         <p:spPr>
           <a:xfrm>
-            <a:off x="548640" y="1371600"/>
-            <a:ext cx="5440680" cy="640080"/>
+            <a:off x="4663440" y="1325880"/>
+            <a:ext cx="4023360" cy="502920"/>
           </a:xfrm>
           <a:prstGeom prst="rect">
             <a:avLst/>
           </a:prstGeom>
           <a:solidFill>
-            <a:srgbClr val="1F6FC0"/>
+            <a:srgbClr val="008080"/>
           </a:solidFill>
           <a:ln>
             <a:noFill/>
@@ -6186,14 +5692,14 @@
       </p:sp>
       <p:sp>
         <p:nvSpPr>
-          <p:cNvPr id="7" name="TextBox 6"/>
+          <p:cNvPr id="9" name="TextBox 8"/>
           <p:cNvSpPr txBox="1"/>
           <p:nvPr/>
         </p:nvSpPr>
         <p:spPr>
           <a:xfrm>
-            <a:off x="548640" y="1417320"/>
-            <a:ext cx="5440680" cy="548640"/>
+            <a:off x="4663440" y="1371600"/>
+            <a:ext cx="4023360" cy="411480"/>
           </a:xfrm>
           <a:prstGeom prst="rect">
             <a:avLst/>
@@ -6208,33 +5714,33 @@
           <a:p>
             <a:pPr algn="ctr"/>
             <a:r>
-              <a:rPr sz="2200" b="1" i="0">
+              <a:rPr sz="1800" b="1">
                 <a:solidFill>
                   <a:srgbClr val="FFFFFF"/>
                 </a:solidFill>
-                <a:latin typeface="Microsoft YaHei"/>
-              </a:rPr>
-              <a:t>补仓</a:t>
-            </a:r>
-          </a:p>
-        </p:txBody>
-      </p:sp>
-      <p:sp>
-        <p:nvSpPr>
-          <p:cNvPr id="8" name="Rectangle 7"/>
+                <a:latin typeface="微软雅黑"/>
+              </a:rPr>
+              <a:t>套利</a:t>
+            </a:r>
+          </a:p>
+        </p:txBody>
+      </p:sp>
+      <p:sp>
+        <p:nvSpPr>
+          <p:cNvPr id="10" name="Rectangle 9"/>
           <p:cNvSpPr/>
           <p:nvPr/>
         </p:nvSpPr>
         <p:spPr>
           <a:xfrm>
-            <a:off x="548640" y="2057400"/>
-            <a:ext cx="5440680" cy="3931920"/>
+            <a:off x="4663440" y="1874519"/>
+            <a:ext cx="4023360" cy="4297680"/>
           </a:xfrm>
           <a:prstGeom prst="rect">
             <a:avLst/>
           </a:prstGeom>
           <a:solidFill>
-            <a:srgbClr val="F2F6FA"/>
+            <a:srgbClr val="F8F8F8"/>
           </a:solidFill>
           <a:ln>
             <a:noFill/>
@@ -6265,14 +5771,14 @@
       </p:sp>
       <p:sp>
         <p:nvSpPr>
-          <p:cNvPr id="9" name="TextBox 8"/>
+          <p:cNvPr id="11" name="TextBox 10"/>
           <p:cNvSpPr txBox="1"/>
           <p:nvPr/>
         </p:nvSpPr>
         <p:spPr>
           <a:xfrm>
-            <a:off x="868680" y="2286000"/>
-            <a:ext cx="4846320" cy="3474720"/>
+            <a:off x="4892040" y="2057400"/>
+            <a:ext cx="3611880" cy="3931920"/>
           </a:xfrm>
           <a:prstGeom prst="rect">
             <a:avLst/>
@@ -6290,17 +5796,17 @@
                 <a:spcPct val="115000"/>
               </a:lnSpc>
               <a:spcAft>
-                <a:spcPts val="600"/>
+                <a:spcPts val="500"/>
               </a:spcAft>
             </a:pPr>
             <a:r>
-              <a:rPr sz="1500" b="1">
-                <a:solidFill>
-                  <a:srgbClr val="0B2B4D"/>
-                </a:solidFill>
-                <a:latin typeface="Microsoft YaHei"/>
-              </a:rPr>
-              <a:t>• 广西本年度中长期持仓偏低，目标补全 50%（未来可能调整）的中长期持仓（以月为单位）</a:t>
+              <a:rPr sz="1250" b="1">
+                <a:solidFill>
+                  <a:srgbClr val="006B6B"/>
+                </a:solidFill>
+                <a:latin typeface="微软雅黑"/>
+              </a:rPr>
+              <a:t>• 实时电价在特定时段存在波动（可高可低）</a:t>
             </a:r>
           </a:p>
           <a:p>
@@ -6309,17 +5815,17 @@
                 <a:spcPct val="115000"/>
               </a:lnSpc>
               <a:spcAft>
-                <a:spcPts val="600"/>
+                <a:spcPts val="500"/>
               </a:spcAft>
             </a:pPr>
             <a:r>
-              <a:rPr sz="1500" b="1">
-                <a:solidFill>
-                  <a:srgbClr val="0B2B4D"/>
-                </a:solidFill>
-                <a:latin typeface="Microsoft YaHei"/>
-              </a:rPr>
-              <a:t>• 必须每日购买一定中长期电量</a:t>
+              <a:rPr sz="1250" b="1">
+                <a:solidFill>
+                  <a:srgbClr val="006B6B"/>
+                </a:solidFill>
+                <a:latin typeface="微软雅黑"/>
+              </a:rPr>
+              <a:t>• 实时电价-中长期电价差值在不同时段可正可负，形成买卖需求</a:t>
             </a:r>
           </a:p>
           <a:p>
@@ -6328,75 +5834,31 @@
                 <a:spcPct val="115000"/>
               </a:lnSpc>
               <a:spcAft>
-                <a:spcPts val="600"/>
+                <a:spcPts val="500"/>
               </a:spcAft>
             </a:pPr>
             <a:r>
-              <a:rPr sz="1500" b="1">
-                <a:solidFill>
-                  <a:srgbClr val="0B2B4D"/>
-                </a:solidFill>
-                <a:latin typeface="Microsoft YaHei"/>
-              </a:rPr>
-              <a:t>• 该交易通常在早晨的多日合同转让市场中完成</a:t>
-            </a:r>
-          </a:p>
-        </p:txBody>
-      </p:sp>
-      <p:sp>
-        <p:nvSpPr>
-          <p:cNvPr id="10" name="Rectangle 9"/>
-          <p:cNvSpPr/>
-          <p:nvPr/>
-        </p:nvSpPr>
-        <p:spPr>
-          <a:xfrm>
-            <a:off x="6217920" y="1371600"/>
-            <a:ext cx="5440680" cy="640080"/>
-          </a:xfrm>
-          <a:prstGeom prst="rect">
-            <a:avLst/>
-          </a:prstGeom>
-          <a:solidFill>
-            <a:srgbClr val="E87A1E"/>
-          </a:solidFill>
-          <a:ln>
-            <a:noFill/>
-          </a:ln>
-          <a:effectLst/>
-        </p:spPr>
-        <p:style>
-          <a:lnRef idx="1">
-            <a:schemeClr val="accent1"/>
-          </a:lnRef>
-          <a:fillRef idx="3">
-            <a:schemeClr val="accent1"/>
-          </a:fillRef>
-          <a:effectRef idx="2">
-            <a:schemeClr val="accent1"/>
-          </a:effectRef>
-          <a:fontRef idx="minor">
-            <a:schemeClr val="lt1"/>
-          </a:fontRef>
-        </p:style>
-        <p:txBody>
-          <a:bodyPr rtlCol="0" anchor="ctr"/>
-          <a:lstStyle/>
-          <a:p>
-            <a:pPr algn="ctr"/>
-          </a:p>
-        </p:txBody>
-      </p:sp>
-      <p:sp>
-        <p:nvSpPr>
-          <p:cNvPr id="11" name="TextBox 10"/>
+              <a:rPr sz="1250" b="1">
+                <a:solidFill>
+                  <a:srgbClr val="006B6B"/>
+                </a:solidFill>
+                <a:latin typeface="微软雅黑"/>
+              </a:rPr>
+              <a:t>• 不同售电公司对实时价格判断不同，部分公司博弈高/低价，形成交易与套利空间</a:t>
+            </a:r>
+          </a:p>
+        </p:txBody>
+      </p:sp>
+      <p:sp>
+        <p:nvSpPr>
+          <p:cNvPr id="12" name="TextBox 11"/>
           <p:cNvSpPr txBox="1"/>
           <p:nvPr/>
         </p:nvSpPr>
         <p:spPr>
           <a:xfrm>
-            <a:off x="6217920" y="1417320"/>
-            <a:ext cx="5440680" cy="548640"/>
+            <a:off x="8641080" y="6537960"/>
+            <a:ext cx="365760" cy="274320"/>
           </a:xfrm>
           <a:prstGeom prst="rect">
             <a:avLst/>
@@ -6409,253 +5871,15 @@
           </a:bodyPr>
           <a:lstStyle/>
           <a:p>
-            <a:pPr algn="ctr"/>
-            <a:r>
-              <a:rPr sz="2200" b="1" i="0">
-                <a:solidFill>
-                  <a:srgbClr val="FFFFFF"/>
-                </a:solidFill>
-                <a:latin typeface="Microsoft YaHei"/>
-              </a:rPr>
-              <a:t>套利</a:t>
-            </a:r>
-          </a:p>
-        </p:txBody>
-      </p:sp>
-      <p:sp>
-        <p:nvSpPr>
-          <p:cNvPr id="12" name="Rectangle 11"/>
-          <p:cNvSpPr/>
-          <p:nvPr/>
-        </p:nvSpPr>
-        <p:spPr>
-          <a:xfrm>
-            <a:off x="6217920" y="2057400"/>
-            <a:ext cx="5440680" cy="3931920"/>
-          </a:xfrm>
-          <a:prstGeom prst="rect">
-            <a:avLst/>
-          </a:prstGeom>
-          <a:solidFill>
-            <a:srgbClr val="F2F6FA"/>
-          </a:solidFill>
-          <a:ln>
-            <a:noFill/>
-          </a:ln>
-          <a:effectLst/>
-        </p:spPr>
-        <p:style>
-          <a:lnRef idx="1">
-            <a:schemeClr val="accent1"/>
-          </a:lnRef>
-          <a:fillRef idx="3">
-            <a:schemeClr val="accent1"/>
-          </a:fillRef>
-          <a:effectRef idx="2">
-            <a:schemeClr val="accent1"/>
-          </a:effectRef>
-          <a:fontRef idx="minor">
-            <a:schemeClr val="lt1"/>
-          </a:fontRef>
-        </p:style>
-        <p:txBody>
-          <a:bodyPr rtlCol="0" anchor="ctr"/>
-          <a:lstStyle/>
-          <a:p>
-            <a:pPr algn="ctr"/>
-          </a:p>
-        </p:txBody>
-      </p:sp>
-      <p:sp>
-        <p:nvSpPr>
-          <p:cNvPr id="13" name="TextBox 12"/>
-          <p:cNvSpPr txBox="1"/>
-          <p:nvPr/>
-        </p:nvSpPr>
-        <p:spPr>
-          <a:xfrm>
-            <a:off x="6537960" y="2286000"/>
-            <a:ext cx="4846320" cy="3474720"/>
-          </a:xfrm>
-          <a:prstGeom prst="rect">
-            <a:avLst/>
-          </a:prstGeom>
-          <a:noFill/>
-        </p:spPr>
-        <p:txBody>
-          <a:bodyPr wrap="square">
-            <a:spAutoFit/>
-          </a:bodyPr>
-          <a:lstStyle/>
-          <a:p>
-            <a:pPr>
-              <a:lnSpc>
-                <a:spcPct val="115000"/>
-              </a:lnSpc>
-              <a:spcAft>
-                <a:spcPts val="600"/>
-              </a:spcAft>
-            </a:pPr>
-            <a:r>
-              <a:rPr sz="1500" b="1">
-                <a:solidFill>
-                  <a:srgbClr val="0B2B4D"/>
-                </a:solidFill>
-                <a:latin typeface="Microsoft YaHei"/>
-              </a:rPr>
-              <a:t>• 实时电价在特定时段存在波动（可高可低）</a:t>
-            </a:r>
-          </a:p>
-          <a:p>
-            <a:pPr>
-              <a:lnSpc>
-                <a:spcPct val="115000"/>
-              </a:lnSpc>
-              <a:spcAft>
-                <a:spcPts val="600"/>
-              </a:spcAft>
-            </a:pPr>
-            <a:r>
-              <a:rPr sz="1500" b="1">
-                <a:solidFill>
-                  <a:srgbClr val="0B2B4D"/>
-                </a:solidFill>
-                <a:latin typeface="Microsoft YaHei"/>
-              </a:rPr>
-              <a:t>• 实时电价 - 中长期电价 的差值在不同时段可正可负，形成买卖需求</a:t>
-            </a:r>
-          </a:p>
-          <a:p>
-            <a:pPr>
-              <a:lnSpc>
-                <a:spcPct val="115000"/>
-              </a:lnSpc>
-              <a:spcAft>
-                <a:spcPts val="600"/>
-              </a:spcAft>
-            </a:pPr>
-            <a:r>
-              <a:rPr sz="1500" b="1">
-                <a:solidFill>
-                  <a:srgbClr val="0B2B4D"/>
-                </a:solidFill>
-                <a:latin typeface="Microsoft YaHei"/>
-              </a:rPr>
-              <a:t>• 不同售电公司对实时价格判断不同，部分公司博弈高/低价，形成交易与套利空间</a:t>
-            </a:r>
-          </a:p>
-        </p:txBody>
-      </p:sp>
-      <p:sp>
-        <p:nvSpPr>
-          <p:cNvPr id="14" name="Rectangle 13"/>
-          <p:cNvSpPr/>
-          <p:nvPr/>
-        </p:nvSpPr>
-        <p:spPr>
-          <a:xfrm>
-            <a:off x="0" y="6565392"/>
-            <a:ext cx="12191695" cy="292608"/>
-          </a:xfrm>
-          <a:prstGeom prst="rect">
-            <a:avLst/>
-          </a:prstGeom>
-          <a:solidFill>
-            <a:srgbClr val="0B2B4D"/>
-          </a:solidFill>
-          <a:ln>
-            <a:noFill/>
-          </a:ln>
-          <a:effectLst/>
-        </p:spPr>
-        <p:style>
-          <a:lnRef idx="1">
-            <a:schemeClr val="accent1"/>
-          </a:lnRef>
-          <a:fillRef idx="3">
-            <a:schemeClr val="accent1"/>
-          </a:fillRef>
-          <a:effectRef idx="2">
-            <a:schemeClr val="accent1"/>
-          </a:effectRef>
-          <a:fontRef idx="minor">
-            <a:schemeClr val="lt1"/>
-          </a:fontRef>
-        </p:style>
-        <p:txBody>
-          <a:bodyPr rtlCol="0" anchor="ctr"/>
-          <a:lstStyle/>
-          <a:p>
-            <a:pPr algn="ctr"/>
-          </a:p>
-        </p:txBody>
-      </p:sp>
-      <p:sp>
-        <p:nvSpPr>
-          <p:cNvPr id="15" name="TextBox 14"/>
-          <p:cNvSpPr txBox="1"/>
-          <p:nvPr/>
-        </p:nvSpPr>
-        <p:spPr>
-          <a:xfrm>
-            <a:off x="365760" y="6547104"/>
-            <a:ext cx="5486400" cy="274320"/>
-          </a:xfrm>
-          <a:prstGeom prst="rect">
-            <a:avLst/>
-          </a:prstGeom>
-          <a:noFill/>
-        </p:spPr>
-        <p:txBody>
-          <a:bodyPr wrap="square">
-            <a:spAutoFit/>
-          </a:bodyPr>
-          <a:lstStyle/>
-          <a:p>
-            <a:pPr algn="l"/>
-            <a:r>
-              <a:rPr sz="1000" b="0" i="0">
-                <a:solidFill>
-                  <a:srgbClr val="FFFFFF"/>
-                </a:solidFill>
-                <a:latin typeface="Microsoft YaHei"/>
-              </a:rPr>
-              <a:t>中长期交易基本说明与业务逻辑</a:t>
-            </a:r>
-          </a:p>
-        </p:txBody>
-      </p:sp>
-      <p:sp>
-        <p:nvSpPr>
-          <p:cNvPr id="16" name="TextBox 15"/>
-          <p:cNvSpPr txBox="1"/>
-          <p:nvPr/>
-        </p:nvSpPr>
-        <p:spPr>
-          <a:xfrm>
-            <a:off x="11094415" y="6547104"/>
-            <a:ext cx="731520" cy="274320"/>
-          </a:xfrm>
-          <a:prstGeom prst="rect">
-            <a:avLst/>
-          </a:prstGeom>
-          <a:noFill/>
-        </p:spPr>
-        <p:txBody>
-          <a:bodyPr wrap="square">
-            <a:spAutoFit/>
-          </a:bodyPr>
-          <a:lstStyle/>
-          <a:p>
             <a:pPr algn="r"/>
             <a:r>
-              <a:rPr sz="1000" b="0" i="0">
-                <a:solidFill>
-                  <a:srgbClr val="FFFFFF"/>
-                </a:solidFill>
-                <a:latin typeface="Microsoft YaHei"/>
-              </a:rPr>
-              <a:t>04 / 10</a:t>
+              <a:rPr sz="1100" b="0">
+                <a:solidFill>
+                  <a:srgbClr val="595F66"/>
+                </a:solidFill>
+                <a:latin typeface="微软雅黑"/>
+              </a:rPr>
+              <a:t>4</a:t>
             </a:r>
           </a:p>
         </p:txBody>
@@ -6686,22 +5910,215 @@
         <p:nvPr/>
       </p:nvGrpSpPr>
       <p:grpSpPr/>
-      <p:sp>
-        <p:nvSpPr>
-          <p:cNvPr id="2" name="Rectangle 1"/>
+      <p:pic>
+        <p:nvPicPr>
+          <p:cNvPr id="2" name="Picture 1" descr="banner.png"/>
+          <p:cNvPicPr>
+            <a:picLocks noChangeAspect="1"/>
+          </p:cNvPicPr>
+          <p:nvPr/>
+        </p:nvPicPr>
+        <p:blipFill>
+          <a:blip r:embed="rId2"/>
+          <a:stretch>
+            <a:fillRect/>
+          </a:stretch>
+        </p:blipFill>
+        <p:spPr>
+          <a:xfrm>
+            <a:off x="0" y="0"/>
+            <a:ext cx="9144000" cy="832104"/>
+          </a:xfrm>
+          <a:prstGeom prst="rect">
+            <a:avLst/>
+          </a:prstGeom>
+        </p:spPr>
+      </p:pic>
+      <p:sp>
+        <p:nvSpPr>
+          <p:cNvPr id="3" name="TextBox 2"/>
+          <p:cNvSpPr txBox="1"/>
+          <p:nvPr/>
+        </p:nvSpPr>
+        <p:spPr>
+          <a:xfrm>
+            <a:off x="320040" y="109728"/>
+            <a:ext cx="7315200" cy="640080"/>
+          </a:xfrm>
+          <a:prstGeom prst="rect">
+            <a:avLst/>
+          </a:prstGeom>
+          <a:noFill/>
+        </p:spPr>
+        <p:txBody>
+          <a:bodyPr wrap="square">
+            <a:spAutoFit/>
+          </a:bodyPr>
+          <a:lstStyle/>
+          <a:p>
+            <a:pPr algn="l"/>
+            <a:r>
+              <a:rPr sz="2200" b="1">
+                <a:solidFill>
+                  <a:srgbClr val="008080"/>
+                </a:solidFill>
+                <a:latin typeface="微软雅黑"/>
+              </a:rPr>
+              <a:t>交易品种总览与核心公式</a:t>
+            </a:r>
+          </a:p>
+        </p:txBody>
+      </p:sp>
+      <p:sp>
+        <p:nvSpPr>
+          <p:cNvPr id="4" name="TextBox 3"/>
+          <p:cNvSpPr txBox="1"/>
+          <p:nvPr/>
+        </p:nvSpPr>
+        <p:spPr>
+          <a:xfrm>
+            <a:off x="365760" y="914400"/>
+            <a:ext cx="3657600" cy="320040"/>
+          </a:xfrm>
+          <a:prstGeom prst="rect">
+            <a:avLst/>
+          </a:prstGeom>
+          <a:noFill/>
+        </p:spPr>
+        <p:txBody>
+          <a:bodyPr wrap="square">
+            <a:spAutoFit/>
+          </a:bodyPr>
+          <a:lstStyle/>
+          <a:p>
+            <a:pPr algn="l"/>
+            <a:r>
+              <a:rPr sz="1400" b="1">
+                <a:solidFill>
+                  <a:srgbClr val="006B6B"/>
+                </a:solidFill>
+                <a:latin typeface="微软雅黑"/>
+              </a:rPr>
+              <a:t>核心持仓公式</a:t>
+            </a:r>
+          </a:p>
+        </p:txBody>
+      </p:sp>
+      <p:sp>
+        <p:nvSpPr>
+          <p:cNvPr id="5" name="TextBox 4"/>
+          <p:cNvSpPr txBox="1"/>
+          <p:nvPr/>
+        </p:nvSpPr>
+        <p:spPr>
+          <a:xfrm>
+            <a:off x="365760" y="1280160"/>
+            <a:ext cx="8412480" cy="1920240"/>
+          </a:xfrm>
+          <a:prstGeom prst="rect">
+            <a:avLst/>
+          </a:prstGeom>
+          <a:noFill/>
+        </p:spPr>
+        <p:txBody>
+          <a:bodyPr wrap="square">
+            <a:spAutoFit/>
+          </a:bodyPr>
+          <a:lstStyle/>
+          <a:p>
+            <a:pPr>
+              <a:lnSpc>
+                <a:spcPct val="115000"/>
+              </a:lnSpc>
+              <a:spcAft>
+                <a:spcPts val="500"/>
+              </a:spcAft>
+            </a:pPr>
+            <a:r>
+              <a:rPr sz="1200" b="1">
+                <a:solidFill>
+                  <a:srgbClr val="006B6B"/>
+                </a:solidFill>
+                <a:latin typeface="微软雅黑"/>
+              </a:rPr>
+              <a:t>• 月度中长期持仓量 = 年度长协(分解到月) + 月度竞价 + 月内多日直接交易 + 合同电量转让 + 绿色电力交易</a:t>
+            </a:r>
+          </a:p>
+          <a:p>
+            <a:pPr>
+              <a:lnSpc>
+                <a:spcPct val="115000"/>
+              </a:lnSpc>
+              <a:spcAft>
+                <a:spcPts val="500"/>
+              </a:spcAft>
+            </a:pPr>
+            <a:r>
+              <a:rPr sz="1200" b="1">
+                <a:solidFill>
+                  <a:srgbClr val="006B6B"/>
+                </a:solidFill>
+                <a:latin typeface="微软雅黑"/>
+              </a:rPr>
+              <a:t>• 总电量(批发侧) = 月度中长期持仓量 + 日前偏差电量 + 实时偏差电量</a:t>
+            </a:r>
+          </a:p>
+          <a:p>
+            <a:pPr>
+              <a:lnSpc>
+                <a:spcPct val="115000"/>
+              </a:lnSpc>
+              <a:spcAft>
+                <a:spcPts val="500"/>
+              </a:spcAft>
+            </a:pPr>
+            <a:r>
+              <a:rPr sz="1200" b="1">
+                <a:solidFill>
+                  <a:srgbClr val="006B6B"/>
+                </a:solidFill>
+                <a:latin typeface="微软雅黑"/>
+              </a:rPr>
+              <a:t>• 总电量(代理用户侧) = 代理所有零售用户月度实际用网电量之和</a:t>
+            </a:r>
+          </a:p>
+          <a:p>
+            <a:pPr>
+              <a:lnSpc>
+                <a:spcPct val="115000"/>
+              </a:lnSpc>
+              <a:spcAft>
+                <a:spcPts val="500"/>
+              </a:spcAft>
+            </a:pPr>
+            <a:r>
+              <a:rPr sz="1200" b="1">
+                <a:solidFill>
+                  <a:srgbClr val="006B6B"/>
+                </a:solidFill>
+                <a:latin typeface="微软雅黑"/>
+              </a:rPr>
+              <a:t>• 正常情况下：批发侧口径 = 代理用户侧口径（特殊计量/非市场化情形除外，暂不考虑）</a:t>
+            </a:r>
+          </a:p>
+        </p:txBody>
+      </p:sp>
+      <p:sp>
+        <p:nvSpPr>
+          <p:cNvPr id="6" name="Rectangle 5"/>
           <p:cNvSpPr/>
           <p:nvPr/>
         </p:nvSpPr>
         <p:spPr>
           <a:xfrm>
-            <a:off x="0" y="0"/>
-            <a:ext cx="12191695" cy="1051560"/>
+            <a:off x="365760" y="3246120"/>
+            <a:ext cx="8412480" cy="19050"/>
           </a:xfrm>
           <a:prstGeom prst="rect">
             <a:avLst/>
           </a:prstGeom>
           <a:solidFill>
-            <a:srgbClr val="0B2B4D"/>
+            <a:srgbClr val="BBE0E3"/>
           </a:solidFill>
           <a:ln>
             <a:noFill/>
@@ -6732,20 +6149,55 @@
       </p:sp>
       <p:sp>
         <p:nvSpPr>
-          <p:cNvPr id="3" name="Rectangle 2"/>
+          <p:cNvPr id="7" name="TextBox 6"/>
+          <p:cNvSpPr txBox="1"/>
+          <p:nvPr/>
+        </p:nvSpPr>
+        <p:spPr>
+          <a:xfrm>
+            <a:off x="365760" y="3383280"/>
+            <a:ext cx="3657600" cy="320040"/>
+          </a:xfrm>
+          <a:prstGeom prst="rect">
+            <a:avLst/>
+          </a:prstGeom>
+          <a:noFill/>
+        </p:spPr>
+        <p:txBody>
+          <a:bodyPr wrap="square">
+            <a:spAutoFit/>
+          </a:bodyPr>
+          <a:lstStyle/>
+          <a:p>
+            <a:pPr algn="l"/>
+            <a:r>
+              <a:rPr sz="1400" b="1">
+                <a:solidFill>
+                  <a:srgbClr val="006B6B"/>
+                </a:solidFill>
+                <a:latin typeface="微软雅黑"/>
+              </a:rPr>
+              <a:t>两大交易品种</a:t>
+            </a:r>
+          </a:p>
+        </p:txBody>
+      </p:sp>
+      <p:sp>
+        <p:nvSpPr>
+          <p:cNvPr id="8" name="Rectangle 7"/>
           <p:cNvSpPr/>
           <p:nvPr/>
         </p:nvSpPr>
         <p:spPr>
           <a:xfrm>
-            <a:off x="0" y="1051560"/>
-            <a:ext cx="12191695" cy="54864"/>
+            <a:off x="457200" y="3840480"/>
+            <a:ext cx="4023360" cy="1554480"/>
           </a:xfrm>
           <a:prstGeom prst="rect">
             <a:avLst/>
           </a:prstGeom>
           <a:solidFill>
-            <a:srgbClr val="E87A1E"/>
+            <a:srgbClr val="F8F8F8"/>
           </a:solidFill>
           <a:ln>
             <a:noFill/>
@@ -6776,224 +6228,20 @@
       </p:sp>
       <p:sp>
         <p:nvSpPr>
-          <p:cNvPr id="4" name="TextBox 3"/>
-          <p:cNvSpPr txBox="1"/>
-          <p:nvPr/>
-        </p:nvSpPr>
-        <p:spPr>
-          <a:xfrm>
-            <a:off x="548640" y="164592"/>
-            <a:ext cx="10058400" cy="548640"/>
-          </a:xfrm>
-          <a:prstGeom prst="rect">
-            <a:avLst/>
-          </a:prstGeom>
-          <a:noFill/>
-        </p:spPr>
-        <p:txBody>
-          <a:bodyPr wrap="square">
-            <a:spAutoFit/>
-          </a:bodyPr>
-          <a:lstStyle/>
-          <a:p>
-            <a:pPr algn="l"/>
-            <a:r>
-              <a:rPr sz="2800" b="1" i="0">
-                <a:solidFill>
-                  <a:srgbClr val="FFFFFF"/>
-                </a:solidFill>
-                <a:latin typeface="Microsoft YaHei"/>
-              </a:rPr>
-              <a:t>交易品种总览与核心公式</a:t>
-            </a:r>
-          </a:p>
-        </p:txBody>
-      </p:sp>
-      <p:sp>
-        <p:nvSpPr>
-          <p:cNvPr id="5" name="TextBox 4"/>
-          <p:cNvSpPr txBox="1"/>
-          <p:nvPr/>
-        </p:nvSpPr>
-        <p:spPr>
-          <a:xfrm>
-            <a:off x="548640" y="658368"/>
-            <a:ext cx="10058400" cy="365760"/>
-          </a:xfrm>
-          <a:prstGeom prst="rect">
-            <a:avLst/>
-          </a:prstGeom>
-          <a:noFill/>
-        </p:spPr>
-        <p:txBody>
-          <a:bodyPr wrap="square">
-            <a:spAutoFit/>
-          </a:bodyPr>
-          <a:lstStyle/>
-          <a:p>
-            <a:pPr algn="l"/>
-            <a:r>
-              <a:rPr sz="1300" b="0" i="0">
-                <a:solidFill>
-                  <a:srgbClr val="CFDDEC"/>
-                </a:solidFill>
-                <a:latin typeface="Microsoft YaHei"/>
-              </a:rPr>
-              <a:t>03 Overview &amp; Key Formulas</a:t>
-            </a:r>
-          </a:p>
-        </p:txBody>
-      </p:sp>
-      <p:sp>
-        <p:nvSpPr>
-          <p:cNvPr id="6" name="TextBox 5"/>
-          <p:cNvSpPr txBox="1"/>
-          <p:nvPr/>
-        </p:nvSpPr>
-        <p:spPr>
-          <a:xfrm>
-            <a:off x="548640" y="1280160"/>
-            <a:ext cx="5486400" cy="365760"/>
-          </a:xfrm>
-          <a:prstGeom prst="rect">
-            <a:avLst/>
-          </a:prstGeom>
-          <a:noFill/>
-        </p:spPr>
-        <p:txBody>
-          <a:bodyPr wrap="square">
-            <a:spAutoFit/>
-          </a:bodyPr>
-          <a:lstStyle/>
-          <a:p>
-            <a:pPr algn="l"/>
-            <a:r>
-              <a:rPr sz="1600" b="1" i="0">
-                <a:solidFill>
-                  <a:srgbClr val="0B2B4D"/>
-                </a:solidFill>
-                <a:latin typeface="Microsoft YaHei"/>
-              </a:rPr>
-              <a:t>核心持仓公式</a:t>
-            </a:r>
-          </a:p>
-        </p:txBody>
-      </p:sp>
-      <p:sp>
-        <p:nvSpPr>
-          <p:cNvPr id="7" name="TextBox 6"/>
-          <p:cNvSpPr txBox="1"/>
-          <p:nvPr/>
-        </p:nvSpPr>
-        <p:spPr>
-          <a:xfrm>
-            <a:off x="548640" y="1645920"/>
-            <a:ext cx="11064240" cy="2194560"/>
-          </a:xfrm>
-          <a:prstGeom prst="rect">
-            <a:avLst/>
-          </a:prstGeom>
-          <a:noFill/>
-        </p:spPr>
-        <p:txBody>
-          <a:bodyPr wrap="square">
-            <a:spAutoFit/>
-          </a:bodyPr>
-          <a:lstStyle/>
-          <a:p>
-            <a:pPr>
-              <a:lnSpc>
-                <a:spcPct val="115000"/>
-              </a:lnSpc>
-              <a:spcAft>
-                <a:spcPts val="600"/>
-              </a:spcAft>
-            </a:pPr>
-            <a:r>
-              <a:rPr sz="1350" b="1">
-                <a:solidFill>
-                  <a:srgbClr val="0B2B4D"/>
-                </a:solidFill>
-                <a:latin typeface="Microsoft YaHei"/>
-              </a:rPr>
-              <a:t>• 月度中长期持仓量 = 年度长协(分解到月) + 月度竞价 + 月内多日直接交易 + 合同电量转让 + 绿色电力交易</a:t>
-            </a:r>
-          </a:p>
-          <a:p>
-            <a:pPr>
-              <a:lnSpc>
-                <a:spcPct val="115000"/>
-              </a:lnSpc>
-              <a:spcAft>
-                <a:spcPts val="600"/>
-              </a:spcAft>
-            </a:pPr>
-            <a:r>
-              <a:rPr sz="1350" b="1">
-                <a:solidFill>
-                  <a:srgbClr val="0B2B4D"/>
-                </a:solidFill>
-                <a:latin typeface="Microsoft YaHei"/>
-              </a:rPr>
-              <a:t>• 总电量(批发侧) = 月度中长期持仓量 + 日前偏差电量 + 实时偏差电量</a:t>
-            </a:r>
-          </a:p>
-          <a:p>
-            <a:pPr>
-              <a:lnSpc>
-                <a:spcPct val="115000"/>
-              </a:lnSpc>
-              <a:spcAft>
-                <a:spcPts val="600"/>
-              </a:spcAft>
-            </a:pPr>
-            <a:r>
-              <a:rPr sz="1350" b="1">
-                <a:solidFill>
-                  <a:srgbClr val="0B2B4D"/>
-                </a:solidFill>
-                <a:latin typeface="Microsoft YaHei"/>
-              </a:rPr>
-              <a:t>• 总电量(代理用户侧) = 代理所有零售用户月度实际用网电量之和</a:t>
-            </a:r>
-          </a:p>
-          <a:p>
-            <a:pPr>
-              <a:lnSpc>
-                <a:spcPct val="115000"/>
-              </a:lnSpc>
-              <a:spcAft>
-                <a:spcPts val="600"/>
-              </a:spcAft>
-            </a:pPr>
-            <a:r>
-              <a:rPr sz="1350" b="1">
-                <a:solidFill>
-                  <a:srgbClr val="0B2B4D"/>
-                </a:solidFill>
-                <a:latin typeface="Microsoft YaHei"/>
-              </a:rPr>
-              <a:t>• 正常情况下：批发侧口径 = 代理用户侧口径（特殊计量/非市场化情形除外，暂不考虑）</a:t>
-            </a:r>
-          </a:p>
-        </p:txBody>
-      </p:sp>
-      <p:sp>
-        <p:nvSpPr>
-          <p:cNvPr id="8" name="Rectangle 7"/>
+          <p:cNvPr id="9" name="Rectangle 8"/>
           <p:cNvSpPr/>
           <p:nvPr/>
         </p:nvSpPr>
         <p:spPr>
           <a:xfrm>
-            <a:off x="548640" y="3977639"/>
-            <a:ext cx="11064240" cy="45720"/>
+            <a:off x="457200" y="3840480"/>
+            <a:ext cx="4023360" cy="38100"/>
           </a:xfrm>
           <a:prstGeom prst="rect">
             <a:avLst/>
           </a:prstGeom>
           <a:solidFill>
-            <a:srgbClr val="E87A1E"/>
+            <a:srgbClr val="008080"/>
           </a:solidFill>
           <a:ln>
             <a:noFill/>
@@ -7024,14 +6272,14 @@
       </p:sp>
       <p:sp>
         <p:nvSpPr>
-          <p:cNvPr id="9" name="TextBox 8"/>
+          <p:cNvPr id="10" name="TextBox 9"/>
           <p:cNvSpPr txBox="1"/>
           <p:nvPr/>
         </p:nvSpPr>
         <p:spPr>
           <a:xfrm>
-            <a:off x="548640" y="4114800"/>
-            <a:ext cx="5486400" cy="365760"/>
+            <a:off x="685800" y="4023360"/>
+            <a:ext cx="3566160" cy="457200"/>
           </a:xfrm>
           <a:prstGeom prst="rect">
             <a:avLst/>
@@ -7046,33 +6294,68 @@
           <a:p>
             <a:pPr algn="l"/>
             <a:r>
-              <a:rPr sz="1600" b="1" i="0">
-                <a:solidFill>
-                  <a:srgbClr val="0B2B4D"/>
-                </a:solidFill>
-                <a:latin typeface="Microsoft YaHei"/>
-              </a:rPr>
-              <a:t>两大交易品种</a:t>
-            </a:r>
-          </a:p>
-        </p:txBody>
-      </p:sp>
-      <p:sp>
-        <p:nvSpPr>
-          <p:cNvPr id="10" name="Rectangle 9"/>
+              <a:rPr sz="1500" b="1">
+                <a:solidFill>
+                  <a:srgbClr val="006B6B"/>
+                </a:solidFill>
+                <a:latin typeface="微软雅黑"/>
+              </a:rPr>
+              <a:t>多日用电合同电量转让交易</a:t>
+            </a:r>
+          </a:p>
+        </p:txBody>
+      </p:sp>
+      <p:sp>
+        <p:nvSpPr>
+          <p:cNvPr id="11" name="TextBox 10"/>
+          <p:cNvSpPr txBox="1"/>
+          <p:nvPr/>
+        </p:nvSpPr>
+        <p:spPr>
+          <a:xfrm>
+            <a:off x="685800" y="4572000"/>
+            <a:ext cx="3566160" cy="548640"/>
+          </a:xfrm>
+          <a:prstGeom prst="rect">
+            <a:avLst/>
+          </a:prstGeom>
+          <a:noFill/>
+        </p:spPr>
+        <p:txBody>
+          <a:bodyPr wrap="square">
+            <a:spAutoFit/>
+          </a:bodyPr>
+          <a:lstStyle/>
+          <a:p>
+            <a:pPr algn="l"/>
+            <a:r>
+              <a:rPr sz="1250" b="0">
+                <a:solidFill>
+                  <a:srgbClr val="595F66"/>
+                </a:solidFill>
+                <a:latin typeface="微软雅黑"/>
+              </a:rPr>
+              <a:t>申报时段：上午 09:00–11:30</a:t>
+            </a:r>
+          </a:p>
+        </p:txBody>
+      </p:sp>
+      <p:sp>
+        <p:nvSpPr>
+          <p:cNvPr id="12" name="Rectangle 11"/>
           <p:cNvSpPr/>
           <p:nvPr/>
         </p:nvSpPr>
         <p:spPr>
           <a:xfrm>
-            <a:off x="548640" y="4572000"/>
-            <a:ext cx="5440680" cy="1463040"/>
+            <a:off x="4663440" y="3840480"/>
+            <a:ext cx="4023360" cy="1554480"/>
           </a:xfrm>
           <a:prstGeom prst="rect">
             <a:avLst/>
           </a:prstGeom>
           <a:solidFill>
-            <a:srgbClr val="F2F6FA"/>
+            <a:srgbClr val="F8F8F8"/>
           </a:solidFill>
           <a:ln>
             <a:noFill/>
@@ -7103,20 +6386,20 @@
       </p:sp>
       <p:sp>
         <p:nvSpPr>
-          <p:cNvPr id="11" name="Rectangle 10"/>
+          <p:cNvPr id="13" name="Rectangle 12"/>
           <p:cNvSpPr/>
           <p:nvPr/>
         </p:nvSpPr>
         <p:spPr>
           <a:xfrm>
-            <a:off x="548640" y="4572000"/>
-            <a:ext cx="5440680" cy="73152"/>
+            <a:off x="4663440" y="3840480"/>
+            <a:ext cx="4023360" cy="38100"/>
           </a:xfrm>
           <a:prstGeom prst="rect">
             <a:avLst/>
           </a:prstGeom>
           <a:solidFill>
-            <a:srgbClr val="1F6FC0"/>
+            <a:srgbClr val="008080"/>
           </a:solidFill>
           <a:ln>
             <a:noFill/>
@@ -7147,14 +6430,14 @@
       </p:sp>
       <p:sp>
         <p:nvSpPr>
-          <p:cNvPr id="12" name="TextBox 11"/>
+          <p:cNvPr id="14" name="TextBox 13"/>
           <p:cNvSpPr txBox="1"/>
           <p:nvPr/>
         </p:nvSpPr>
         <p:spPr>
           <a:xfrm>
-            <a:off x="822960" y="4754880"/>
-            <a:ext cx="4937760" cy="457200"/>
+            <a:off x="4892040" y="4023360"/>
+            <a:ext cx="3566160" cy="457200"/>
           </a:xfrm>
           <a:prstGeom prst="rect">
             <a:avLst/>
@@ -7169,27 +6452,27 @@
           <a:p>
             <a:pPr algn="l"/>
             <a:r>
-              <a:rPr sz="1700" b="1" i="0">
-                <a:solidFill>
-                  <a:srgbClr val="0B2B4D"/>
-                </a:solidFill>
-                <a:latin typeface="Microsoft YaHei"/>
-              </a:rPr>
-              <a:t>多日用电合同电量转让交易</a:t>
-            </a:r>
-          </a:p>
-        </p:txBody>
-      </p:sp>
-      <p:sp>
-        <p:nvSpPr>
-          <p:cNvPr id="13" name="TextBox 12"/>
+              <a:rPr sz="1500" b="1">
+                <a:solidFill>
+                  <a:srgbClr val="006B6B"/>
+                </a:solidFill>
+                <a:latin typeface="微软雅黑"/>
+              </a:rPr>
+              <a:t>多日直接交易</a:t>
+            </a:r>
+          </a:p>
+        </p:txBody>
+      </p:sp>
+      <p:sp>
+        <p:nvSpPr>
+          <p:cNvPr id="15" name="TextBox 14"/>
           <p:cNvSpPr txBox="1"/>
           <p:nvPr/>
         </p:nvSpPr>
         <p:spPr>
           <a:xfrm>
-            <a:off x="822960" y="5257800"/>
-            <a:ext cx="4937760" cy="548640"/>
+            <a:off x="4892040" y="4572000"/>
+            <a:ext cx="3566160" cy="548640"/>
           </a:xfrm>
           <a:prstGeom prst="rect">
             <a:avLst/>
@@ -7204,102 +6487,14 @@
           <a:p>
             <a:pPr algn="l"/>
             <a:r>
-              <a:rPr sz="1400" b="0" i="0">
+              <a:rPr sz="1250" b="0">
                 <a:solidFill>
                   <a:srgbClr val="595F66"/>
                 </a:solidFill>
-                <a:latin typeface="Microsoft YaHei"/>
-              </a:rPr>
-              <a:t>申报时段：上午 09:00–11:30</a:t>
-            </a:r>
-          </a:p>
-        </p:txBody>
-      </p:sp>
-      <p:sp>
-        <p:nvSpPr>
-          <p:cNvPr id="14" name="Rectangle 13"/>
-          <p:cNvSpPr/>
-          <p:nvPr/>
-        </p:nvSpPr>
-        <p:spPr>
-          <a:xfrm>
-            <a:off x="6217920" y="4572000"/>
-            <a:ext cx="5440680" cy="1463040"/>
-          </a:xfrm>
-          <a:prstGeom prst="rect">
-            <a:avLst/>
-          </a:prstGeom>
-          <a:solidFill>
-            <a:srgbClr val="F2F6FA"/>
-          </a:solidFill>
-          <a:ln>
-            <a:noFill/>
-          </a:ln>
-          <a:effectLst/>
-        </p:spPr>
-        <p:style>
-          <a:lnRef idx="1">
-            <a:schemeClr val="accent1"/>
-          </a:lnRef>
-          <a:fillRef idx="3">
-            <a:schemeClr val="accent1"/>
-          </a:fillRef>
-          <a:effectRef idx="2">
-            <a:schemeClr val="accent1"/>
-          </a:effectRef>
-          <a:fontRef idx="minor">
-            <a:schemeClr val="lt1"/>
-          </a:fontRef>
-        </p:style>
-        <p:txBody>
-          <a:bodyPr rtlCol="0" anchor="ctr"/>
-          <a:lstStyle/>
-          <a:p>
-            <a:pPr algn="ctr"/>
-          </a:p>
-        </p:txBody>
-      </p:sp>
-      <p:sp>
-        <p:nvSpPr>
-          <p:cNvPr id="15" name="Rectangle 14"/>
-          <p:cNvSpPr/>
-          <p:nvPr/>
-        </p:nvSpPr>
-        <p:spPr>
-          <a:xfrm>
-            <a:off x="6217920" y="4572000"/>
-            <a:ext cx="5440680" cy="73152"/>
-          </a:xfrm>
-          <a:prstGeom prst="rect">
-            <a:avLst/>
-          </a:prstGeom>
-          <a:solidFill>
-            <a:srgbClr val="E87A1E"/>
-          </a:solidFill>
-          <a:ln>
-            <a:noFill/>
-          </a:ln>
-          <a:effectLst/>
-        </p:spPr>
-        <p:style>
-          <a:lnRef idx="1">
-            <a:schemeClr val="accent1"/>
-          </a:lnRef>
-          <a:fillRef idx="3">
-            <a:schemeClr val="accent1"/>
-          </a:fillRef>
-          <a:effectRef idx="2">
-            <a:schemeClr val="accent1"/>
-          </a:effectRef>
-          <a:fontRef idx="minor">
-            <a:schemeClr val="lt1"/>
-          </a:fontRef>
-        </p:style>
-        <p:txBody>
-          <a:bodyPr rtlCol="0" anchor="ctr"/>
-          <a:lstStyle/>
-          <a:p>
-            <a:pPr algn="ctr"/>
+                <a:latin typeface="微软雅黑"/>
+              </a:rPr>
+              <a:t>申报时段：下午 16:00–17:30</a:t>
+            </a:r>
           </a:p>
         </p:txBody>
       </p:sp>
@@ -7311,8 +6506,8 @@
         </p:nvSpPr>
         <p:spPr>
           <a:xfrm>
-            <a:off x="6492240" y="4754880"/>
-            <a:ext cx="4937760" cy="457200"/>
+            <a:off x="8641080" y="6537960"/>
+            <a:ext cx="365760" cy="274320"/>
           </a:xfrm>
           <a:prstGeom prst="rect">
             <a:avLst/>
@@ -7325,164 +6520,15 @@
           </a:bodyPr>
           <a:lstStyle/>
           <a:p>
-            <a:pPr algn="l"/>
-            <a:r>
-              <a:rPr sz="1700" b="1" i="0">
-                <a:solidFill>
-                  <a:srgbClr val="0B2B4D"/>
-                </a:solidFill>
-                <a:latin typeface="Microsoft YaHei"/>
-              </a:rPr>
-              <a:t>多日直接交易</a:t>
-            </a:r>
-          </a:p>
-        </p:txBody>
-      </p:sp>
-      <p:sp>
-        <p:nvSpPr>
-          <p:cNvPr id="17" name="TextBox 16"/>
-          <p:cNvSpPr txBox="1"/>
-          <p:nvPr/>
-        </p:nvSpPr>
-        <p:spPr>
-          <a:xfrm>
-            <a:off x="6492240" y="5257800"/>
-            <a:ext cx="4937760" cy="548640"/>
-          </a:xfrm>
-          <a:prstGeom prst="rect">
-            <a:avLst/>
-          </a:prstGeom>
-          <a:noFill/>
-        </p:spPr>
-        <p:txBody>
-          <a:bodyPr wrap="square">
-            <a:spAutoFit/>
-          </a:bodyPr>
-          <a:lstStyle/>
-          <a:p>
-            <a:pPr algn="l"/>
-            <a:r>
-              <a:rPr sz="1400" b="0" i="0">
+            <a:pPr algn="r"/>
+            <a:r>
+              <a:rPr sz="1100" b="0">
                 <a:solidFill>
                   <a:srgbClr val="595F66"/>
                 </a:solidFill>
-                <a:latin typeface="Microsoft YaHei"/>
-              </a:rPr>
-              <a:t>申报时段：下午 16:00–17:30</a:t>
-            </a:r>
-          </a:p>
-        </p:txBody>
-      </p:sp>
-      <p:sp>
-        <p:nvSpPr>
-          <p:cNvPr id="18" name="Rectangle 17"/>
-          <p:cNvSpPr/>
-          <p:nvPr/>
-        </p:nvSpPr>
-        <p:spPr>
-          <a:xfrm>
-            <a:off x="0" y="6565392"/>
-            <a:ext cx="12191695" cy="292608"/>
-          </a:xfrm>
-          <a:prstGeom prst="rect">
-            <a:avLst/>
-          </a:prstGeom>
-          <a:solidFill>
-            <a:srgbClr val="0B2B4D"/>
-          </a:solidFill>
-          <a:ln>
-            <a:noFill/>
-          </a:ln>
-          <a:effectLst/>
-        </p:spPr>
-        <p:style>
-          <a:lnRef idx="1">
-            <a:schemeClr val="accent1"/>
-          </a:lnRef>
-          <a:fillRef idx="3">
-            <a:schemeClr val="accent1"/>
-          </a:fillRef>
-          <a:effectRef idx="2">
-            <a:schemeClr val="accent1"/>
-          </a:effectRef>
-          <a:fontRef idx="minor">
-            <a:schemeClr val="lt1"/>
-          </a:fontRef>
-        </p:style>
-        <p:txBody>
-          <a:bodyPr rtlCol="0" anchor="ctr"/>
-          <a:lstStyle/>
-          <a:p>
-            <a:pPr algn="ctr"/>
-          </a:p>
-        </p:txBody>
-      </p:sp>
-      <p:sp>
-        <p:nvSpPr>
-          <p:cNvPr id="19" name="TextBox 18"/>
-          <p:cNvSpPr txBox="1"/>
-          <p:nvPr/>
-        </p:nvSpPr>
-        <p:spPr>
-          <a:xfrm>
-            <a:off x="365760" y="6547104"/>
-            <a:ext cx="5486400" cy="274320"/>
-          </a:xfrm>
-          <a:prstGeom prst="rect">
-            <a:avLst/>
-          </a:prstGeom>
-          <a:noFill/>
-        </p:spPr>
-        <p:txBody>
-          <a:bodyPr wrap="square">
-            <a:spAutoFit/>
-          </a:bodyPr>
-          <a:lstStyle/>
-          <a:p>
-            <a:pPr algn="l"/>
-            <a:r>
-              <a:rPr sz="1000" b="0" i="0">
-                <a:solidFill>
-                  <a:srgbClr val="FFFFFF"/>
-                </a:solidFill>
-                <a:latin typeface="Microsoft YaHei"/>
-              </a:rPr>
-              <a:t>中长期交易基本说明与业务逻辑</a:t>
-            </a:r>
-          </a:p>
-        </p:txBody>
-      </p:sp>
-      <p:sp>
-        <p:nvSpPr>
-          <p:cNvPr id="20" name="TextBox 19"/>
-          <p:cNvSpPr txBox="1"/>
-          <p:nvPr/>
-        </p:nvSpPr>
-        <p:spPr>
-          <a:xfrm>
-            <a:off x="11094415" y="6547104"/>
-            <a:ext cx="731520" cy="274320"/>
-          </a:xfrm>
-          <a:prstGeom prst="rect">
-            <a:avLst/>
-          </a:prstGeom>
-          <a:noFill/>
-        </p:spPr>
-        <p:txBody>
-          <a:bodyPr wrap="square">
-            <a:spAutoFit/>
-          </a:bodyPr>
-          <a:lstStyle/>
-          <a:p>
-            <a:pPr algn="r"/>
-            <a:r>
-              <a:rPr sz="1000" b="0" i="0">
-                <a:solidFill>
-                  <a:srgbClr val="FFFFFF"/>
-                </a:solidFill>
-                <a:latin typeface="Microsoft YaHei"/>
-              </a:rPr>
-              <a:t>05 / 10</a:t>
+                <a:latin typeface="微软雅黑"/>
+              </a:rPr>
+              <a:t>5</a:t>
             </a:r>
           </a:p>
         </p:txBody>
@@ -7513,22 +6559,294 @@
         <p:nvPr/>
       </p:nvGrpSpPr>
       <p:grpSpPr/>
-      <p:sp>
-        <p:nvSpPr>
-          <p:cNvPr id="2" name="Rectangle 1"/>
+      <p:pic>
+        <p:nvPicPr>
+          <p:cNvPr id="2" name="Picture 1" descr="banner.png"/>
+          <p:cNvPicPr>
+            <a:picLocks noChangeAspect="1"/>
+          </p:cNvPicPr>
+          <p:nvPr/>
+        </p:nvPicPr>
+        <p:blipFill>
+          <a:blip r:embed="rId2"/>
+          <a:stretch>
+            <a:fillRect/>
+          </a:stretch>
+        </p:blipFill>
+        <p:spPr>
+          <a:xfrm>
+            <a:off x="0" y="0"/>
+            <a:ext cx="9144000" cy="832104"/>
+          </a:xfrm>
+          <a:prstGeom prst="rect">
+            <a:avLst/>
+          </a:prstGeom>
+        </p:spPr>
+      </p:pic>
+      <p:sp>
+        <p:nvSpPr>
+          <p:cNvPr id="3" name="TextBox 2"/>
+          <p:cNvSpPr txBox="1"/>
+          <p:nvPr/>
+        </p:nvSpPr>
+        <p:spPr>
+          <a:xfrm>
+            <a:off x="320040" y="109728"/>
+            <a:ext cx="7315200" cy="640080"/>
+          </a:xfrm>
+          <a:prstGeom prst="rect">
+            <a:avLst/>
+          </a:prstGeom>
+          <a:noFill/>
+        </p:spPr>
+        <p:txBody>
+          <a:bodyPr wrap="square">
+            <a:spAutoFit/>
+          </a:bodyPr>
+          <a:lstStyle/>
+          <a:p>
+            <a:pPr algn="l"/>
+            <a:r>
+              <a:rPr sz="1800" b="1">
+                <a:solidFill>
+                  <a:srgbClr val="008080"/>
+                </a:solidFill>
+                <a:latin typeface="微软雅黑"/>
+              </a:rPr>
+              <a:t>多日用电合同电量转让交易（上午）— 规则</a:t>
+            </a:r>
+          </a:p>
+        </p:txBody>
+      </p:sp>
+      <p:sp>
+        <p:nvSpPr>
+          <p:cNvPr id="4" name="TextBox 3"/>
+          <p:cNvSpPr txBox="1"/>
+          <p:nvPr/>
+        </p:nvSpPr>
+        <p:spPr>
+          <a:xfrm>
+            <a:off x="365760" y="960120"/>
+            <a:ext cx="4389120" cy="5303520"/>
+          </a:xfrm>
+          <a:prstGeom prst="rect">
+            <a:avLst/>
+          </a:prstGeom>
+          <a:noFill/>
+        </p:spPr>
+        <p:txBody>
+          <a:bodyPr wrap="square">
+            <a:spAutoFit/>
+          </a:bodyPr>
+          <a:lstStyle/>
+          <a:p>
+            <a:pPr>
+              <a:lnSpc>
+                <a:spcPct val="115000"/>
+              </a:lnSpc>
+              <a:spcAft>
+                <a:spcPts val="500"/>
+              </a:spcAft>
+            </a:pPr>
+            <a:r>
+              <a:rPr sz="1150" b="1">
+                <a:solidFill>
+                  <a:srgbClr val="006B6B"/>
+                </a:solidFill>
+                <a:latin typeface="微软雅黑"/>
+              </a:rPr>
+              <a:t>• 政策依据</a:t>
+            </a:r>
+          </a:p>
+          <a:p>
+            <a:pPr lvl="1">
+              <a:lnSpc>
+                <a:spcPct val="115000"/>
+              </a:lnSpc>
+              <a:spcAft>
+                <a:spcPts val="500"/>
+              </a:spcAft>
+            </a:pPr>
+            <a:r>
+              <a:rPr sz="1000" b="0">
+                <a:solidFill>
+                  <a:srgbClr val="595F66"/>
+                </a:solidFill>
+                <a:latin typeface="微软雅黑"/>
+              </a:rPr>
+              <a:t>- 《广西电力中长期交易规则》《2026年广西电力市场化交易工作有关事项的通知》</a:t>
+            </a:r>
+          </a:p>
+          <a:p>
+            <a:pPr lvl="1">
+              <a:lnSpc>
+                <a:spcPct val="115000"/>
+              </a:lnSpc>
+              <a:spcAft>
+                <a:spcPts val="500"/>
+              </a:spcAft>
+            </a:pPr>
+            <a:r>
+              <a:rPr sz="1000" b="0">
+                <a:solidFill>
+                  <a:srgbClr val="595F66"/>
+                </a:solidFill>
+                <a:latin typeface="微软雅黑"/>
+              </a:rPr>
+              <a:t>- 标的物为当月内未履约的年度直接交易合同电量</a:t>
+            </a:r>
+          </a:p>
+          <a:p>
+            <a:pPr>
+              <a:lnSpc>
+                <a:spcPct val="115000"/>
+              </a:lnSpc>
+              <a:spcAft>
+                <a:spcPts val="500"/>
+              </a:spcAft>
+            </a:pPr>
+            <a:r>
+              <a:rPr sz="1150" b="1">
+                <a:solidFill>
+                  <a:srgbClr val="006B6B"/>
+                </a:solidFill>
+                <a:latin typeface="微软雅黑"/>
+              </a:rPr>
+              <a:t>• 交易目标</a:t>
+            </a:r>
+          </a:p>
+          <a:p>
+            <a:pPr lvl="1">
+              <a:lnSpc>
+                <a:spcPct val="115000"/>
+              </a:lnSpc>
+              <a:spcAft>
+                <a:spcPts val="500"/>
+              </a:spcAft>
+            </a:pPr>
+            <a:r>
+              <a:rPr sz="1000" b="0">
+                <a:solidFill>
+                  <a:srgbClr val="595F66"/>
+                </a:solidFill>
+                <a:latin typeface="微软雅黑"/>
+              </a:rPr>
+              <a:t>- 2–3天短周期，匹配短期负荷波动、降低偏差风险</a:t>
+            </a:r>
+          </a:p>
+          <a:p>
+            <a:pPr lvl="1">
+              <a:lnSpc>
+                <a:spcPct val="115000"/>
+              </a:lnSpc>
+              <a:spcAft>
+                <a:spcPts val="500"/>
+              </a:spcAft>
+            </a:pPr>
+            <a:r>
+              <a:rPr sz="1000" b="0">
+                <a:solidFill>
+                  <a:srgbClr val="595F66"/>
+                </a:solidFill>
+                <a:latin typeface="微软雅黑"/>
+              </a:rPr>
+              <a:t>- 滚动衔接，确保全月有可交易标的</a:t>
+            </a:r>
+          </a:p>
+          <a:p>
+            <a:pPr>
+              <a:lnSpc>
+                <a:spcPct val="115000"/>
+              </a:lnSpc>
+              <a:spcAft>
+                <a:spcPts val="500"/>
+              </a:spcAft>
+            </a:pPr>
+            <a:r>
+              <a:rPr sz="1150" b="1">
+                <a:solidFill>
+                  <a:srgbClr val="006B6B"/>
+                </a:solidFill>
+                <a:latin typeface="微软雅黑"/>
+              </a:rPr>
+              <a:t>• 交易时序</a:t>
+            </a:r>
+          </a:p>
+          <a:p>
+            <a:pPr lvl="1">
+              <a:lnSpc>
+                <a:spcPct val="115000"/>
+              </a:lnSpc>
+              <a:spcAft>
+                <a:spcPts val="500"/>
+              </a:spcAft>
+            </a:pPr>
+            <a:r>
+              <a:rPr sz="1000" b="0">
+                <a:solidFill>
+                  <a:srgbClr val="595F66"/>
+                </a:solidFill>
+                <a:latin typeface="微软雅黑"/>
+              </a:rPr>
+              <a:t>- 09:00–09:20 集中竞价（自由报价，可改可撤）</a:t>
+            </a:r>
+          </a:p>
+          <a:p>
+            <a:pPr lvl="1">
+              <a:lnSpc>
+                <a:spcPct val="115000"/>
+              </a:lnSpc>
+              <a:spcAft>
+                <a:spcPts val="500"/>
+              </a:spcAft>
+            </a:pPr>
+            <a:r>
+              <a:rPr sz="1000" b="0">
+                <a:solidFill>
+                  <a:srgbClr val="595F66"/>
+                </a:solidFill>
+                <a:latin typeface="微软雅黑"/>
+              </a:rPr>
+              <a:t>- 09:20–09:30 静默固化、集中统一边际出清</a:t>
+            </a:r>
+          </a:p>
+          <a:p>
+            <a:pPr lvl="1">
+              <a:lnSpc>
+                <a:spcPct val="115000"/>
+              </a:lnSpc>
+              <a:spcAft>
+                <a:spcPts val="500"/>
+              </a:spcAft>
+            </a:pPr>
+            <a:r>
+              <a:rPr sz="1000" b="0">
+                <a:solidFill>
+                  <a:srgbClr val="595F66"/>
+                </a:solidFill>
+                <a:latin typeface="微软雅黑"/>
+              </a:rPr>
+              <a:t>- 09:30 公布出清结果；09:30–11:30 滚动撮合</a:t>
+            </a:r>
+          </a:p>
+        </p:txBody>
+      </p:sp>
+      <p:sp>
+        <p:nvSpPr>
+          <p:cNvPr id="5" name="Rectangle 4"/>
           <p:cNvSpPr/>
           <p:nvPr/>
         </p:nvSpPr>
         <p:spPr>
           <a:xfrm>
-            <a:off x="0" y="0"/>
-            <a:ext cx="12191695" cy="1051560"/>
+            <a:off x="4937760" y="960120"/>
+            <a:ext cx="3840480" cy="5349240"/>
           </a:xfrm>
           <a:prstGeom prst="rect">
             <a:avLst/>
           </a:prstGeom>
           <a:solidFill>
-            <a:srgbClr val="0B2B4D"/>
+            <a:srgbClr val="F8F8F8"/>
           </a:solidFill>
           <a:ln>
             <a:noFill/>
@@ -7559,58 +6877,14 @@
       </p:sp>
       <p:sp>
         <p:nvSpPr>
-          <p:cNvPr id="3" name="Rectangle 2"/>
-          <p:cNvSpPr/>
-          <p:nvPr/>
-        </p:nvSpPr>
-        <p:spPr>
-          <a:xfrm>
-            <a:off x="0" y="1051560"/>
-            <a:ext cx="12191695" cy="54864"/>
-          </a:xfrm>
-          <a:prstGeom prst="rect">
-            <a:avLst/>
-          </a:prstGeom>
-          <a:solidFill>
-            <a:srgbClr val="E87A1E"/>
-          </a:solidFill>
-          <a:ln>
-            <a:noFill/>
-          </a:ln>
-          <a:effectLst/>
-        </p:spPr>
-        <p:style>
-          <a:lnRef idx="1">
-            <a:schemeClr val="accent1"/>
-          </a:lnRef>
-          <a:fillRef idx="3">
-            <a:schemeClr val="accent1"/>
-          </a:fillRef>
-          <a:effectRef idx="2">
-            <a:schemeClr val="accent1"/>
-          </a:effectRef>
-          <a:fontRef idx="minor">
-            <a:schemeClr val="lt1"/>
-          </a:fontRef>
-        </p:style>
-        <p:txBody>
-          <a:bodyPr rtlCol="0" anchor="ctr"/>
-          <a:lstStyle/>
-          <a:p>
-            <a:pPr algn="ctr"/>
-          </a:p>
-        </p:txBody>
-      </p:sp>
-      <p:sp>
-        <p:nvSpPr>
-          <p:cNvPr id="4" name="TextBox 3"/>
+          <p:cNvPr id="6" name="TextBox 5"/>
           <p:cNvSpPr txBox="1"/>
           <p:nvPr/>
         </p:nvSpPr>
         <p:spPr>
           <a:xfrm>
-            <a:off x="548640" y="164592"/>
-            <a:ext cx="10058400" cy="548640"/>
+            <a:off x="5120640" y="1097280"/>
+            <a:ext cx="3474720" cy="320040"/>
           </a:xfrm>
           <a:prstGeom prst="rect">
             <a:avLst/>
@@ -7625,62 +6899,27 @@
           <a:p>
             <a:pPr algn="l"/>
             <a:r>
-              <a:rPr sz="2800" b="1" i="0">
-                <a:solidFill>
-                  <a:srgbClr val="FFFFFF"/>
-                </a:solidFill>
-                <a:latin typeface="Microsoft YaHei"/>
-              </a:rPr>
-              <a:t>多日用电合同电量转让交易（上午） — 规则</a:t>
-            </a:r>
-          </a:p>
-        </p:txBody>
-      </p:sp>
-      <p:sp>
-        <p:nvSpPr>
-          <p:cNvPr id="5" name="TextBox 4"/>
+              <a:rPr sz="1300" b="1">
+                <a:solidFill>
+                  <a:srgbClr val="006B6B"/>
+                </a:solidFill>
+                <a:latin typeface="微软雅黑"/>
+              </a:rPr>
+              <a:t>特殊规则约束</a:t>
+            </a:r>
+          </a:p>
+        </p:txBody>
+      </p:sp>
+      <p:sp>
+        <p:nvSpPr>
+          <p:cNvPr id="7" name="TextBox 6"/>
           <p:cNvSpPr txBox="1"/>
           <p:nvPr/>
         </p:nvSpPr>
         <p:spPr>
           <a:xfrm>
-            <a:off x="548640" y="658368"/>
-            <a:ext cx="10058400" cy="365760"/>
-          </a:xfrm>
-          <a:prstGeom prst="rect">
-            <a:avLst/>
-          </a:prstGeom>
-          <a:noFill/>
-        </p:spPr>
-        <p:txBody>
-          <a:bodyPr wrap="square">
-            <a:spAutoFit/>
-          </a:bodyPr>
-          <a:lstStyle/>
-          <a:p>
-            <a:pPr algn="l"/>
-            <a:r>
-              <a:rPr sz="1300" b="0" i="0">
-                <a:solidFill>
-                  <a:srgbClr val="CFDDEC"/>
-                </a:solidFill>
-                <a:latin typeface="Microsoft YaHei"/>
-              </a:rPr>
-              <a:t>04 Rules</a:t>
-            </a:r>
-          </a:p>
-        </p:txBody>
-      </p:sp>
-      <p:sp>
-        <p:nvSpPr>
-          <p:cNvPr id="6" name="TextBox 5"/>
-          <p:cNvSpPr txBox="1"/>
-          <p:nvPr/>
-        </p:nvSpPr>
-        <p:spPr>
-          <a:xfrm>
-            <a:off x="548640" y="1325880"/>
-            <a:ext cx="5852160" cy="5120640"/>
+            <a:off x="5120640" y="1463040"/>
+            <a:ext cx="3520440" cy="4754880"/>
           </a:xfrm>
           <a:prstGeom prst="rect">
             <a:avLst/>
@@ -7698,17 +6937,55 @@
                 <a:spcPct val="115000"/>
               </a:lnSpc>
               <a:spcAft>
-                <a:spcPts val="600"/>
+                <a:spcPts val="500"/>
               </a:spcAft>
             </a:pPr>
             <a:r>
-              <a:rPr sz="1350" b="1">
-                <a:solidFill>
-                  <a:srgbClr val="0B2B4D"/>
-                </a:solidFill>
-                <a:latin typeface="Microsoft YaHei"/>
-              </a:rPr>
-              <a:t>• 政策依据</a:t>
+              <a:rPr sz="1080" b="1">
+                <a:solidFill>
+                  <a:srgbClr val="006B6B"/>
+                </a:solidFill>
+                <a:latin typeface="微软雅黑"/>
+              </a:rPr>
+              <a:t>• 触发：月度签约持仓量(考核部分) &lt; 实际用电量×50%</a:t>
+            </a:r>
+          </a:p>
+          <a:p>
+            <a:pPr>
+              <a:lnSpc>
+                <a:spcPct val="115000"/>
+              </a:lnSpc>
+              <a:spcAft>
+                <a:spcPts val="500"/>
+              </a:spcAft>
+            </a:pPr>
+            <a:r>
+              <a:rPr sz="1080" b="1">
+                <a:solidFill>
+                  <a:srgbClr val="006B6B"/>
+                </a:solidFill>
+                <a:latin typeface="微软雅黑"/>
+              </a:rPr>
+              <a:t>• 考核电量 = 实际用电量×50% − 持仓量(考核部分)</a:t>
+            </a:r>
+          </a:p>
+          <a:p>
+            <a:pPr>
+              <a:lnSpc>
+                <a:spcPct val="115000"/>
+              </a:lnSpc>
+              <a:spcAft>
+                <a:spcPts val="500"/>
+              </a:spcAft>
+            </a:pPr>
+            <a:r>
+              <a:rPr sz="1080" b="1">
+                <a:solidFill>
+                  <a:srgbClr val="006B6B"/>
+                </a:solidFill>
+                <a:latin typeface="微软雅黑"/>
+              </a:rPr>
+              <a:t>• 考核价格 = 336.56元/MWh×1.05 − 当月发电侧实时市场加权均价</a:t>
             </a:r>
           </a:p>
           <a:p>
@@ -7717,17 +6994,17 @@
                 <a:spcPct val="115000"/>
               </a:lnSpc>
               <a:spcAft>
-                <a:spcPts val="600"/>
+                <a:spcPts val="500"/>
               </a:spcAft>
             </a:pPr>
             <a:r>
-              <a:rPr sz="1200" b="0">
+              <a:rPr sz="930" b="0">
                 <a:solidFill>
                   <a:srgbClr val="595F66"/>
                 </a:solidFill>
-                <a:latin typeface="Microsoft YaHei"/>
-              </a:rPr>
-              <a:t>- 《广西电力中长期交易规则》《2026年广西电力市场化交易工作有关事项的通知》</a:t>
+                <a:latin typeface="微软雅黑"/>
+              </a:rPr>
+              <a:t>- 价格为正：按该价×考核电量缴纳考核费用</a:t>
             </a:r>
           </a:p>
           <a:p>
@@ -7736,17 +7013,17 @@
                 <a:spcPct val="115000"/>
               </a:lnSpc>
               <a:spcAft>
-                <a:spcPts val="600"/>
+                <a:spcPts val="500"/>
               </a:spcAft>
             </a:pPr>
             <a:r>
-              <a:rPr sz="1200" b="0">
+              <a:rPr sz="930" b="0">
                 <a:solidFill>
                   <a:srgbClr val="595F66"/>
                 </a:solidFill>
-                <a:latin typeface="Microsoft YaHei"/>
-              </a:rPr>
-              <a:t>- 标的物为当月内未履约的年度直接交易合同电量</a:t>
+                <a:latin typeface="微软雅黑"/>
+              </a:rPr>
+              <a:t>- 价格为负：按绝对值×考核电量执行考核（反向约束）</a:t>
             </a:r>
           </a:p>
           <a:p>
@@ -7755,55 +7032,17 @@
                 <a:spcPct val="115000"/>
               </a:lnSpc>
               <a:spcAft>
-                <a:spcPts val="600"/>
+                <a:spcPts val="500"/>
               </a:spcAft>
             </a:pPr>
             <a:r>
-              <a:rPr sz="1350" b="1">
-                <a:solidFill>
-                  <a:srgbClr val="0B2B4D"/>
-                </a:solidFill>
-                <a:latin typeface="Microsoft YaHei"/>
-              </a:rPr>
-              <a:t>• 交易目标</a:t>
-            </a:r>
-          </a:p>
-          <a:p>
-            <a:pPr lvl="1">
-              <a:lnSpc>
-                <a:spcPct val="115000"/>
-              </a:lnSpc>
-              <a:spcAft>
-                <a:spcPts val="600"/>
-              </a:spcAft>
-            </a:pPr>
-            <a:r>
-              <a:rPr sz="1200" b="0">
-                <a:solidFill>
-                  <a:srgbClr val="595F66"/>
-                </a:solidFill>
-                <a:latin typeface="Microsoft YaHei"/>
-              </a:rPr>
-              <a:t>- 2–3天短周期，匹配短期负荷波动、降低偏差风险</a:t>
-            </a:r>
-          </a:p>
-          <a:p>
-            <a:pPr lvl="1">
-              <a:lnSpc>
-                <a:spcPct val="115000"/>
-              </a:lnSpc>
-              <a:spcAft>
-                <a:spcPts val="600"/>
-              </a:spcAft>
-            </a:pPr>
-            <a:r>
-              <a:rPr sz="1200" b="0">
-                <a:solidFill>
-                  <a:srgbClr val="595F66"/>
-                </a:solidFill>
-                <a:latin typeface="Microsoft YaHei"/>
-              </a:rPr>
-              <a:t>- 滚动衔接，确保全月有可交易标的</a:t>
+              <a:rPr sz="1080" b="1">
+                <a:solidFill>
+                  <a:srgbClr val="006B6B"/>
+                </a:solidFill>
+                <a:latin typeface="微软雅黑"/>
+              </a:rPr>
+              <a:t>• 持仓量(考核部分) = 年度长协(本月) + 合同电量转让电量(本月)</a:t>
             </a:r>
           </a:p>
           <a:p>
@@ -7812,345 +7051,34 @@
                 <a:spcPct val="115000"/>
               </a:lnSpc>
               <a:spcAft>
-                <a:spcPts val="600"/>
+                <a:spcPts val="500"/>
               </a:spcAft>
             </a:pPr>
             <a:r>
-              <a:rPr sz="1350" b="1">
-                <a:solidFill>
-                  <a:srgbClr val="0B2B4D"/>
-                </a:solidFill>
-                <a:latin typeface="Microsoft YaHei"/>
-              </a:rPr>
-              <a:t>• 交易时序</a:t>
-            </a:r>
-          </a:p>
-          <a:p>
-            <a:pPr lvl="1">
-              <a:lnSpc>
-                <a:spcPct val="115000"/>
-              </a:lnSpc>
-              <a:spcAft>
-                <a:spcPts val="600"/>
-              </a:spcAft>
-            </a:pPr>
-            <a:r>
-              <a:rPr sz="1200" b="0">
-                <a:solidFill>
-                  <a:srgbClr val="595F66"/>
-                </a:solidFill>
-                <a:latin typeface="Microsoft YaHei"/>
-              </a:rPr>
-              <a:t>- 09:00–09:20 集中竞价（自由报价，可改可撤）</a:t>
-            </a:r>
-          </a:p>
-          <a:p>
-            <a:pPr lvl="1">
-              <a:lnSpc>
-                <a:spcPct val="115000"/>
-              </a:lnSpc>
-              <a:spcAft>
-                <a:spcPts val="600"/>
-              </a:spcAft>
-            </a:pPr>
-            <a:r>
-              <a:rPr sz="1200" b="0">
-                <a:solidFill>
-                  <a:srgbClr val="595F66"/>
-                </a:solidFill>
-                <a:latin typeface="Microsoft YaHei"/>
-              </a:rPr>
-              <a:t>- 09:20–09:30 静默固化、集中统一边际出清</a:t>
-            </a:r>
-          </a:p>
-          <a:p>
-            <a:pPr lvl="1">
-              <a:lnSpc>
-                <a:spcPct val="115000"/>
-              </a:lnSpc>
-              <a:spcAft>
-                <a:spcPts val="600"/>
-              </a:spcAft>
-            </a:pPr>
-            <a:r>
-              <a:rPr sz="1200" b="0">
-                <a:solidFill>
-                  <a:srgbClr val="595F66"/>
-                </a:solidFill>
-                <a:latin typeface="Microsoft YaHei"/>
-              </a:rPr>
-              <a:t>- 09:30 公布出清结果</a:t>
-            </a:r>
-          </a:p>
-          <a:p>
-            <a:pPr lvl="1">
-              <a:lnSpc>
-                <a:spcPct val="115000"/>
-              </a:lnSpc>
-              <a:spcAft>
-                <a:spcPts val="600"/>
-              </a:spcAft>
-            </a:pPr>
-            <a:r>
-              <a:rPr sz="1200" b="0">
-                <a:solidFill>
-                  <a:srgbClr val="595F66"/>
-                </a:solidFill>
-                <a:latin typeface="Microsoft YaHei"/>
-              </a:rPr>
-              <a:t>- 09:30–11:30 滚动撮合阶段</a:t>
-            </a:r>
-          </a:p>
-        </p:txBody>
-      </p:sp>
-      <p:sp>
-        <p:nvSpPr>
-          <p:cNvPr id="7" name="Rectangle 6"/>
-          <p:cNvSpPr/>
-          <p:nvPr/>
-        </p:nvSpPr>
-        <p:spPr>
-          <a:xfrm>
-            <a:off x="6629400" y="1325880"/>
-            <a:ext cx="5029200" cy="5029200"/>
-          </a:xfrm>
-          <a:prstGeom prst="rect">
-            <a:avLst/>
-          </a:prstGeom>
-          <a:solidFill>
-            <a:srgbClr val="F2F6FA"/>
-          </a:solidFill>
-          <a:ln>
-            <a:noFill/>
-          </a:ln>
-          <a:effectLst/>
-        </p:spPr>
-        <p:style>
-          <a:lnRef idx="1">
-            <a:schemeClr val="accent1"/>
-          </a:lnRef>
-          <a:fillRef idx="3">
-            <a:schemeClr val="accent1"/>
-          </a:fillRef>
-          <a:effectRef idx="2">
-            <a:schemeClr val="accent1"/>
-          </a:effectRef>
-          <a:fontRef idx="minor">
-            <a:schemeClr val="lt1"/>
-          </a:fontRef>
-        </p:style>
-        <p:txBody>
-          <a:bodyPr rtlCol="0" anchor="ctr"/>
-          <a:lstStyle/>
-          <a:p>
-            <a:pPr algn="ctr"/>
-          </a:p>
-        </p:txBody>
-      </p:sp>
-      <p:sp>
-        <p:nvSpPr>
-          <p:cNvPr id="8" name="TextBox 7"/>
-          <p:cNvSpPr txBox="1"/>
-          <p:nvPr/>
-        </p:nvSpPr>
-        <p:spPr>
-          <a:xfrm>
-            <a:off x="6903720" y="1508760"/>
-            <a:ext cx="4572000" cy="365760"/>
-          </a:xfrm>
-          <a:prstGeom prst="rect">
-            <a:avLst/>
-          </a:prstGeom>
-          <a:noFill/>
-        </p:spPr>
-        <p:txBody>
-          <a:bodyPr wrap="square">
-            <a:spAutoFit/>
-          </a:bodyPr>
-          <a:lstStyle/>
-          <a:p>
-            <a:pPr algn="l"/>
-            <a:r>
-              <a:rPr sz="1500" b="1" i="0">
-                <a:solidFill>
-                  <a:srgbClr val="0B2B4D"/>
-                </a:solidFill>
-                <a:latin typeface="Microsoft YaHei"/>
-              </a:rPr>
-              <a:t>特殊规则约束</a:t>
-            </a:r>
-          </a:p>
-        </p:txBody>
-      </p:sp>
-      <p:sp>
-        <p:nvSpPr>
-          <p:cNvPr id="9" name="TextBox 8"/>
-          <p:cNvSpPr txBox="1"/>
-          <p:nvPr/>
-        </p:nvSpPr>
-        <p:spPr>
-          <a:xfrm>
-            <a:off x="6903720" y="1920240"/>
-            <a:ext cx="4572000" cy="4297680"/>
-          </a:xfrm>
-          <a:prstGeom prst="rect">
-            <a:avLst/>
-          </a:prstGeom>
-          <a:noFill/>
-        </p:spPr>
-        <p:txBody>
-          <a:bodyPr wrap="square">
-            <a:spAutoFit/>
-          </a:bodyPr>
-          <a:lstStyle/>
+              <a:rPr sz="1080" b="1">
+                <a:solidFill>
+                  <a:srgbClr val="006B6B"/>
+                </a:solidFill>
+                <a:latin typeface="微软雅黑"/>
+              </a:rPr>
+              <a:t>• 电量上下限：PM网站「滚动撮合-时刻剩余可买入电量」</a:t>
+            </a:r>
+          </a:p>
           <a:p>
             <a:pPr>
               <a:lnSpc>
                 <a:spcPct val="115000"/>
               </a:lnSpc>
               <a:spcAft>
-                <a:spcPts val="600"/>
+                <a:spcPts val="500"/>
               </a:spcAft>
             </a:pPr>
             <a:r>
-              <a:rPr sz="1250" b="1">
-                <a:solidFill>
-                  <a:srgbClr val="0B2B4D"/>
-                </a:solidFill>
-                <a:latin typeface="Microsoft YaHei"/>
-              </a:rPr>
-              <a:t>• 触发条件：月度签约持仓量(考核部分) &lt; 实际用电量 × 50%</a:t>
-            </a:r>
-          </a:p>
-          <a:p>
-            <a:pPr>
-              <a:lnSpc>
-                <a:spcPct val="115000"/>
-              </a:lnSpc>
-              <a:spcAft>
-                <a:spcPts val="600"/>
-              </a:spcAft>
-            </a:pPr>
-            <a:r>
-              <a:rPr sz="1250" b="1">
-                <a:solidFill>
-                  <a:srgbClr val="0B2B4D"/>
-                </a:solidFill>
-                <a:latin typeface="Microsoft YaHei"/>
-              </a:rPr>
-              <a:t>• 考核电量 = 实际用电量×50% − 持仓量(考核部分)</a:t>
-            </a:r>
-          </a:p>
-          <a:p>
-            <a:pPr>
-              <a:lnSpc>
-                <a:spcPct val="115000"/>
-              </a:lnSpc>
-              <a:spcAft>
-                <a:spcPts val="600"/>
-              </a:spcAft>
-            </a:pPr>
-            <a:r>
-              <a:rPr sz="1250" b="1">
-                <a:solidFill>
-                  <a:srgbClr val="0B2B4D"/>
-                </a:solidFill>
-                <a:latin typeface="Microsoft YaHei"/>
-              </a:rPr>
-              <a:t>• 考核价格 = 336.56元/MWh × 1.05 − 当月发电侧实时市场加权均价</a:t>
-            </a:r>
-          </a:p>
-          <a:p>
-            <a:pPr lvl="1">
-              <a:lnSpc>
-                <a:spcPct val="115000"/>
-              </a:lnSpc>
-              <a:spcAft>
-                <a:spcPts val="600"/>
-              </a:spcAft>
-            </a:pPr>
-            <a:r>
-              <a:rPr sz="1100" b="0">
-                <a:solidFill>
-                  <a:srgbClr val="595F66"/>
-                </a:solidFill>
-                <a:latin typeface="Microsoft YaHei"/>
-              </a:rPr>
-              <a:t>- 价格为正：按该价×考核电量缴纳考核费用</a:t>
-            </a:r>
-          </a:p>
-          <a:p>
-            <a:pPr lvl="1">
-              <a:lnSpc>
-                <a:spcPct val="115000"/>
-              </a:lnSpc>
-              <a:spcAft>
-                <a:spcPts val="600"/>
-              </a:spcAft>
-            </a:pPr>
-            <a:r>
-              <a:rPr sz="1100" b="0">
-                <a:solidFill>
-                  <a:srgbClr val="595F66"/>
-                </a:solidFill>
-                <a:latin typeface="Microsoft YaHei"/>
-              </a:rPr>
-              <a:t>- 价格为负：按绝对值×考核电量执行考核（反向约束，防止投机性低持仓）</a:t>
-            </a:r>
-          </a:p>
-          <a:p>
-            <a:pPr>
-              <a:lnSpc>
-                <a:spcPct val="115000"/>
-              </a:lnSpc>
-              <a:spcAft>
-                <a:spcPts val="600"/>
-              </a:spcAft>
-            </a:pPr>
-            <a:r>
-              <a:rPr sz="1250" b="1">
-                <a:solidFill>
-                  <a:srgbClr val="0B2B4D"/>
-                </a:solidFill>
-                <a:latin typeface="Microsoft YaHei"/>
-              </a:rPr>
-              <a:t>• 持仓量(考核部分) = 年度长协(本月) + 合同电量转让电量(本月)</a:t>
-            </a:r>
-          </a:p>
-          <a:p>
-            <a:pPr>
-              <a:lnSpc>
-                <a:spcPct val="115000"/>
-              </a:lnSpc>
-              <a:spcAft>
-                <a:spcPts val="600"/>
-              </a:spcAft>
-            </a:pPr>
-            <a:r>
-              <a:rPr sz="1250" b="1">
-                <a:solidFill>
-                  <a:srgbClr val="0B2B4D"/>
-                </a:solidFill>
-                <a:latin typeface="Microsoft YaHei"/>
-              </a:rPr>
-              <a:t>• 电量上下限见 PM 网站「滚动撮合-时刻剩余可买入电量」</a:t>
-            </a:r>
-          </a:p>
-          <a:p>
-            <a:pPr>
-              <a:lnSpc>
-                <a:spcPct val="115000"/>
-              </a:lnSpc>
-              <a:spcAft>
-                <a:spcPts val="600"/>
-              </a:spcAft>
-            </a:pPr>
-            <a:r>
-              <a:rPr sz="1250" b="1">
-                <a:solidFill>
-                  <a:srgbClr val="0B2B4D"/>
-                </a:solidFill>
-                <a:latin typeface="Microsoft YaHei"/>
+              <a:rPr sz="1080" b="1">
+                <a:solidFill>
+                  <a:srgbClr val="006B6B"/>
+                </a:solidFill>
+                <a:latin typeface="微软雅黑"/>
               </a:rPr>
               <a:t>• 交易方向：买方/卖方均可，对手方为省内售电公司</a:t>
             </a:r>
@@ -8159,58 +7087,14 @@
       </p:sp>
       <p:sp>
         <p:nvSpPr>
-          <p:cNvPr id="10" name="Rectangle 9"/>
-          <p:cNvSpPr/>
-          <p:nvPr/>
-        </p:nvSpPr>
-        <p:spPr>
-          <a:xfrm>
-            <a:off x="0" y="6565392"/>
-            <a:ext cx="12191695" cy="292608"/>
-          </a:xfrm>
-          <a:prstGeom prst="rect">
-            <a:avLst/>
-          </a:prstGeom>
-          <a:solidFill>
-            <a:srgbClr val="0B2B4D"/>
-          </a:solidFill>
-          <a:ln>
-            <a:noFill/>
-          </a:ln>
-          <a:effectLst/>
-        </p:spPr>
-        <p:style>
-          <a:lnRef idx="1">
-            <a:schemeClr val="accent1"/>
-          </a:lnRef>
-          <a:fillRef idx="3">
-            <a:schemeClr val="accent1"/>
-          </a:fillRef>
-          <a:effectRef idx="2">
-            <a:schemeClr val="accent1"/>
-          </a:effectRef>
-          <a:fontRef idx="minor">
-            <a:schemeClr val="lt1"/>
-          </a:fontRef>
-        </p:style>
-        <p:txBody>
-          <a:bodyPr rtlCol="0" anchor="ctr"/>
-          <a:lstStyle/>
-          <a:p>
-            <a:pPr algn="ctr"/>
-          </a:p>
-        </p:txBody>
-      </p:sp>
-      <p:sp>
-        <p:nvSpPr>
-          <p:cNvPr id="11" name="TextBox 10"/>
+          <p:cNvPr id="8" name="TextBox 7"/>
           <p:cNvSpPr txBox="1"/>
           <p:nvPr/>
         </p:nvSpPr>
         <p:spPr>
           <a:xfrm>
-            <a:off x="365760" y="6547104"/>
-            <a:ext cx="5486400" cy="274320"/>
+            <a:off x="8641080" y="6537960"/>
+            <a:ext cx="365760" cy="274320"/>
           </a:xfrm>
           <a:prstGeom prst="rect">
             <a:avLst/>
@@ -8223,50 +7107,15 @@
           </a:bodyPr>
           <a:lstStyle/>
           <a:p>
-            <a:pPr algn="l"/>
-            <a:r>
-              <a:rPr sz="1000" b="0" i="0">
-                <a:solidFill>
-                  <a:srgbClr val="FFFFFF"/>
-                </a:solidFill>
-                <a:latin typeface="Microsoft YaHei"/>
-              </a:rPr>
-              <a:t>中长期交易基本说明与业务逻辑</a:t>
-            </a:r>
-          </a:p>
-        </p:txBody>
-      </p:sp>
-      <p:sp>
-        <p:nvSpPr>
-          <p:cNvPr id="12" name="TextBox 11"/>
-          <p:cNvSpPr txBox="1"/>
-          <p:nvPr/>
-        </p:nvSpPr>
-        <p:spPr>
-          <a:xfrm>
-            <a:off x="11094415" y="6547104"/>
-            <a:ext cx="731520" cy="274320"/>
-          </a:xfrm>
-          <a:prstGeom prst="rect">
-            <a:avLst/>
-          </a:prstGeom>
-          <a:noFill/>
-        </p:spPr>
-        <p:txBody>
-          <a:bodyPr wrap="square">
-            <a:spAutoFit/>
-          </a:bodyPr>
-          <a:lstStyle/>
-          <a:p>
             <a:pPr algn="r"/>
             <a:r>
-              <a:rPr sz="1000" b="0" i="0">
-                <a:solidFill>
-                  <a:srgbClr val="FFFFFF"/>
-                </a:solidFill>
-                <a:latin typeface="Microsoft YaHei"/>
-              </a:rPr>
-              <a:t>06 / 10</a:t>
+              <a:rPr sz="1100" b="0">
+                <a:solidFill>
+                  <a:srgbClr val="595F66"/>
+                </a:solidFill>
+                <a:latin typeface="微软雅黑"/>
+              </a:rPr>
+              <a:t>6</a:t>
             </a:r>
           </a:p>
         </p:txBody>
@@ -8297,22 +7146,81 @@
         <p:nvPr/>
       </p:nvGrpSpPr>
       <p:grpSpPr/>
-      <p:sp>
-        <p:nvSpPr>
-          <p:cNvPr id="2" name="Rectangle 1"/>
+      <p:pic>
+        <p:nvPicPr>
+          <p:cNvPr id="2" name="Picture 1" descr="banner.png"/>
+          <p:cNvPicPr>
+            <a:picLocks noChangeAspect="1"/>
+          </p:cNvPicPr>
+          <p:nvPr/>
+        </p:nvPicPr>
+        <p:blipFill>
+          <a:blip r:embed="rId2"/>
+          <a:stretch>
+            <a:fillRect/>
+          </a:stretch>
+        </p:blipFill>
+        <p:spPr>
+          <a:xfrm>
+            <a:off x="0" y="0"/>
+            <a:ext cx="9144000" cy="832104"/>
+          </a:xfrm>
+          <a:prstGeom prst="rect">
+            <a:avLst/>
+          </a:prstGeom>
+        </p:spPr>
+      </p:pic>
+      <p:sp>
+        <p:nvSpPr>
+          <p:cNvPr id="3" name="TextBox 2"/>
+          <p:cNvSpPr txBox="1"/>
+          <p:nvPr/>
+        </p:nvSpPr>
+        <p:spPr>
+          <a:xfrm>
+            <a:off x="320040" y="109728"/>
+            <a:ext cx="7315200" cy="640080"/>
+          </a:xfrm>
+          <a:prstGeom prst="rect">
+            <a:avLst/>
+          </a:prstGeom>
+          <a:noFill/>
+        </p:spPr>
+        <p:txBody>
+          <a:bodyPr wrap="square">
+            <a:spAutoFit/>
+          </a:bodyPr>
+          <a:lstStyle/>
+          <a:p>
+            <a:pPr algn="l"/>
+            <a:r>
+              <a:rPr sz="1800" b="1">
+                <a:solidFill>
+                  <a:srgbClr val="008080"/>
+                </a:solidFill>
+                <a:latin typeface="微软雅黑"/>
+              </a:rPr>
+              <a:t>多日用电合同电量转让交易 — 交易策略</a:t>
+            </a:r>
+          </a:p>
+        </p:txBody>
+      </p:sp>
+      <p:sp>
+        <p:nvSpPr>
+          <p:cNvPr id="4" name="Rectangle 3"/>
           <p:cNvSpPr/>
           <p:nvPr/>
         </p:nvSpPr>
         <p:spPr>
           <a:xfrm>
-            <a:off x="0" y="0"/>
-            <a:ext cx="12191695" cy="1051560"/>
+            <a:off x="365760" y="960120"/>
+            <a:ext cx="8412480" cy="777240"/>
           </a:xfrm>
           <a:prstGeom prst="rect">
             <a:avLst/>
           </a:prstGeom>
           <a:solidFill>
-            <a:srgbClr val="0B2B4D"/>
+            <a:srgbClr val="F8F8F8"/>
           </a:solidFill>
           <a:ln>
             <a:noFill/>
@@ -8343,20 +7251,20 @@
       </p:sp>
       <p:sp>
         <p:nvSpPr>
-          <p:cNvPr id="3" name="Rectangle 2"/>
+          <p:cNvPr id="5" name="Rectangle 4"/>
           <p:cNvSpPr/>
           <p:nvPr/>
         </p:nvSpPr>
         <p:spPr>
           <a:xfrm>
-            <a:off x="0" y="1051560"/>
-            <a:ext cx="12191695" cy="54864"/>
+            <a:off x="365760" y="960120"/>
+            <a:ext cx="50800" cy="777240"/>
           </a:xfrm>
           <a:prstGeom prst="rect">
             <a:avLst/>
           </a:prstGeom>
           <a:solidFill>
-            <a:srgbClr val="E87A1E"/>
+            <a:srgbClr val="008080"/>
           </a:solidFill>
           <a:ln>
             <a:noFill/>
@@ -8387,14 +7295,14 @@
       </p:sp>
       <p:sp>
         <p:nvSpPr>
-          <p:cNvPr id="4" name="TextBox 3"/>
+          <p:cNvPr id="6" name="TextBox 5"/>
           <p:cNvSpPr txBox="1"/>
           <p:nvPr/>
         </p:nvSpPr>
         <p:spPr>
           <a:xfrm>
-            <a:off x="548640" y="164592"/>
-            <a:ext cx="10058400" cy="548640"/>
+            <a:off x="594360" y="1033271"/>
+            <a:ext cx="8046720" cy="640080"/>
           </a:xfrm>
           <a:prstGeom prst="rect">
             <a:avLst/>
@@ -8409,188 +7317,39 @@
           <a:p>
             <a:pPr algn="l"/>
             <a:r>
-              <a:rPr sz="2800" b="1" i="0">
-                <a:solidFill>
-                  <a:srgbClr val="FFFFFF"/>
-                </a:solidFill>
-                <a:latin typeface="Microsoft YaHei"/>
-              </a:rPr>
-              <a:t>多日用电合同电量转让交易 — 交易策略</a:t>
-            </a:r>
-          </a:p>
-        </p:txBody>
-      </p:sp>
-      <p:sp>
-        <p:nvSpPr>
-          <p:cNvPr id="5" name="TextBox 4"/>
+              <a:rPr sz="1300" b="1">
+                <a:solidFill>
+                  <a:srgbClr val="006B6B"/>
+                </a:solidFill>
+                <a:latin typeface="微软雅黑"/>
+              </a:rPr>
+              <a:t>盈亏线 = 合同电量转让价格 − （现货价格_预测 + 考核价格）</a:t>
+            </a:r>
+          </a:p>
+          <a:p>
+            <a:pPr algn="l"/>
+            <a:r>
+              <a:rPr sz="1300" b="1">
+                <a:solidFill>
+                  <a:srgbClr val="006B6B"/>
+                </a:solidFill>
+                <a:latin typeface="微软雅黑"/>
+              </a:rPr>
+              <a:t>盈亏线&lt;0 → 买入（主要方式）；盈亏线&gt;0 → 卖出（持仓不足50%前提下）</a:t>
+            </a:r>
+          </a:p>
+        </p:txBody>
+      </p:sp>
+      <p:sp>
+        <p:nvSpPr>
+          <p:cNvPr id="7" name="TextBox 6"/>
           <p:cNvSpPr txBox="1"/>
           <p:nvPr/>
         </p:nvSpPr>
         <p:spPr>
           <a:xfrm>
-            <a:off x="548640" y="658368"/>
-            <a:ext cx="10058400" cy="365760"/>
-          </a:xfrm>
-          <a:prstGeom prst="rect">
-            <a:avLst/>
-          </a:prstGeom>
-          <a:noFill/>
-        </p:spPr>
-        <p:txBody>
-          <a:bodyPr wrap="square">
-            <a:spAutoFit/>
-          </a:bodyPr>
-          <a:lstStyle/>
-          <a:p>
-            <a:pPr algn="l"/>
-            <a:r>
-              <a:rPr sz="1300" b="0" i="0">
-                <a:solidFill>
-                  <a:srgbClr val="CFDDEC"/>
-                </a:solidFill>
-                <a:latin typeface="Microsoft YaHei"/>
-              </a:rPr>
-              <a:t>05 Strategy</a:t>
-            </a:r>
-          </a:p>
-        </p:txBody>
-      </p:sp>
-      <p:sp>
-        <p:nvSpPr>
-          <p:cNvPr id="6" name="TextBox 5"/>
-          <p:cNvSpPr txBox="1"/>
-          <p:nvPr/>
-        </p:nvSpPr>
-        <p:spPr>
-          <a:xfrm>
-            <a:off x="548640" y="1234440"/>
-            <a:ext cx="5486400" cy="365760"/>
-          </a:xfrm>
-          <a:prstGeom prst="rect">
-            <a:avLst/>
-          </a:prstGeom>
-          <a:noFill/>
-        </p:spPr>
-        <p:txBody>
-          <a:bodyPr wrap="square">
-            <a:spAutoFit/>
-          </a:bodyPr>
-          <a:lstStyle/>
-          <a:p>
-            <a:pPr algn="l"/>
-            <a:r>
-              <a:rPr sz="1500" b="1" i="0">
-                <a:solidFill>
-                  <a:srgbClr val="0B2B4D"/>
-                </a:solidFill>
-                <a:latin typeface="Microsoft YaHei"/>
-              </a:rPr>
-              <a:t>核心决策逻辑</a:t>
-            </a:r>
-          </a:p>
-        </p:txBody>
-      </p:sp>
-      <p:sp>
-        <p:nvSpPr>
-          <p:cNvPr id="7" name="Rectangle 6"/>
-          <p:cNvSpPr/>
-          <p:nvPr/>
-        </p:nvSpPr>
-        <p:spPr>
-          <a:xfrm>
-            <a:off x="548640" y="1645920"/>
-            <a:ext cx="11064240" cy="822960"/>
-          </a:xfrm>
-          <a:prstGeom prst="rect">
-            <a:avLst/>
-          </a:prstGeom>
-          <a:solidFill>
-            <a:srgbClr val="F2F6FA"/>
-          </a:solidFill>
-          <a:ln>
-            <a:noFill/>
-          </a:ln>
-          <a:effectLst/>
-        </p:spPr>
-        <p:style>
-          <a:lnRef idx="1">
-            <a:schemeClr val="accent1"/>
-          </a:lnRef>
-          <a:fillRef idx="3">
-            <a:schemeClr val="accent1"/>
-          </a:fillRef>
-          <a:effectRef idx="2">
-            <a:schemeClr val="accent1"/>
-          </a:effectRef>
-          <a:fontRef idx="minor">
-            <a:schemeClr val="lt1"/>
-          </a:fontRef>
-        </p:style>
-        <p:txBody>
-          <a:bodyPr rtlCol="0" anchor="ctr"/>
-          <a:lstStyle/>
-          <a:p>
-            <a:pPr algn="ctr"/>
-          </a:p>
-        </p:txBody>
-      </p:sp>
-      <p:sp>
-        <p:nvSpPr>
-          <p:cNvPr id="8" name="TextBox 7"/>
-          <p:cNvSpPr txBox="1"/>
-          <p:nvPr/>
-        </p:nvSpPr>
-        <p:spPr>
-          <a:xfrm>
-            <a:off x="777240" y="1755648"/>
-            <a:ext cx="10607040" cy="640080"/>
-          </a:xfrm>
-          <a:prstGeom prst="rect">
-            <a:avLst/>
-          </a:prstGeom>
-          <a:noFill/>
-        </p:spPr>
-        <p:txBody>
-          <a:bodyPr wrap="square">
-            <a:spAutoFit/>
-          </a:bodyPr>
-          <a:lstStyle/>
-          <a:p>
-            <a:pPr algn="l"/>
-            <a:r>
-              <a:rPr sz="1400" b="1" i="0">
-                <a:solidFill>
-                  <a:srgbClr val="0B2B4D"/>
-                </a:solidFill>
-                <a:latin typeface="Microsoft YaHei"/>
-              </a:rPr>
-              <a:t>盈亏线 = 合同电量转让价格 − （现货价格_预测 + 考核价格）</a:t>
-            </a:r>
-          </a:p>
-          <a:p>
-            <a:pPr algn="l"/>
-            <a:r>
-              <a:rPr sz="1400" b="1" i="0">
-                <a:solidFill>
-                  <a:srgbClr val="0B2B4D"/>
-                </a:solidFill>
-                <a:latin typeface="Microsoft YaHei"/>
-              </a:rPr>
-              <a:t>盈亏线 &lt; 0 → 买入（主要方式）；盈亏线 &gt; 0 → 卖出（持仓不足50%前提下）</a:t>
-            </a:r>
-          </a:p>
-        </p:txBody>
-      </p:sp>
-      <p:sp>
-        <p:nvSpPr>
-          <p:cNvPr id="9" name="TextBox 8"/>
-          <p:cNvSpPr txBox="1"/>
-          <p:nvPr/>
-        </p:nvSpPr>
-        <p:spPr>
-          <a:xfrm>
-            <a:off x="548640" y="2697480"/>
-            <a:ext cx="11064240" cy="3657600"/>
+            <a:off x="365760" y="1965960"/>
+            <a:ext cx="8412480" cy="4297680"/>
           </a:xfrm>
           <a:prstGeom prst="rect">
             <a:avLst/>
@@ -8608,15 +7367,15 @@
                 <a:spcPct val="115000"/>
               </a:lnSpc>
               <a:spcAft>
-                <a:spcPts val="600"/>
+                <a:spcPts val="500"/>
               </a:spcAft>
             </a:pPr>
             <a:r>
-              <a:rPr sz="1400" b="1">
-                <a:solidFill>
-                  <a:srgbClr val="0B2B4D"/>
-                </a:solidFill>
-                <a:latin typeface="Microsoft YaHei"/>
+              <a:rPr sz="1300" b="1">
+                <a:solidFill>
+                  <a:srgbClr val="006B6B"/>
+                </a:solidFill>
+                <a:latin typeface="微软雅黑"/>
               </a:rPr>
               <a:t>• 集中竞价阶段：人工权衡出清概率与最大收益，一次性表格导入+部分手动调整；绝大部分电量在此阶段成交</a:t>
             </a:r>
@@ -8627,15 +7386,15 @@
                 <a:spcPct val="115000"/>
               </a:lnSpc>
               <a:spcAft>
-                <a:spcPts val="600"/>
+                <a:spcPts val="500"/>
               </a:spcAft>
             </a:pPr>
             <a:r>
-              <a:rPr sz="1400" b="1">
-                <a:solidFill>
-                  <a:srgbClr val="0B2B4D"/>
-                </a:solidFill>
-                <a:latin typeface="Microsoft YaHei"/>
+              <a:rPr sz="1300" b="1">
+                <a:solidFill>
+                  <a:srgbClr val="006B6B"/>
+                </a:solidFill>
+                <a:latin typeface="微软雅黑"/>
               </a:rPr>
               <a:t>• 滚动撮合阶段：实时盯盘报价，但因市场原因成交量极少</a:t>
             </a:r>
@@ -8646,15 +7405,15 @@
                 <a:spcPct val="115000"/>
               </a:lnSpc>
               <a:spcAft>
-                <a:spcPts val="600"/>
+                <a:spcPts val="500"/>
               </a:spcAft>
             </a:pPr>
             <a:r>
-              <a:rPr sz="1400" b="1">
-                <a:solidFill>
-                  <a:srgbClr val="0B2B4D"/>
-                </a:solidFill>
-                <a:latin typeface="Microsoft YaHei"/>
+              <a:rPr sz="1300" b="1">
+                <a:solidFill>
+                  <a:srgbClr val="006B6B"/>
+                </a:solidFill>
+                <a:latin typeface="微软雅黑"/>
               </a:rPr>
               <a:t>• 经验规则</a:t>
             </a:r>
@@ -8665,17 +7424,17 @@
                 <a:spcPct val="115000"/>
               </a:lnSpc>
               <a:spcAft>
-                <a:spcPts val="600"/>
+                <a:spcPts val="500"/>
               </a:spcAft>
             </a:pPr>
             <a:r>
-              <a:rPr sz="1250" b="0">
+              <a:rPr sz="1150" b="0">
                 <a:solidFill>
                   <a:srgbClr val="595F66"/>
                 </a:solidFill>
-                <a:latin typeface="Microsoft YaHei"/>
-              </a:rPr>
-              <a:t>- 以买入补仓为主；晚高峰（17:00–22:00，受新能源影响）即便转让价高也不轻易卖出，因新能源限电易致价格跳变</a:t>
+                <a:latin typeface="微软雅黑"/>
+              </a:rPr>
+              <a:t>- 以买入补仓为主；晚高峰（17:00–22:00，受新能源影响）即便转让价高也不轻易卖出</a:t>
             </a:r>
           </a:p>
           <a:p>
@@ -8684,17 +7443,17 @@
                 <a:spcPct val="115000"/>
               </a:lnSpc>
               <a:spcAft>
-                <a:spcPts val="600"/>
+                <a:spcPts val="500"/>
               </a:spcAft>
             </a:pPr>
             <a:r>
-              <a:rPr sz="1250" b="0">
+              <a:rPr sz="1150" b="0">
                 <a:solidFill>
                   <a:srgbClr val="595F66"/>
                 </a:solidFill>
-                <a:latin typeface="Microsoft YaHei"/>
-              </a:rPr>
-              <a:t>- 若部分时刻卖出，倾向在其他时刻“换仓”买入近似等量电量，保持总持仓目标不变</a:t>
+                <a:latin typeface="微软雅黑"/>
+              </a:rPr>
+              <a:t>- 若部分时刻卖出，倾向在其他时刻"换仓"买入近似等量电量，保持总持仓目标不变</a:t>
             </a:r>
           </a:p>
           <a:p>
@@ -8703,75 +7462,31 @@
                 <a:spcPct val="115000"/>
               </a:lnSpc>
               <a:spcAft>
-                <a:spcPts val="600"/>
+                <a:spcPts val="500"/>
               </a:spcAft>
             </a:pPr>
             <a:r>
-              <a:rPr sz="1250" b="0">
+              <a:rPr sz="1150" b="0">
                 <a:solidFill>
                   <a:srgbClr val="595F66"/>
                 </a:solidFill>
-                <a:latin typeface="Microsoft YaHei"/>
-              </a:rPr>
-              <a:t>- 12:00–16:00 风电大发时段，现货预测价可能为0；部分交易员仍以 30–50 元/MWh 价格“赌”限电导致的价格跳变</a:t>
-            </a:r>
-          </a:p>
-        </p:txBody>
-      </p:sp>
-      <p:sp>
-        <p:nvSpPr>
-          <p:cNvPr id="10" name="Rectangle 9"/>
-          <p:cNvSpPr/>
-          <p:nvPr/>
-        </p:nvSpPr>
-        <p:spPr>
-          <a:xfrm>
-            <a:off x="0" y="6565392"/>
-            <a:ext cx="12191695" cy="292608"/>
-          </a:xfrm>
-          <a:prstGeom prst="rect">
-            <a:avLst/>
-          </a:prstGeom>
-          <a:solidFill>
-            <a:srgbClr val="0B2B4D"/>
-          </a:solidFill>
-          <a:ln>
-            <a:noFill/>
-          </a:ln>
-          <a:effectLst/>
-        </p:spPr>
-        <p:style>
-          <a:lnRef idx="1">
-            <a:schemeClr val="accent1"/>
-          </a:lnRef>
-          <a:fillRef idx="3">
-            <a:schemeClr val="accent1"/>
-          </a:fillRef>
-          <a:effectRef idx="2">
-            <a:schemeClr val="accent1"/>
-          </a:effectRef>
-          <a:fontRef idx="minor">
-            <a:schemeClr val="lt1"/>
-          </a:fontRef>
-        </p:style>
-        <p:txBody>
-          <a:bodyPr rtlCol="0" anchor="ctr"/>
-          <a:lstStyle/>
-          <a:p>
-            <a:pPr algn="ctr"/>
-          </a:p>
-        </p:txBody>
-      </p:sp>
-      <p:sp>
-        <p:nvSpPr>
-          <p:cNvPr id="11" name="TextBox 10"/>
+                <a:latin typeface="微软雅黑"/>
+              </a:rPr>
+              <a:t>- 12:00–16:00 风电大发时段，现货预测价可能为0；部分交易员仍以30–50元/MWh"赌"价格跳变</a:t>
+            </a:r>
+          </a:p>
+        </p:txBody>
+      </p:sp>
+      <p:sp>
+        <p:nvSpPr>
+          <p:cNvPr id="8" name="TextBox 7"/>
           <p:cNvSpPr txBox="1"/>
           <p:nvPr/>
         </p:nvSpPr>
         <p:spPr>
           <a:xfrm>
-            <a:off x="365760" y="6547104"/>
-            <a:ext cx="5486400" cy="274320"/>
+            <a:off x="8641080" y="6537960"/>
+            <a:ext cx="365760" cy="274320"/>
           </a:xfrm>
           <a:prstGeom prst="rect">
             <a:avLst/>
@@ -8784,50 +7499,15 @@
           </a:bodyPr>
           <a:lstStyle/>
           <a:p>
-            <a:pPr algn="l"/>
-            <a:r>
-              <a:rPr sz="1000" b="0" i="0">
-                <a:solidFill>
-                  <a:srgbClr val="FFFFFF"/>
-                </a:solidFill>
-                <a:latin typeface="Microsoft YaHei"/>
-              </a:rPr>
-              <a:t>中长期交易基本说明与业务逻辑</a:t>
-            </a:r>
-          </a:p>
-        </p:txBody>
-      </p:sp>
-      <p:sp>
-        <p:nvSpPr>
-          <p:cNvPr id="12" name="TextBox 11"/>
-          <p:cNvSpPr txBox="1"/>
-          <p:nvPr/>
-        </p:nvSpPr>
-        <p:spPr>
-          <a:xfrm>
-            <a:off x="11094415" y="6547104"/>
-            <a:ext cx="731520" cy="274320"/>
-          </a:xfrm>
-          <a:prstGeom prst="rect">
-            <a:avLst/>
-          </a:prstGeom>
-          <a:noFill/>
-        </p:spPr>
-        <p:txBody>
-          <a:bodyPr wrap="square">
-            <a:spAutoFit/>
-          </a:bodyPr>
-          <a:lstStyle/>
-          <a:p>
             <a:pPr algn="r"/>
             <a:r>
-              <a:rPr sz="1000" b="0" i="0">
-                <a:solidFill>
-                  <a:srgbClr val="FFFFFF"/>
-                </a:solidFill>
-                <a:latin typeface="Microsoft YaHei"/>
-              </a:rPr>
-              <a:t>07 / 10</a:t>
+              <a:rPr sz="1100" b="0">
+                <a:solidFill>
+                  <a:srgbClr val="595F66"/>
+                </a:solidFill>
+                <a:latin typeface="微软雅黑"/>
+              </a:rPr>
+              <a:t>7</a:t>
             </a:r>
           </a:p>
         </p:txBody>
@@ -8858,22 +7538,275 @@
         <p:nvPr/>
       </p:nvGrpSpPr>
       <p:grpSpPr/>
-      <p:sp>
-        <p:nvSpPr>
-          <p:cNvPr id="2" name="Rectangle 1"/>
+      <p:pic>
+        <p:nvPicPr>
+          <p:cNvPr id="2" name="Picture 1" descr="banner.png"/>
+          <p:cNvPicPr>
+            <a:picLocks noChangeAspect="1"/>
+          </p:cNvPicPr>
+          <p:nvPr/>
+        </p:nvPicPr>
+        <p:blipFill>
+          <a:blip r:embed="rId2"/>
+          <a:stretch>
+            <a:fillRect/>
+          </a:stretch>
+        </p:blipFill>
+        <p:spPr>
+          <a:xfrm>
+            <a:off x="0" y="0"/>
+            <a:ext cx="9144000" cy="832104"/>
+          </a:xfrm>
+          <a:prstGeom prst="rect">
+            <a:avLst/>
+          </a:prstGeom>
+        </p:spPr>
+      </p:pic>
+      <p:sp>
+        <p:nvSpPr>
+          <p:cNvPr id="3" name="TextBox 2"/>
+          <p:cNvSpPr txBox="1"/>
+          <p:nvPr/>
+        </p:nvSpPr>
+        <p:spPr>
+          <a:xfrm>
+            <a:off x="320040" y="109728"/>
+            <a:ext cx="7315200" cy="640080"/>
+          </a:xfrm>
+          <a:prstGeom prst="rect">
+            <a:avLst/>
+          </a:prstGeom>
+          <a:noFill/>
+        </p:spPr>
+        <p:txBody>
+          <a:bodyPr wrap="square">
+            <a:spAutoFit/>
+          </a:bodyPr>
+          <a:lstStyle/>
+          <a:p>
+            <a:pPr algn="l"/>
+            <a:r>
+              <a:rPr sz="2000" b="1">
+                <a:solidFill>
+                  <a:srgbClr val="008080"/>
+                </a:solidFill>
+                <a:latin typeface="微软雅黑"/>
+              </a:rPr>
+              <a:t>多日直接交易（下午）— 规则</a:t>
+            </a:r>
+          </a:p>
+        </p:txBody>
+      </p:sp>
+      <p:sp>
+        <p:nvSpPr>
+          <p:cNvPr id="4" name="TextBox 3"/>
+          <p:cNvSpPr txBox="1"/>
+          <p:nvPr/>
+        </p:nvSpPr>
+        <p:spPr>
+          <a:xfrm>
+            <a:off x="365760" y="1005840"/>
+            <a:ext cx="4389120" cy="5029200"/>
+          </a:xfrm>
+          <a:prstGeom prst="rect">
+            <a:avLst/>
+          </a:prstGeom>
+          <a:noFill/>
+        </p:spPr>
+        <p:txBody>
+          <a:bodyPr wrap="square">
+            <a:spAutoFit/>
+          </a:bodyPr>
+          <a:lstStyle/>
+          <a:p>
+            <a:pPr>
+              <a:lnSpc>
+                <a:spcPct val="115000"/>
+              </a:lnSpc>
+              <a:spcAft>
+                <a:spcPts val="500"/>
+              </a:spcAft>
+            </a:pPr>
+            <a:r>
+              <a:rPr sz="1150" b="1">
+                <a:solidFill>
+                  <a:srgbClr val="006B6B"/>
+                </a:solidFill>
+                <a:latin typeface="微软雅黑"/>
+              </a:rPr>
+              <a:t>• 政策依据</a:t>
+            </a:r>
+          </a:p>
+          <a:p>
+            <a:pPr lvl="1">
+              <a:lnSpc>
+                <a:spcPct val="115000"/>
+              </a:lnSpc>
+              <a:spcAft>
+                <a:spcPts val="500"/>
+              </a:spcAft>
+            </a:pPr>
+            <a:r>
+              <a:rPr sz="1000" b="0">
+                <a:solidFill>
+                  <a:srgbClr val="595F66"/>
+                </a:solidFill>
+                <a:latin typeface="微软雅黑"/>
+              </a:rPr>
+              <a:t>- 标的为未来2–3天可直接交割的增量市场化电量（发电侧新增上网、用户侧新增购电）</a:t>
+            </a:r>
+          </a:p>
+          <a:p>
+            <a:pPr lvl="1">
+              <a:lnSpc>
+                <a:spcPct val="115000"/>
+              </a:lnSpc>
+              <a:spcAft>
+                <a:spcPts val="500"/>
+              </a:spcAft>
+            </a:pPr>
+            <a:r>
+              <a:rPr sz="1000" b="0">
+                <a:solidFill>
+                  <a:srgbClr val="595F66"/>
+                </a:solidFill>
+                <a:latin typeface="微软雅黑"/>
+              </a:rPr>
+              <a:t>- 面向发电交易单元、售电公司、批发直购用户、虚拟电厂等</a:t>
+            </a:r>
+          </a:p>
+          <a:p>
+            <a:pPr>
+              <a:lnSpc>
+                <a:spcPct val="115000"/>
+              </a:lnSpc>
+              <a:spcAft>
+                <a:spcPts val="500"/>
+              </a:spcAft>
+            </a:pPr>
+            <a:r>
+              <a:rPr sz="1150" b="1">
+                <a:solidFill>
+                  <a:srgbClr val="006B6B"/>
+                </a:solidFill>
+                <a:latin typeface="微软雅黑"/>
+              </a:rPr>
+              <a:t>• 交易目标</a:t>
+            </a:r>
+          </a:p>
+          <a:p>
+            <a:pPr lvl="1">
+              <a:lnSpc>
+                <a:spcPct val="115000"/>
+              </a:lnSpc>
+              <a:spcAft>
+                <a:spcPts val="500"/>
+              </a:spcAft>
+            </a:pPr>
+            <a:r>
+              <a:rPr sz="1000" b="0">
+                <a:solidFill>
+                  <a:srgbClr val="595F66"/>
+                </a:solidFill>
+                <a:latin typeface="微软雅黑"/>
+              </a:rPr>
+              <a:t>- 衔接月度长协与日前现货，新增锁定基础电量、补齐缺口、降低偏差考核风险</a:t>
+            </a:r>
+          </a:p>
+          <a:p>
+            <a:pPr>
+              <a:lnSpc>
+                <a:spcPct val="115000"/>
+              </a:lnSpc>
+              <a:spcAft>
+                <a:spcPts val="500"/>
+              </a:spcAft>
+            </a:pPr>
+            <a:r>
+              <a:rPr sz="1150" b="1">
+                <a:solidFill>
+                  <a:srgbClr val="006B6B"/>
+                </a:solidFill>
+                <a:latin typeface="微软雅黑"/>
+              </a:rPr>
+              <a:t>• 交易时序</a:t>
+            </a:r>
+          </a:p>
+          <a:p>
+            <a:pPr lvl="1">
+              <a:lnSpc>
+                <a:spcPct val="115000"/>
+              </a:lnSpc>
+              <a:spcAft>
+                <a:spcPts val="500"/>
+              </a:spcAft>
+            </a:pPr>
+            <a:r>
+              <a:rPr sz="1000" b="0">
+                <a:solidFill>
+                  <a:srgbClr val="595F66"/>
+                </a:solidFill>
+                <a:latin typeface="微软雅黑"/>
+              </a:rPr>
+              <a:t>- 16:00–16:20 集中竞价；16:20–16:30 静默固化、统一出清</a:t>
+            </a:r>
+          </a:p>
+          <a:p>
+            <a:pPr lvl="1">
+              <a:lnSpc>
+                <a:spcPct val="115000"/>
+              </a:lnSpc>
+              <a:spcAft>
+                <a:spcPts val="500"/>
+              </a:spcAft>
+            </a:pPr>
+            <a:r>
+              <a:rPr sz="1000" b="0">
+                <a:solidFill>
+                  <a:srgbClr val="595F66"/>
+                </a:solidFill>
+                <a:latin typeface="微软雅黑"/>
+              </a:rPr>
+              <a:t>- 16:30–17:30 滚动撮合</a:t>
+            </a:r>
+          </a:p>
+          <a:p>
+            <a:pPr lvl="1">
+              <a:lnSpc>
+                <a:spcPct val="115000"/>
+              </a:lnSpc>
+              <a:spcAft>
+                <a:spcPts val="500"/>
+              </a:spcAft>
+            </a:pPr>
+            <a:r>
+              <a:rPr sz="1000" b="0">
+                <a:solidFill>
+                  <a:srgbClr val="595F66"/>
+                </a:solidFill>
+                <a:latin typeface="微软雅黑"/>
+              </a:rPr>
+              <a:t>- 数据爬取：PM网站「集中竞价-滚动撮合-多日直接交易」栏目</a:t>
+            </a:r>
+          </a:p>
+        </p:txBody>
+      </p:sp>
+      <p:sp>
+        <p:nvSpPr>
+          <p:cNvPr id="5" name="Rectangle 4"/>
           <p:cNvSpPr/>
           <p:nvPr/>
         </p:nvSpPr>
         <p:spPr>
           <a:xfrm>
-            <a:off x="0" y="0"/>
-            <a:ext cx="12191695" cy="1051560"/>
+            <a:off x="4937760" y="1005840"/>
+            <a:ext cx="3840480" cy="2651760"/>
           </a:xfrm>
           <a:prstGeom prst="rect">
             <a:avLst/>
           </a:prstGeom>
           <a:solidFill>
-            <a:srgbClr val="0B2B4D"/>
+            <a:srgbClr val="F8F8F8"/>
           </a:solidFill>
           <a:ln>
             <a:noFill/>
@@ -8904,20 +7837,116 @@
       </p:sp>
       <p:sp>
         <p:nvSpPr>
-          <p:cNvPr id="3" name="Rectangle 2"/>
+          <p:cNvPr id="6" name="TextBox 5"/>
+          <p:cNvSpPr txBox="1"/>
+          <p:nvPr/>
+        </p:nvSpPr>
+        <p:spPr>
+          <a:xfrm>
+            <a:off x="5120640" y="1143000"/>
+            <a:ext cx="3474720" cy="320040"/>
+          </a:xfrm>
+          <a:prstGeom prst="rect">
+            <a:avLst/>
+          </a:prstGeom>
+          <a:noFill/>
+        </p:spPr>
+        <p:txBody>
+          <a:bodyPr wrap="square">
+            <a:spAutoFit/>
+          </a:bodyPr>
+          <a:lstStyle/>
+          <a:p>
+            <a:pPr algn="l"/>
+            <a:r>
+              <a:rPr sz="1300" b="1">
+                <a:solidFill>
+                  <a:srgbClr val="006B6B"/>
+                </a:solidFill>
+                <a:latin typeface="微软雅黑"/>
+              </a:rPr>
+              <a:t>特殊规则补充</a:t>
+            </a:r>
+          </a:p>
+        </p:txBody>
+      </p:sp>
+      <p:sp>
+        <p:nvSpPr>
+          <p:cNvPr id="7" name="TextBox 6"/>
+          <p:cNvSpPr txBox="1"/>
+          <p:nvPr/>
+        </p:nvSpPr>
+        <p:spPr>
+          <a:xfrm>
+            <a:off x="5120640" y="1508760"/>
+            <a:ext cx="3520440" cy="2057400"/>
+          </a:xfrm>
+          <a:prstGeom prst="rect">
+            <a:avLst/>
+          </a:prstGeom>
+          <a:noFill/>
+        </p:spPr>
+        <p:txBody>
+          <a:bodyPr wrap="square">
+            <a:spAutoFit/>
+          </a:bodyPr>
+          <a:lstStyle/>
+          <a:p>
+            <a:pPr>
+              <a:lnSpc>
+                <a:spcPct val="115000"/>
+              </a:lnSpc>
+              <a:spcAft>
+                <a:spcPts val="500"/>
+              </a:spcAft>
+            </a:pPr>
+            <a:r>
+              <a:rPr sz="1080" b="1">
+                <a:solidFill>
+                  <a:srgbClr val="006B6B"/>
+                </a:solidFill>
+                <a:latin typeface="微软雅黑"/>
+              </a:rPr>
+              <a:t>• 出售量上限 = 月度竞价 + 绿电交易之和</a:t>
+            </a:r>
+          </a:p>
+          <a:p>
+            <a:pPr lvl="1">
+              <a:lnSpc>
+                <a:spcPct val="115000"/>
+              </a:lnSpc>
+              <a:spcAft>
+                <a:spcPts val="500"/>
+              </a:spcAft>
+            </a:pPr>
+            <a:r>
+              <a:rPr sz="930" b="0">
+                <a:solidFill>
+                  <a:srgbClr val="595F66"/>
+                </a:solidFill>
+                <a:latin typeface="微软雅黑"/>
+              </a:rPr>
+              <a:t>- 例：年长协40%+月竞10%+绿电0%，合同转让买入15%后持仓达55%/65%，但多日直接交易卖出上限仍为10%（不受年度长协/合同转让影响）</a:t>
+            </a:r>
+          </a:p>
+        </p:txBody>
+      </p:sp>
+      <p:sp>
+        <p:nvSpPr>
+          <p:cNvPr id="8" name="Rectangle 7"/>
           <p:cNvSpPr/>
           <p:nvPr/>
         </p:nvSpPr>
         <p:spPr>
           <a:xfrm>
-            <a:off x="0" y="1051560"/>
-            <a:ext cx="12191695" cy="54864"/>
+            <a:off x="4937760" y="3840480"/>
+            <a:ext cx="3840480" cy="1691640"/>
           </a:xfrm>
           <a:prstGeom prst="rect">
             <a:avLst/>
           </a:prstGeom>
           <a:solidFill>
-            <a:srgbClr val="E87A1E"/>
+            <a:srgbClr val="F8F8F8"/>
           </a:solidFill>
           <a:ln>
             <a:noFill/>
@@ -8948,14 +7977,14 @@
       </p:sp>
       <p:sp>
         <p:nvSpPr>
-          <p:cNvPr id="4" name="TextBox 3"/>
+          <p:cNvPr id="9" name="TextBox 8"/>
           <p:cNvSpPr txBox="1"/>
           <p:nvPr/>
         </p:nvSpPr>
         <p:spPr>
           <a:xfrm>
-            <a:off x="548640" y="164592"/>
-            <a:ext cx="10058400" cy="548640"/>
+            <a:off x="5120640" y="3977639"/>
+            <a:ext cx="3474720" cy="320040"/>
           </a:xfrm>
           <a:prstGeom prst="rect">
             <a:avLst/>
@@ -8970,62 +7999,27 @@
           <a:p>
             <a:pPr algn="l"/>
             <a:r>
-              <a:rPr sz="2800" b="1" i="0">
-                <a:solidFill>
-                  <a:srgbClr val="FFFFFF"/>
-                </a:solidFill>
-                <a:latin typeface="Microsoft YaHei"/>
-              </a:rPr>
-              <a:t>多日直接交易（下午） — 规则</a:t>
-            </a:r>
-          </a:p>
-        </p:txBody>
-      </p:sp>
-      <p:sp>
-        <p:nvSpPr>
-          <p:cNvPr id="5" name="TextBox 4"/>
+              <a:rPr sz="1300" b="1">
+                <a:solidFill>
+                  <a:srgbClr val="006B6B"/>
+                </a:solidFill>
+                <a:latin typeface="微软雅黑"/>
+              </a:rPr>
+              <a:t>市场特点</a:t>
+            </a:r>
+          </a:p>
+        </p:txBody>
+      </p:sp>
+      <p:sp>
+        <p:nvSpPr>
+          <p:cNvPr id="10" name="TextBox 9"/>
           <p:cNvSpPr txBox="1"/>
           <p:nvPr/>
         </p:nvSpPr>
         <p:spPr>
           <a:xfrm>
-            <a:off x="548640" y="658368"/>
-            <a:ext cx="10058400" cy="365760"/>
-          </a:xfrm>
-          <a:prstGeom prst="rect">
-            <a:avLst/>
-          </a:prstGeom>
-          <a:noFill/>
-        </p:spPr>
-        <p:txBody>
-          <a:bodyPr wrap="square">
-            <a:spAutoFit/>
-          </a:bodyPr>
-          <a:lstStyle/>
-          <a:p>
-            <a:pPr algn="l"/>
-            <a:r>
-              <a:rPr sz="1300" b="0" i="0">
-                <a:solidFill>
-                  <a:srgbClr val="CFDDEC"/>
-                </a:solidFill>
-                <a:latin typeface="Microsoft YaHei"/>
-              </a:rPr>
-              <a:t>06 Rules</a:t>
-            </a:r>
-          </a:p>
-        </p:txBody>
-      </p:sp>
-      <p:sp>
-        <p:nvSpPr>
-          <p:cNvPr id="6" name="TextBox 5"/>
-          <p:cNvSpPr txBox="1"/>
-          <p:nvPr/>
-        </p:nvSpPr>
-        <p:spPr>
-          <a:xfrm>
-            <a:off x="548640" y="1325880"/>
-            <a:ext cx="5852160" cy="5120640"/>
+            <a:off x="5120640" y="4343400"/>
+            <a:ext cx="3520440" cy="1097280"/>
           </a:xfrm>
           <a:prstGeom prst="rect">
             <a:avLst/>
@@ -9043,55 +8037,17 @@
                 <a:spcPct val="115000"/>
               </a:lnSpc>
               <a:spcAft>
-                <a:spcPts val="600"/>
+                <a:spcPts val="500"/>
               </a:spcAft>
             </a:pPr>
             <a:r>
-              <a:rPr sz="1350" b="1">
-                <a:solidFill>
-                  <a:srgbClr val="0B2B4D"/>
-                </a:solidFill>
-                <a:latin typeface="Microsoft YaHei"/>
-              </a:rPr>
-              <a:t>• 政策依据</a:t>
-            </a:r>
-          </a:p>
-          <a:p>
-            <a:pPr lvl="1">
-              <a:lnSpc>
-                <a:spcPct val="115000"/>
-              </a:lnSpc>
-              <a:spcAft>
-                <a:spcPts val="600"/>
-              </a:spcAft>
-            </a:pPr>
-            <a:r>
-              <a:rPr sz="1200" b="0">
-                <a:solidFill>
-                  <a:srgbClr val="595F66"/>
-                </a:solidFill>
-                <a:latin typeface="Microsoft YaHei"/>
-              </a:rPr>
-              <a:t>- 标的为当月内未来2–3天可直接交割的增量市场化电量（含发电侧新增上网、用户侧新增购电）</a:t>
-            </a:r>
-          </a:p>
-          <a:p>
-            <a:pPr lvl="1">
-              <a:lnSpc>
-                <a:spcPct val="115000"/>
-              </a:lnSpc>
-              <a:spcAft>
-                <a:spcPts val="600"/>
-              </a:spcAft>
-            </a:pPr>
-            <a:r>
-              <a:rPr sz="1200" b="0">
-                <a:solidFill>
-                  <a:srgbClr val="595F66"/>
-                </a:solidFill>
-                <a:latin typeface="Microsoft YaHei"/>
-              </a:rPr>
-              <a:t>- 面向发电交易单元、售电公司、批发直购用户、虚拟电厂等</a:t>
+              <a:rPr sz="1080" b="1">
+                <a:solidFill>
+                  <a:srgbClr val="006B6B"/>
+                </a:solidFill>
+                <a:latin typeface="微软雅黑"/>
+              </a:rPr>
+              <a:t>• 活跃度较高，新增发电侧主体参与</a:t>
             </a:r>
           </a:p>
           <a:p>
@@ -9100,189 +8056,31 @@
                 <a:spcPct val="115000"/>
               </a:lnSpc>
               <a:spcAft>
-                <a:spcPts val="600"/>
+                <a:spcPts val="500"/>
               </a:spcAft>
             </a:pPr>
             <a:r>
-              <a:rPr sz="1350" b="1">
-                <a:solidFill>
-                  <a:srgbClr val="0B2B4D"/>
-                </a:solidFill>
-                <a:latin typeface="Microsoft YaHei"/>
-              </a:rPr>
-              <a:t>• 交易目标</a:t>
-            </a:r>
-          </a:p>
-          <a:p>
-            <a:pPr lvl="1">
-              <a:lnSpc>
-                <a:spcPct val="115000"/>
-              </a:lnSpc>
-              <a:spcAft>
-                <a:spcPts val="600"/>
-              </a:spcAft>
-            </a:pPr>
-            <a:r>
-              <a:rPr sz="1200" b="0">
-                <a:solidFill>
-                  <a:srgbClr val="595F66"/>
-                </a:solidFill>
-                <a:latin typeface="Microsoft YaHei"/>
-              </a:rPr>
-              <a:t>- 衔接月度长协与日前现货，新增锁定未来数日基础电量、补齐缺口、降低偏差考核风险</a:t>
-            </a:r>
-          </a:p>
-          <a:p>
-            <a:pPr>
-              <a:lnSpc>
-                <a:spcPct val="115000"/>
-              </a:lnSpc>
-              <a:spcAft>
-                <a:spcPts val="600"/>
-              </a:spcAft>
-            </a:pPr>
-            <a:r>
-              <a:rPr sz="1350" b="1">
-                <a:solidFill>
-                  <a:srgbClr val="0B2B4D"/>
-                </a:solidFill>
-                <a:latin typeface="Microsoft YaHei"/>
-              </a:rPr>
-              <a:t>• 交易时序</a:t>
-            </a:r>
-          </a:p>
-          <a:p>
-            <a:pPr lvl="1">
-              <a:lnSpc>
-                <a:spcPct val="115000"/>
-              </a:lnSpc>
-              <a:spcAft>
-                <a:spcPts val="600"/>
-              </a:spcAft>
-            </a:pPr>
-            <a:r>
-              <a:rPr sz="1200" b="0">
-                <a:solidFill>
-                  <a:srgbClr val="595F66"/>
-                </a:solidFill>
-                <a:latin typeface="Microsoft YaHei"/>
-              </a:rPr>
-              <a:t>- 16:00–16:20 集中竞价（自由报价，可改可撤）</a:t>
-            </a:r>
-          </a:p>
-          <a:p>
-            <a:pPr lvl="1">
-              <a:lnSpc>
-                <a:spcPct val="115000"/>
-              </a:lnSpc>
-              <a:spcAft>
-                <a:spcPts val="600"/>
-              </a:spcAft>
-            </a:pPr>
-            <a:r>
-              <a:rPr sz="1200" b="0">
-                <a:solidFill>
-                  <a:srgbClr val="595F66"/>
-                </a:solidFill>
-                <a:latin typeface="Microsoft YaHei"/>
-              </a:rPr>
-              <a:t>- 16:20–16:30 静默固化、集中统一边际出清</a:t>
-            </a:r>
-          </a:p>
-          <a:p>
-            <a:pPr lvl="1">
-              <a:lnSpc>
-                <a:spcPct val="115000"/>
-              </a:lnSpc>
-              <a:spcAft>
-                <a:spcPts val="600"/>
-              </a:spcAft>
-            </a:pPr>
-            <a:r>
-              <a:rPr sz="1200" b="0">
-                <a:solidFill>
-                  <a:srgbClr val="595F66"/>
-                </a:solidFill>
-                <a:latin typeface="Microsoft YaHei"/>
-              </a:rPr>
-              <a:t>- 16:30–17:30 滚动撮合阶段</a:t>
-            </a:r>
-          </a:p>
-          <a:p>
-            <a:pPr lvl="1">
-              <a:lnSpc>
-                <a:spcPct val="115000"/>
-              </a:lnSpc>
-              <a:spcAft>
-                <a:spcPts val="600"/>
-              </a:spcAft>
-            </a:pPr>
-            <a:r>
-              <a:rPr sz="1200" b="0">
-                <a:solidFill>
-                  <a:srgbClr val="595F66"/>
-                </a:solidFill>
-                <a:latin typeface="Microsoft YaHei"/>
-              </a:rPr>
-              <a:t>- 数据爬取：PM网站「集中竞价-滚动撮合-多日直接交易」栏目</a:t>
-            </a:r>
-          </a:p>
-        </p:txBody>
-      </p:sp>
-      <p:sp>
-        <p:nvSpPr>
-          <p:cNvPr id="7" name="Rectangle 6"/>
-          <p:cNvSpPr/>
-          <p:nvPr/>
-        </p:nvSpPr>
-        <p:spPr>
-          <a:xfrm>
-            <a:off x="6629400" y="1325880"/>
-            <a:ext cx="5029200" cy="3017520"/>
-          </a:xfrm>
-          <a:prstGeom prst="rect">
-            <a:avLst/>
-          </a:prstGeom>
-          <a:solidFill>
-            <a:srgbClr val="F2F6FA"/>
-          </a:solidFill>
-          <a:ln>
-            <a:noFill/>
-          </a:ln>
-          <a:effectLst/>
-        </p:spPr>
-        <p:style>
-          <a:lnRef idx="1">
-            <a:schemeClr val="accent1"/>
-          </a:lnRef>
-          <a:fillRef idx="3">
-            <a:schemeClr val="accent1"/>
-          </a:fillRef>
-          <a:effectRef idx="2">
-            <a:schemeClr val="accent1"/>
-          </a:effectRef>
-          <a:fontRef idx="minor">
-            <a:schemeClr val="lt1"/>
-          </a:fontRef>
-        </p:style>
-        <p:txBody>
-          <a:bodyPr rtlCol="0" anchor="ctr"/>
-          <a:lstStyle/>
-          <a:p>
-            <a:pPr algn="ctr"/>
-          </a:p>
-        </p:txBody>
-      </p:sp>
-      <p:sp>
-        <p:nvSpPr>
-          <p:cNvPr id="8" name="TextBox 7"/>
+              <a:rPr sz="1080" b="1">
+                <a:solidFill>
+                  <a:srgbClr val="006B6B"/>
+                </a:solidFill>
+                <a:latin typeface="微软雅黑"/>
+              </a:rPr>
+              <a:t>• 是中长期套利的重要市场，更注重"价"</a:t>
+            </a:r>
+          </a:p>
+        </p:txBody>
+      </p:sp>
+      <p:sp>
+        <p:nvSpPr>
+          <p:cNvPr id="11" name="TextBox 10"/>
           <p:cNvSpPr txBox="1"/>
           <p:nvPr/>
         </p:nvSpPr>
         <p:spPr>
           <a:xfrm>
-            <a:off x="6903720" y="1508760"/>
-            <a:ext cx="4572000" cy="365760"/>
+            <a:off x="8641080" y="6537960"/>
+            <a:ext cx="365760" cy="274320"/>
           </a:xfrm>
           <a:prstGeom prst="rect">
             <a:avLst/>
@@ -9295,330 +8093,15 @@
           </a:bodyPr>
           <a:lstStyle/>
           <a:p>
-            <a:pPr algn="l"/>
-            <a:r>
-              <a:rPr sz="1500" b="1" i="0">
-                <a:solidFill>
-                  <a:srgbClr val="0B2B4D"/>
-                </a:solidFill>
-                <a:latin typeface="Microsoft YaHei"/>
-              </a:rPr>
-              <a:t>特殊规则补充</a:t>
-            </a:r>
-          </a:p>
-        </p:txBody>
-      </p:sp>
-      <p:sp>
-        <p:nvSpPr>
-          <p:cNvPr id="9" name="TextBox 8"/>
-          <p:cNvSpPr txBox="1"/>
-          <p:nvPr/>
-        </p:nvSpPr>
-        <p:spPr>
-          <a:xfrm>
-            <a:off x="6903720" y="1965960"/>
-            <a:ext cx="4572000" cy="2286000"/>
-          </a:xfrm>
-          <a:prstGeom prst="rect">
-            <a:avLst/>
-          </a:prstGeom>
-          <a:noFill/>
-        </p:spPr>
-        <p:txBody>
-          <a:bodyPr wrap="square">
-            <a:spAutoFit/>
-          </a:bodyPr>
-          <a:lstStyle/>
-          <a:p>
-            <a:pPr>
-              <a:lnSpc>
-                <a:spcPct val="115000"/>
-              </a:lnSpc>
-              <a:spcAft>
-                <a:spcPts val="600"/>
-              </a:spcAft>
-            </a:pPr>
-            <a:r>
-              <a:rPr sz="1250" b="1">
-                <a:solidFill>
-                  <a:srgbClr val="0B2B4D"/>
-                </a:solidFill>
-                <a:latin typeface="Microsoft YaHei"/>
-              </a:rPr>
-              <a:t>• 出售量上限 = 月度竞价 + 绿电交易 之和</a:t>
-            </a:r>
-          </a:p>
-          <a:p>
-            <a:pPr lvl="1">
-              <a:lnSpc>
-                <a:spcPct val="115000"/>
-              </a:lnSpc>
-              <a:spcAft>
-                <a:spcPts val="600"/>
-              </a:spcAft>
-            </a:pPr>
+            <a:pPr algn="r"/>
             <a:r>
               <a:rPr sz="1100" b="0">
                 <a:solidFill>
                   <a:srgbClr val="595F66"/>
                 </a:solidFill>
-                <a:latin typeface="Microsoft YaHei"/>
-              </a:rPr>
-              <a:t>- 例：年长协40% + 月竞10% + 绿电0%，合同转让买入15%后总持仓达55%/65%，但多日直接交易卖出上限仍为10%（不受年度长协/合同转让影响）</a:t>
-            </a:r>
-          </a:p>
-        </p:txBody>
-      </p:sp>
-      <p:sp>
-        <p:nvSpPr>
-          <p:cNvPr id="10" name="Rectangle 9"/>
-          <p:cNvSpPr/>
-          <p:nvPr/>
-        </p:nvSpPr>
-        <p:spPr>
-          <a:xfrm>
-            <a:off x="6629400" y="4572000"/>
-            <a:ext cx="5029200" cy="1783080"/>
-          </a:xfrm>
-          <a:prstGeom prst="rect">
-            <a:avLst/>
-          </a:prstGeom>
-          <a:solidFill>
-            <a:srgbClr val="F2F6FA"/>
-          </a:solidFill>
-          <a:ln>
-            <a:noFill/>
-          </a:ln>
-          <a:effectLst/>
-        </p:spPr>
-        <p:style>
-          <a:lnRef idx="1">
-            <a:schemeClr val="accent1"/>
-          </a:lnRef>
-          <a:fillRef idx="3">
-            <a:schemeClr val="accent1"/>
-          </a:fillRef>
-          <a:effectRef idx="2">
-            <a:schemeClr val="accent1"/>
-          </a:effectRef>
-          <a:fontRef idx="minor">
-            <a:schemeClr val="lt1"/>
-          </a:fontRef>
-        </p:style>
-        <p:txBody>
-          <a:bodyPr rtlCol="0" anchor="ctr"/>
-          <a:lstStyle/>
-          <a:p>
-            <a:pPr algn="ctr"/>
-          </a:p>
-        </p:txBody>
-      </p:sp>
-      <p:sp>
-        <p:nvSpPr>
-          <p:cNvPr id="11" name="TextBox 10"/>
-          <p:cNvSpPr txBox="1"/>
-          <p:nvPr/>
-        </p:nvSpPr>
-        <p:spPr>
-          <a:xfrm>
-            <a:off x="6903720" y="4754880"/>
-            <a:ext cx="4572000" cy="365760"/>
-          </a:xfrm>
-          <a:prstGeom prst="rect">
-            <a:avLst/>
-          </a:prstGeom>
-          <a:noFill/>
-        </p:spPr>
-        <p:txBody>
-          <a:bodyPr wrap="square">
-            <a:spAutoFit/>
-          </a:bodyPr>
-          <a:lstStyle/>
-          <a:p>
-            <a:pPr algn="l"/>
-            <a:r>
-              <a:rPr sz="1500" b="1" i="0">
-                <a:solidFill>
-                  <a:srgbClr val="0B2B4D"/>
-                </a:solidFill>
-                <a:latin typeface="Microsoft YaHei"/>
-              </a:rPr>
-              <a:t>市场特点</a:t>
-            </a:r>
-          </a:p>
-        </p:txBody>
-      </p:sp>
-      <p:sp>
-        <p:nvSpPr>
-          <p:cNvPr id="12" name="TextBox 11"/>
-          <p:cNvSpPr txBox="1"/>
-          <p:nvPr/>
-        </p:nvSpPr>
-        <p:spPr>
-          <a:xfrm>
-            <a:off x="6903720" y="5166360"/>
-            <a:ext cx="4572000" cy="1097280"/>
-          </a:xfrm>
-          <a:prstGeom prst="rect">
-            <a:avLst/>
-          </a:prstGeom>
-          <a:noFill/>
-        </p:spPr>
-        <p:txBody>
-          <a:bodyPr wrap="square">
-            <a:spAutoFit/>
-          </a:bodyPr>
-          <a:lstStyle/>
-          <a:p>
-            <a:pPr>
-              <a:lnSpc>
-                <a:spcPct val="115000"/>
-              </a:lnSpc>
-              <a:spcAft>
-                <a:spcPts val="600"/>
-              </a:spcAft>
-            </a:pPr>
-            <a:r>
-              <a:rPr sz="1250" b="1">
-                <a:solidFill>
-                  <a:srgbClr val="0B2B4D"/>
-                </a:solidFill>
-                <a:latin typeface="Microsoft YaHei"/>
-              </a:rPr>
-              <a:t>• 活跃度较高，新增发电侧主体参与</a:t>
-            </a:r>
-          </a:p>
-          <a:p>
-            <a:pPr>
-              <a:lnSpc>
-                <a:spcPct val="115000"/>
-              </a:lnSpc>
-              <a:spcAft>
-                <a:spcPts val="600"/>
-              </a:spcAft>
-            </a:pPr>
-            <a:r>
-              <a:rPr sz="1250" b="1">
-                <a:solidFill>
-                  <a:srgbClr val="0B2B4D"/>
-                </a:solidFill>
-                <a:latin typeface="Microsoft YaHei"/>
-              </a:rPr>
-              <a:t>• 是中长期套利的重要市场，更注重“价”</a:t>
-            </a:r>
-          </a:p>
-        </p:txBody>
-      </p:sp>
-      <p:sp>
-        <p:nvSpPr>
-          <p:cNvPr id="13" name="Rectangle 12"/>
-          <p:cNvSpPr/>
-          <p:nvPr/>
-        </p:nvSpPr>
-        <p:spPr>
-          <a:xfrm>
-            <a:off x="0" y="6565392"/>
-            <a:ext cx="12191695" cy="292608"/>
-          </a:xfrm>
-          <a:prstGeom prst="rect">
-            <a:avLst/>
-          </a:prstGeom>
-          <a:solidFill>
-            <a:srgbClr val="0B2B4D"/>
-          </a:solidFill>
-          <a:ln>
-            <a:noFill/>
-          </a:ln>
-          <a:effectLst/>
-        </p:spPr>
-        <p:style>
-          <a:lnRef idx="1">
-            <a:schemeClr val="accent1"/>
-          </a:lnRef>
-          <a:fillRef idx="3">
-            <a:schemeClr val="accent1"/>
-          </a:fillRef>
-          <a:effectRef idx="2">
-            <a:schemeClr val="accent1"/>
-          </a:effectRef>
-          <a:fontRef idx="minor">
-            <a:schemeClr val="lt1"/>
-          </a:fontRef>
-        </p:style>
-        <p:txBody>
-          <a:bodyPr rtlCol="0" anchor="ctr"/>
-          <a:lstStyle/>
-          <a:p>
-            <a:pPr algn="ctr"/>
-          </a:p>
-        </p:txBody>
-      </p:sp>
-      <p:sp>
-        <p:nvSpPr>
-          <p:cNvPr id="14" name="TextBox 13"/>
-          <p:cNvSpPr txBox="1"/>
-          <p:nvPr/>
-        </p:nvSpPr>
-        <p:spPr>
-          <a:xfrm>
-            <a:off x="365760" y="6547104"/>
-            <a:ext cx="5486400" cy="274320"/>
-          </a:xfrm>
-          <a:prstGeom prst="rect">
-            <a:avLst/>
-          </a:prstGeom>
-          <a:noFill/>
-        </p:spPr>
-        <p:txBody>
-          <a:bodyPr wrap="square">
-            <a:spAutoFit/>
-          </a:bodyPr>
-          <a:lstStyle/>
-          <a:p>
-            <a:pPr algn="l"/>
-            <a:r>
-              <a:rPr sz="1000" b="0" i="0">
-                <a:solidFill>
-                  <a:srgbClr val="FFFFFF"/>
-                </a:solidFill>
-                <a:latin typeface="Microsoft YaHei"/>
-              </a:rPr>
-              <a:t>中长期交易基本说明与业务逻辑</a:t>
-            </a:r>
-          </a:p>
-        </p:txBody>
-      </p:sp>
-      <p:sp>
-        <p:nvSpPr>
-          <p:cNvPr id="15" name="TextBox 14"/>
-          <p:cNvSpPr txBox="1"/>
-          <p:nvPr/>
-        </p:nvSpPr>
-        <p:spPr>
-          <a:xfrm>
-            <a:off x="11094415" y="6547104"/>
-            <a:ext cx="731520" cy="274320"/>
-          </a:xfrm>
-          <a:prstGeom prst="rect">
-            <a:avLst/>
-          </a:prstGeom>
-          <a:noFill/>
-        </p:spPr>
-        <p:txBody>
-          <a:bodyPr wrap="square">
-            <a:spAutoFit/>
-          </a:bodyPr>
-          <a:lstStyle/>
-          <a:p>
-            <a:pPr algn="r"/>
-            <a:r>
-              <a:rPr sz="1000" b="0" i="0">
-                <a:solidFill>
-                  <a:srgbClr val="FFFFFF"/>
-                </a:solidFill>
-                <a:latin typeface="Microsoft YaHei"/>
-              </a:rPr>
-              <a:t>08 / 10</a:t>
+                <a:latin typeface="微软雅黑"/>
+              </a:rPr>
+              <a:t>8</a:t>
             </a:r>
           </a:p>
         </p:txBody>
@@ -9649,22 +8132,81 @@
         <p:nvPr/>
       </p:nvGrpSpPr>
       <p:grpSpPr/>
-      <p:sp>
-        <p:nvSpPr>
-          <p:cNvPr id="2" name="Rectangle 1"/>
+      <p:pic>
+        <p:nvPicPr>
+          <p:cNvPr id="2" name="Picture 1" descr="banner.png"/>
+          <p:cNvPicPr>
+            <a:picLocks noChangeAspect="1"/>
+          </p:cNvPicPr>
+          <p:nvPr/>
+        </p:nvPicPr>
+        <p:blipFill>
+          <a:blip r:embed="rId2"/>
+          <a:stretch>
+            <a:fillRect/>
+          </a:stretch>
+        </p:blipFill>
+        <p:spPr>
+          <a:xfrm>
+            <a:off x="0" y="0"/>
+            <a:ext cx="9144000" cy="832104"/>
+          </a:xfrm>
+          <a:prstGeom prst="rect">
+            <a:avLst/>
+          </a:prstGeom>
+        </p:spPr>
+      </p:pic>
+      <p:sp>
+        <p:nvSpPr>
+          <p:cNvPr id="3" name="TextBox 2"/>
+          <p:cNvSpPr txBox="1"/>
+          <p:nvPr/>
+        </p:nvSpPr>
+        <p:spPr>
+          <a:xfrm>
+            <a:off x="320040" y="109728"/>
+            <a:ext cx="7315200" cy="640080"/>
+          </a:xfrm>
+          <a:prstGeom prst="rect">
+            <a:avLst/>
+          </a:prstGeom>
+          <a:noFill/>
+        </p:spPr>
+        <p:txBody>
+          <a:bodyPr wrap="square">
+            <a:spAutoFit/>
+          </a:bodyPr>
+          <a:lstStyle/>
+          <a:p>
+            <a:pPr algn="l"/>
+            <a:r>
+              <a:rPr sz="2000" b="1">
+                <a:solidFill>
+                  <a:srgbClr val="008080"/>
+                </a:solidFill>
+                <a:latin typeface="微软雅黑"/>
+              </a:rPr>
+              <a:t>多日直接交易 — 交易策略</a:t>
+            </a:r>
+          </a:p>
+        </p:txBody>
+      </p:sp>
+      <p:sp>
+        <p:nvSpPr>
+          <p:cNvPr id="4" name="Rectangle 3"/>
           <p:cNvSpPr/>
           <p:nvPr/>
         </p:nvSpPr>
         <p:spPr>
           <a:xfrm>
-            <a:off x="0" y="0"/>
-            <a:ext cx="12191695" cy="1051560"/>
+            <a:off x="365760" y="1005840"/>
+            <a:ext cx="8412480" cy="548640"/>
           </a:xfrm>
           <a:prstGeom prst="rect">
             <a:avLst/>
           </a:prstGeom>
           <a:solidFill>
-            <a:srgbClr val="0B2B4D"/>
+            <a:srgbClr val="F8F8F8"/>
           </a:solidFill>
           <a:ln>
             <a:noFill/>
@@ -9695,20 +8237,20 @@
       </p:sp>
       <p:sp>
         <p:nvSpPr>
-          <p:cNvPr id="3" name="Rectangle 2"/>
+          <p:cNvPr id="5" name="Rectangle 4"/>
           <p:cNvSpPr/>
           <p:nvPr/>
         </p:nvSpPr>
         <p:spPr>
           <a:xfrm>
-            <a:off x="0" y="1051560"/>
-            <a:ext cx="12191695" cy="54864"/>
+            <a:off x="365760" y="1005840"/>
+            <a:ext cx="50800" cy="548640"/>
           </a:xfrm>
           <a:prstGeom prst="rect">
             <a:avLst/>
           </a:prstGeom>
           <a:solidFill>
-            <a:srgbClr val="E87A1E"/>
+            <a:srgbClr val="008080"/>
           </a:solidFill>
           <a:ln>
             <a:noFill/>
@@ -9739,14 +8281,14 @@
       </p:sp>
       <p:sp>
         <p:nvSpPr>
-          <p:cNvPr id="4" name="TextBox 3"/>
+          <p:cNvPr id="6" name="TextBox 5"/>
           <p:cNvSpPr txBox="1"/>
           <p:nvPr/>
         </p:nvSpPr>
         <p:spPr>
           <a:xfrm>
-            <a:off x="548640" y="164592"/>
-            <a:ext cx="10058400" cy="548640"/>
+            <a:off x="594360" y="1069848"/>
+            <a:ext cx="8046720" cy="457200"/>
           </a:xfrm>
           <a:prstGeom prst="rect">
             <a:avLst/>
@@ -9761,93 +8303,14 @@
           <a:p>
             <a:pPr algn="l"/>
             <a:r>
-              <a:rPr sz="2800" b="1" i="0">
-                <a:solidFill>
-                  <a:srgbClr val="FFFFFF"/>
-                </a:solidFill>
-                <a:latin typeface="Microsoft YaHei"/>
-              </a:rPr>
-              <a:t>多日直接交易 — 交易策略</a:t>
-            </a:r>
-          </a:p>
-        </p:txBody>
-      </p:sp>
-      <p:sp>
-        <p:nvSpPr>
-          <p:cNvPr id="5" name="TextBox 4"/>
-          <p:cNvSpPr txBox="1"/>
-          <p:nvPr/>
-        </p:nvSpPr>
-        <p:spPr>
-          <a:xfrm>
-            <a:off x="548640" y="658368"/>
-            <a:ext cx="10058400" cy="365760"/>
-          </a:xfrm>
-          <a:prstGeom prst="rect">
-            <a:avLst/>
-          </a:prstGeom>
-          <a:noFill/>
-        </p:spPr>
-        <p:txBody>
-          <a:bodyPr wrap="square">
-            <a:spAutoFit/>
-          </a:bodyPr>
-          <a:lstStyle/>
-          <a:p>
-            <a:pPr algn="l"/>
-            <a:r>
-              <a:rPr sz="1300" b="0" i="0">
-                <a:solidFill>
-                  <a:srgbClr val="CFDDEC"/>
-                </a:solidFill>
-                <a:latin typeface="Microsoft YaHei"/>
-              </a:rPr>
-              <a:t>07 Strategy</a:t>
-            </a:r>
-          </a:p>
-        </p:txBody>
-      </p:sp>
-      <p:sp>
-        <p:nvSpPr>
-          <p:cNvPr id="6" name="Rectangle 5"/>
-          <p:cNvSpPr/>
-          <p:nvPr/>
-        </p:nvSpPr>
-        <p:spPr>
-          <a:xfrm>
-            <a:off x="548640" y="1371600"/>
-            <a:ext cx="11064240" cy="777240"/>
-          </a:xfrm>
-          <a:prstGeom prst="rect">
-            <a:avLst/>
-          </a:prstGeom>
-          <a:solidFill>
-            <a:srgbClr val="F2F6FA"/>
-          </a:solidFill>
-          <a:ln>
-            <a:noFill/>
-          </a:ln>
-          <a:effectLst/>
-        </p:spPr>
-        <p:style>
-          <a:lnRef idx="1">
-            <a:schemeClr val="accent1"/>
-          </a:lnRef>
-          <a:fillRef idx="3">
-            <a:schemeClr val="accent1"/>
-          </a:fillRef>
-          <a:effectRef idx="2">
-            <a:schemeClr val="accent1"/>
-          </a:effectRef>
-          <a:fontRef idx="minor">
-            <a:schemeClr val="lt1"/>
-          </a:fontRef>
-        </p:style>
-        <p:txBody>
-          <a:bodyPr rtlCol="0" anchor="ctr"/>
-          <a:lstStyle/>
-          <a:p>
-            <a:pPr algn="ctr"/>
+              <a:rPr sz="1300" b="1">
+                <a:solidFill>
+                  <a:srgbClr val="006B6B"/>
+                </a:solidFill>
+                <a:latin typeface="微软雅黑"/>
+              </a:rPr>
+              <a:t>盈亏线 = 现货价格_预测；现货价格_预测 &gt; 当前报价 → 买入，反之 → 卖出</a:t>
+            </a:r>
           </a:p>
         </p:txBody>
       </p:sp>
@@ -9859,43 +8322,8 @@
         </p:nvSpPr>
         <p:spPr>
           <a:xfrm>
-            <a:off x="777240" y="1481328"/>
-            <a:ext cx="10607040" cy="548640"/>
-          </a:xfrm>
-          <a:prstGeom prst="rect">
-            <a:avLst/>
-          </a:prstGeom>
-          <a:noFill/>
-        </p:spPr>
-        <p:txBody>
-          <a:bodyPr wrap="square">
-            <a:spAutoFit/>
-          </a:bodyPr>
-          <a:lstStyle/>
-          <a:p>
-            <a:pPr algn="l"/>
-            <a:r>
-              <a:rPr sz="1450" b="1" i="0">
-                <a:solidFill>
-                  <a:srgbClr val="0B2B4D"/>
-                </a:solidFill>
-                <a:latin typeface="Microsoft YaHei"/>
-              </a:rPr>
-              <a:t>盈亏线 = 现货价格_预测；现货价格_预测 &gt; 当前报价 → 买入，反之 → 卖出</a:t>
-            </a:r>
-          </a:p>
-        </p:txBody>
-      </p:sp>
-      <p:sp>
-        <p:nvSpPr>
-          <p:cNvPr id="8" name="TextBox 7"/>
-          <p:cNvSpPr txBox="1"/>
-          <p:nvPr/>
-        </p:nvSpPr>
-        <p:spPr>
-          <a:xfrm>
-            <a:off x="548640" y="2331720"/>
-            <a:ext cx="11064240" cy="3931920"/>
+            <a:off x="365760" y="1828800"/>
+            <a:ext cx="8412480" cy="4389120"/>
           </a:xfrm>
           <a:prstGeom prst="rect">
             <a:avLst/>
@@ -9913,15 +8341,15 @@
                 <a:spcPct val="115000"/>
               </a:lnSpc>
               <a:spcAft>
-                <a:spcPts val="600"/>
+                <a:spcPts val="500"/>
               </a:spcAft>
             </a:pPr>
             <a:r>
-              <a:rPr sz="1450" b="1">
-                <a:solidFill>
-                  <a:srgbClr val="0B2B4D"/>
-                </a:solidFill>
-                <a:latin typeface="Microsoft YaHei"/>
+              <a:rPr sz="1300" b="1">
+                <a:solidFill>
+                  <a:srgbClr val="006B6B"/>
+                </a:solidFill>
+                <a:latin typeface="微软雅黑"/>
               </a:rPr>
               <a:t>• 集中竞价阶段</a:t>
             </a:r>
@@ -9932,15 +8360,15 @@
                 <a:spcPct val="115000"/>
               </a:lnSpc>
               <a:spcAft>
-                <a:spcPts val="600"/>
+                <a:spcPts val="500"/>
               </a:spcAft>
             </a:pPr>
             <a:r>
-              <a:rPr sz="1300" b="0">
+              <a:rPr sz="1150" b="0">
                 <a:solidFill>
                   <a:srgbClr val="595F66"/>
                 </a:solidFill>
-                <a:latin typeface="Microsoft YaHei"/>
+                <a:latin typeface="微软雅黑"/>
               </a:rPr>
               <a:t>- 结合已有持仓（含上午合同转让结果）规划当前市场可交易总量</a:t>
             </a:r>
@@ -9951,17 +8379,17 @@
                 <a:spcPct val="115000"/>
               </a:lnSpc>
               <a:spcAft>
-                <a:spcPts val="600"/>
+                <a:spcPts val="500"/>
               </a:spcAft>
             </a:pPr>
             <a:r>
-              <a:rPr sz="1300" b="0">
+              <a:rPr sz="1150" b="0">
                 <a:solidFill>
                   <a:srgbClr val="595F66"/>
                 </a:solidFill>
-                <a:latin typeface="Microsoft YaHei"/>
-              </a:rPr>
-              <a:t>- 例：持仓50%+月竞10%，预知实时结算电量20%更便宜，则可交易空间 = 100%−50%−10%−20% = 20%</a:t>
+                <a:latin typeface="微软雅黑"/>
+              </a:rPr>
+              <a:t>- 例：持仓50%+月竞10%，预知实时结算电量20%更便宜，则可交易空间=100%−50%−10%−20%=20%</a:t>
             </a:r>
           </a:p>
           <a:p>
@@ -9970,17 +8398,17 @@
                 <a:spcPct val="115000"/>
               </a:lnSpc>
               <a:spcAft>
-                <a:spcPts val="600"/>
+                <a:spcPts val="500"/>
               </a:spcAft>
             </a:pPr>
             <a:r>
-              <a:rPr sz="1300" b="0">
+              <a:rPr sz="1150" b="0">
                 <a:solidFill>
                   <a:srgbClr val="595F66"/>
                 </a:solidFill>
-                <a:latin typeface="Microsoft YaHei"/>
-              </a:rPr>
-              <a:t>- 粗判集中/滚动价格趋势，按个人偏好分配集中竞价电量（如拿出80%可交易量），竞价电价略低于预测价</a:t>
+                <a:latin typeface="微软雅黑"/>
+              </a:rPr>
+              <a:t>- 粗判集中/滚动价格趋势，按个人偏好分配集中竞价电量，竞价电价略低于预测价</a:t>
             </a:r>
           </a:p>
           <a:p>
@@ -9989,15 +8417,15 @@
                 <a:spcPct val="115000"/>
               </a:lnSpc>
               <a:spcAft>
-                <a:spcPts val="600"/>
+                <a:spcPts val="500"/>
               </a:spcAft>
             </a:pPr>
             <a:r>
-              <a:rPr sz="1450" b="1">
-                <a:solidFill>
-                  <a:srgbClr val="0B2B4D"/>
-                </a:solidFill>
-                <a:latin typeface="Microsoft YaHei"/>
+              <a:rPr sz="1300" b="1">
+                <a:solidFill>
+                  <a:srgbClr val="006B6B"/>
+                </a:solidFill>
+                <a:latin typeface="微软雅黑"/>
               </a:rPr>
               <a:t>• 滚动撮合阶段</a:t>
             </a:r>
@@ -10008,15 +8436,15 @@
                 <a:spcPct val="115000"/>
               </a:lnSpc>
               <a:spcAft>
-                <a:spcPts val="600"/>
+                <a:spcPts val="500"/>
               </a:spcAft>
             </a:pPr>
             <a:r>
-              <a:rPr sz="1300" b="0">
+              <a:rPr sz="1150" b="0">
                 <a:solidFill>
                   <a:srgbClr val="595F66"/>
                 </a:solidFill>
-                <a:latin typeface="Microsoft YaHei"/>
+                <a:latin typeface="微软雅黑"/>
               </a:rPr>
               <a:t>- 成交量小，部分交易员只盯关键点位或直接放弃该阶段</a:t>
             </a:r>
@@ -10027,94 +8455,31 @@
                 <a:spcPct val="115000"/>
               </a:lnSpc>
               <a:spcAft>
-                <a:spcPts val="600"/>
+                <a:spcPts val="500"/>
               </a:spcAft>
             </a:pPr>
             <a:r>
-              <a:rPr sz="1300" b="0">
+              <a:rPr sz="1150" b="0">
                 <a:solidFill>
                   <a:srgbClr val="595F66"/>
                 </a:solidFill>
-                <a:latin typeface="Microsoft YaHei"/>
-              </a:rPr>
-              <a:t>- 基于已有出清量，挂出比预测价略低的报价</a:t>
-            </a:r>
-          </a:p>
-          <a:p>
-            <a:pPr lvl="1">
-              <a:lnSpc>
-                <a:spcPct val="115000"/>
-              </a:lnSpc>
-              <a:spcAft>
-                <a:spcPts val="600"/>
-              </a:spcAft>
-            </a:pPr>
-            <a:r>
-              <a:rPr sz="1300" b="0">
-                <a:solidFill>
-                  <a:srgbClr val="595F66"/>
-                </a:solidFill>
-                <a:latin typeface="Microsoft YaHei"/>
-              </a:rPr>
-              <a:t>- 其余经验与合同电量转让市场一致</a:t>
-            </a:r>
-          </a:p>
-        </p:txBody>
-      </p:sp>
-      <p:sp>
-        <p:nvSpPr>
-          <p:cNvPr id="9" name="Rectangle 8"/>
-          <p:cNvSpPr/>
-          <p:nvPr/>
-        </p:nvSpPr>
-        <p:spPr>
-          <a:xfrm>
-            <a:off x="0" y="6565392"/>
-            <a:ext cx="12191695" cy="292608"/>
-          </a:xfrm>
-          <a:prstGeom prst="rect">
-            <a:avLst/>
-          </a:prstGeom>
-          <a:solidFill>
-            <a:srgbClr val="0B2B4D"/>
-          </a:solidFill>
-          <a:ln>
-            <a:noFill/>
-          </a:ln>
-          <a:effectLst/>
-        </p:spPr>
-        <p:style>
-          <a:lnRef idx="1">
-            <a:schemeClr val="accent1"/>
-          </a:lnRef>
-          <a:fillRef idx="3">
-            <a:schemeClr val="accent1"/>
-          </a:fillRef>
-          <a:effectRef idx="2">
-            <a:schemeClr val="accent1"/>
-          </a:effectRef>
-          <a:fontRef idx="minor">
-            <a:schemeClr val="lt1"/>
-          </a:fontRef>
-        </p:style>
-        <p:txBody>
-          <a:bodyPr rtlCol="0" anchor="ctr"/>
-          <a:lstStyle/>
-          <a:p>
-            <a:pPr algn="ctr"/>
-          </a:p>
-        </p:txBody>
-      </p:sp>
-      <p:sp>
-        <p:nvSpPr>
-          <p:cNvPr id="10" name="TextBox 9"/>
+                <a:latin typeface="微软雅黑"/>
+              </a:rPr>
+              <a:t>- 基于已有出清量，挂出比预测价略低的报价；其余经验与合同电量转让市场一致</a:t>
+            </a:r>
+          </a:p>
+        </p:txBody>
+      </p:sp>
+      <p:sp>
+        <p:nvSpPr>
+          <p:cNvPr id="8" name="TextBox 7"/>
           <p:cNvSpPr txBox="1"/>
           <p:nvPr/>
         </p:nvSpPr>
         <p:spPr>
           <a:xfrm>
-            <a:off x="365760" y="6547104"/>
-            <a:ext cx="5486400" cy="274320"/>
+            <a:off x="8641080" y="6537960"/>
+            <a:ext cx="365760" cy="274320"/>
           </a:xfrm>
           <a:prstGeom prst="rect">
             <a:avLst/>
@@ -10127,50 +8492,15 @@
           </a:bodyPr>
           <a:lstStyle/>
           <a:p>
-            <a:pPr algn="l"/>
-            <a:r>
-              <a:rPr sz="1000" b="0" i="0">
-                <a:solidFill>
-                  <a:srgbClr val="FFFFFF"/>
-                </a:solidFill>
-                <a:latin typeface="Microsoft YaHei"/>
-              </a:rPr>
-              <a:t>中长期交易基本说明与业务逻辑</a:t>
-            </a:r>
-          </a:p>
-        </p:txBody>
-      </p:sp>
-      <p:sp>
-        <p:nvSpPr>
-          <p:cNvPr id="11" name="TextBox 10"/>
-          <p:cNvSpPr txBox="1"/>
-          <p:nvPr/>
-        </p:nvSpPr>
-        <p:spPr>
-          <a:xfrm>
-            <a:off x="11094415" y="6547104"/>
-            <a:ext cx="731520" cy="274320"/>
-          </a:xfrm>
-          <a:prstGeom prst="rect">
-            <a:avLst/>
-          </a:prstGeom>
-          <a:noFill/>
-        </p:spPr>
-        <p:txBody>
-          <a:bodyPr wrap="square">
-            <a:spAutoFit/>
-          </a:bodyPr>
-          <a:lstStyle/>
-          <a:p>
             <a:pPr algn="r"/>
             <a:r>
-              <a:rPr sz="1000" b="0" i="0">
-                <a:solidFill>
-                  <a:srgbClr val="FFFFFF"/>
-                </a:solidFill>
-                <a:latin typeface="Microsoft YaHei"/>
-              </a:rPr>
-              <a:t>09 / 10</a:t>
+              <a:rPr sz="1100" b="0">
+                <a:solidFill>
+                  <a:srgbClr val="595F66"/>
+                </a:solidFill>
+                <a:latin typeface="微软雅黑"/>
+              </a:rPr>
+              <a:t>9</a:t>
             </a:r>
           </a:p>
         </p:txBody>
